--- a/conferences/cornell_spring_wip/llm_summary_validation_presentation.pptx
+++ b/conferences/cornell_spring_wip/llm_summary_validation_presentation.pptx
@@ -22,10 +22,10 @@
     <p:sldId id="306" r:id="rId13"/>
     <p:sldId id="294" r:id="rId14"/>
     <p:sldId id="261" r:id="rId15"/>
-    <p:sldId id="262" r:id="rId16"/>
-    <p:sldId id="300" r:id="rId17"/>
-    <p:sldId id="301" r:id="rId18"/>
-    <p:sldId id="305" r:id="rId19"/>
+    <p:sldId id="300" r:id="rId16"/>
+    <p:sldId id="301" r:id="rId17"/>
+    <p:sldId id="305" r:id="rId18"/>
+    <p:sldId id="11092" r:id="rId19"/>
     <p:sldId id="11071" r:id="rId20"/>
     <p:sldId id="11072" r:id="rId21"/>
     <p:sldId id="11073" r:id="rId22"/>
@@ -146,6 +146,268 @@
 </p:presentation>
 </file>
 
+<file path=ppt/revisionInfo.xml><?xml version="1.0" encoding="utf-8"?>
+<p1510:revInfo xmlns:a="http://schemas.openxmlformats.org/drawingml/2006/main" xmlns:r="http://schemas.openxmlformats.org/officeDocument/2006/relationships" xmlns:p1510="http://schemas.microsoft.com/office/powerpoint/2015/10/main">
+  <p1510:revLst>
+    <p1510:client id="{DF25E5BF-D19E-463C-9870-DB282E9B171D}" v="13" dt="2026-05-03T17:56:31.459"/>
+  </p1510:revLst>
+</p1510:revInfo>
+</file>
+
+<file path=ppt/changesInfos/changesInfo1.xml><?xml version="1.0" encoding="utf-8"?>
+<pc:chgInfo xmlns:a="http://schemas.openxmlformats.org/drawingml/2006/main" xmlns:r="http://schemas.openxmlformats.org/officeDocument/2006/relationships" xmlns:ac="http://schemas.microsoft.com/office/drawing/2013/main/command" xmlns:pc="http://schemas.microsoft.com/office/powerpoint/2013/main/command">
+  <pc:docChgLst>
+    <pc:chgData name="James, Robert" userId="2289ddc5-885d-4588-a312-b6745df56974" providerId="ADAL" clId="{DF25E5BF-D19E-463C-9870-DB282E9B171D}"/>
+    <pc:docChg chg="custSel addSld delSld modSld">
+      <pc:chgData name="James, Robert" userId="2289ddc5-885d-4588-a312-b6745df56974" providerId="ADAL" clId="{DF25E5BF-D19E-463C-9870-DB282E9B171D}" dt="2026-05-03T17:58:53.895" v="240" actId="20577"/>
+      <pc:docMkLst>
+        <pc:docMk/>
+      </pc:docMkLst>
+      <pc:sldChg chg="del">
+        <pc:chgData name="James, Robert" userId="2289ddc5-885d-4588-a312-b6745df56974" providerId="ADAL" clId="{DF25E5BF-D19E-463C-9870-DB282E9B171D}" dt="2026-05-03T17:57:12.373" v="194" actId="47"/>
+        <pc:sldMkLst>
+          <pc:docMk/>
+          <pc:sldMk cId="0" sldId="262"/>
+        </pc:sldMkLst>
+      </pc:sldChg>
+      <pc:sldChg chg="addSp delSp modSp mod">
+        <pc:chgData name="James, Robert" userId="2289ddc5-885d-4588-a312-b6745df56974" providerId="ADAL" clId="{DF25E5BF-D19E-463C-9870-DB282E9B171D}" dt="2026-05-03T17:54:39.242" v="165" actId="1076"/>
+        <pc:sldMkLst>
+          <pc:docMk/>
+          <pc:sldMk cId="0" sldId="278"/>
+        </pc:sldMkLst>
+        <pc:spChg chg="del mod">
+          <ac:chgData name="James, Robert" userId="2289ddc5-885d-4588-a312-b6745df56974" providerId="ADAL" clId="{DF25E5BF-D19E-463C-9870-DB282E9B171D}" dt="2026-05-03T17:54:16.464" v="147" actId="478"/>
+          <ac:spMkLst>
+            <pc:docMk/>
+            <pc:sldMk cId="0" sldId="278"/>
+            <ac:spMk id="2" creationId="{00000000-0000-0000-0000-000000000000}"/>
+          </ac:spMkLst>
+        </pc:spChg>
+        <pc:spChg chg="mod">
+          <ac:chgData name="James, Robert" userId="2289ddc5-885d-4588-a312-b6745df56974" providerId="ADAL" clId="{DF25E5BF-D19E-463C-9870-DB282E9B171D}" dt="2026-05-03T17:52:49.787" v="111" actId="20577"/>
+          <ac:spMkLst>
+            <pc:docMk/>
+            <pc:sldMk cId="0" sldId="278"/>
+            <ac:spMk id="3" creationId="{00000000-0000-0000-0000-000000000000}"/>
+          </ac:spMkLst>
+        </pc:spChg>
+        <pc:spChg chg="add mod">
+          <ac:chgData name="James, Robert" userId="2289ddc5-885d-4588-a312-b6745df56974" providerId="ADAL" clId="{DF25E5BF-D19E-463C-9870-DB282E9B171D}" dt="2026-05-03T17:53:52.860" v="141"/>
+          <ac:spMkLst>
+            <pc:docMk/>
+            <pc:sldMk cId="0" sldId="278"/>
+            <ac:spMk id="4" creationId="{A04CCB85-EEAC-2BF1-A0B7-0883B9E3E166}"/>
+          </ac:spMkLst>
+        </pc:spChg>
+        <pc:spChg chg="add mod">
+          <ac:chgData name="James, Robert" userId="2289ddc5-885d-4588-a312-b6745df56974" providerId="ADAL" clId="{DF25E5BF-D19E-463C-9870-DB282E9B171D}" dt="2026-05-03T17:54:39.242" v="165" actId="1076"/>
+          <ac:spMkLst>
+            <pc:docMk/>
+            <pc:sldMk cId="0" sldId="278"/>
+            <ac:spMk id="6" creationId="{DDB093FB-AA2A-182D-6672-E334FC58E494}"/>
+          </ac:spMkLst>
+        </pc:spChg>
+        <pc:spChg chg="add mod">
+          <ac:chgData name="James, Robert" userId="2289ddc5-885d-4588-a312-b6745df56974" providerId="ADAL" clId="{DF25E5BF-D19E-463C-9870-DB282E9B171D}" dt="2026-05-03T17:54:06.065" v="144"/>
+          <ac:spMkLst>
+            <pc:docMk/>
+            <pc:sldMk cId="0" sldId="278"/>
+            <ac:spMk id="7" creationId="{87471FD3-21E3-B9DF-C87C-DE246FB698FC}"/>
+          </ac:spMkLst>
+        </pc:spChg>
+        <pc:spChg chg="add mod">
+          <ac:chgData name="James, Robert" userId="2289ddc5-885d-4588-a312-b6745df56974" providerId="ADAL" clId="{DF25E5BF-D19E-463C-9870-DB282E9B171D}" dt="2026-05-03T17:54:09.598" v="145"/>
+          <ac:spMkLst>
+            <pc:docMk/>
+            <pc:sldMk cId="0" sldId="278"/>
+            <ac:spMk id="8" creationId="{B445DEBB-54EF-198E-EA64-7EB0A4977B03}"/>
+          </ac:spMkLst>
+        </pc:spChg>
+        <pc:spChg chg="add del mod">
+          <ac:chgData name="James, Robert" userId="2289ddc5-885d-4588-a312-b6745df56974" providerId="ADAL" clId="{DF25E5BF-D19E-463C-9870-DB282E9B171D}" dt="2026-05-03T17:54:19.759" v="148" actId="478"/>
+          <ac:spMkLst>
+            <pc:docMk/>
+            <pc:sldMk cId="0" sldId="278"/>
+            <ac:spMk id="11" creationId="{8607BFA2-7645-41FB-7C13-3613781BA912}"/>
+          </ac:spMkLst>
+        </pc:spChg>
+        <pc:picChg chg="add">
+          <ac:chgData name="James, Robert" userId="2289ddc5-885d-4588-a312-b6745df56974" providerId="ADAL" clId="{DF25E5BF-D19E-463C-9870-DB282E9B171D}" dt="2026-05-03T17:53:56.245" v="142"/>
+          <ac:picMkLst>
+            <pc:docMk/>
+            <pc:sldMk cId="0" sldId="278"/>
+            <ac:picMk id="5" creationId="{388A2282-5CC5-7A2C-368A-77135DD5A128}"/>
+          </ac:picMkLst>
+        </pc:picChg>
+        <pc:picChg chg="add mod">
+          <ac:chgData name="James, Robert" userId="2289ddc5-885d-4588-a312-b6745df56974" providerId="ADAL" clId="{DF25E5BF-D19E-463C-9870-DB282E9B171D}" dt="2026-05-03T17:54:24.159" v="149" actId="1076"/>
+          <ac:picMkLst>
+            <pc:docMk/>
+            <pc:sldMk cId="0" sldId="278"/>
+            <ac:picMk id="9" creationId="{2D3C6785-637D-33A4-D293-D3FAD5E9A342}"/>
+          </ac:picMkLst>
+        </pc:picChg>
+      </pc:sldChg>
+      <pc:sldChg chg="modSp mod">
+        <pc:chgData name="James, Robert" userId="2289ddc5-885d-4588-a312-b6745df56974" providerId="ADAL" clId="{DF25E5BF-D19E-463C-9870-DB282E9B171D}" dt="2026-05-03T17:57:29.711" v="218" actId="20577"/>
+        <pc:sldMkLst>
+          <pc:docMk/>
+          <pc:sldMk cId="0" sldId="300"/>
+        </pc:sldMkLst>
+        <pc:spChg chg="mod">
+          <ac:chgData name="James, Robert" userId="2289ddc5-885d-4588-a312-b6745df56974" providerId="ADAL" clId="{DF25E5BF-D19E-463C-9870-DB282E9B171D}" dt="2026-05-03T17:57:29.711" v="218" actId="20577"/>
+          <ac:spMkLst>
+            <pc:docMk/>
+            <pc:sldMk cId="0" sldId="300"/>
+            <ac:spMk id="2" creationId="{00000000-0000-0000-0000-000000000000}"/>
+          </ac:spMkLst>
+        </pc:spChg>
+      </pc:sldChg>
+      <pc:sldChg chg="modSp mod">
+        <pc:chgData name="James, Robert" userId="2289ddc5-885d-4588-a312-b6745df56974" providerId="ADAL" clId="{DF25E5BF-D19E-463C-9870-DB282E9B171D}" dt="2026-05-03T17:57:56.464" v="219" actId="20577"/>
+        <pc:sldMkLst>
+          <pc:docMk/>
+          <pc:sldMk cId="1052225801" sldId="301"/>
+        </pc:sldMkLst>
+        <pc:spChg chg="mod">
+          <ac:chgData name="James, Robert" userId="2289ddc5-885d-4588-a312-b6745df56974" providerId="ADAL" clId="{DF25E5BF-D19E-463C-9870-DB282E9B171D}" dt="2026-05-03T17:57:56.464" v="219" actId="20577"/>
+          <ac:spMkLst>
+            <pc:docMk/>
+            <pc:sldMk cId="1052225801" sldId="301"/>
+            <ac:spMk id="3" creationId="{6328D4AA-88F0-A000-4DC7-A03C0F2E06B2}"/>
+          </ac:spMkLst>
+        </pc:spChg>
+      </pc:sldChg>
+      <pc:sldChg chg="addSp delSp modSp mod">
+        <pc:chgData name="James, Robert" userId="2289ddc5-885d-4588-a312-b6745df56974" providerId="ADAL" clId="{DF25E5BF-D19E-463C-9870-DB282E9B171D}" dt="2026-05-03T17:56:37.022" v="193" actId="1076"/>
+        <pc:sldMkLst>
+          <pc:docMk/>
+          <pc:sldMk cId="247361968" sldId="11079"/>
+        </pc:sldMkLst>
+        <pc:spChg chg="mod">
+          <ac:chgData name="James, Robert" userId="2289ddc5-885d-4588-a312-b6745df56974" providerId="ADAL" clId="{DF25E5BF-D19E-463C-9870-DB282E9B171D}" dt="2026-05-03T17:55:38.470" v="184" actId="1076"/>
+          <ac:spMkLst>
+            <pc:docMk/>
+            <pc:sldMk cId="247361968" sldId="11079"/>
+            <ac:spMk id="5" creationId="{DFCF1373-476F-EF0A-9E2B-6A47BBE67C9A}"/>
+          </ac:spMkLst>
+        </pc:spChg>
+        <pc:spChg chg="add del mod">
+          <ac:chgData name="James, Robert" userId="2289ddc5-885d-4588-a312-b6745df56974" providerId="ADAL" clId="{DF25E5BF-D19E-463C-9870-DB282E9B171D}" dt="2026-05-03T17:55:46.788" v="189" actId="478"/>
+          <ac:spMkLst>
+            <pc:docMk/>
+            <pc:sldMk cId="247361968" sldId="11079"/>
+            <ac:spMk id="7" creationId="{126CCF09-3FE8-F36C-F14C-603C7603DDB3}"/>
+          </ac:spMkLst>
+        </pc:spChg>
+        <pc:spChg chg="add mod">
+          <ac:chgData name="James, Robert" userId="2289ddc5-885d-4588-a312-b6745df56974" providerId="ADAL" clId="{DF25E5BF-D19E-463C-9870-DB282E9B171D}" dt="2026-05-03T17:55:42.682" v="186"/>
+          <ac:spMkLst>
+            <pc:docMk/>
+            <pc:sldMk cId="247361968" sldId="11079"/>
+            <ac:spMk id="8" creationId="{28ED1F18-2AFC-206B-7288-CDB1750837C8}"/>
+          </ac:spMkLst>
+        </pc:spChg>
+        <pc:picChg chg="add del mod">
+          <ac:chgData name="James, Robert" userId="2289ddc5-885d-4588-a312-b6745df56974" providerId="ADAL" clId="{DF25E5BF-D19E-463C-9870-DB282E9B171D}" dt="2026-05-03T17:56:33.294" v="192" actId="478"/>
+          <ac:picMkLst>
+            <pc:docMk/>
+            <pc:sldMk cId="247361968" sldId="11079"/>
+            <ac:picMk id="9" creationId="{E2071AEE-510C-A6D5-E7C2-8C1E52FD9472}"/>
+          </ac:picMkLst>
+        </pc:picChg>
+        <pc:picChg chg="add mod">
+          <ac:chgData name="James, Robert" userId="2289ddc5-885d-4588-a312-b6745df56974" providerId="ADAL" clId="{DF25E5BF-D19E-463C-9870-DB282E9B171D}" dt="2026-05-03T17:56:37.022" v="193" actId="1076"/>
+          <ac:picMkLst>
+            <pc:docMk/>
+            <pc:sldMk cId="247361968" sldId="11079"/>
+            <ac:picMk id="10" creationId="{3D4C2ADC-A864-6B12-952E-037CFD91F4AD}"/>
+          </ac:picMkLst>
+        </pc:picChg>
+      </pc:sldChg>
+      <pc:sldChg chg="modSp mod">
+        <pc:chgData name="James, Robert" userId="2289ddc5-885d-4588-a312-b6745df56974" providerId="ADAL" clId="{DF25E5BF-D19E-463C-9870-DB282E9B171D}" dt="2026-05-03T17:55:03.797" v="181" actId="207"/>
+        <pc:sldMkLst>
+          <pc:docMk/>
+          <pc:sldMk cId="2017397866" sldId="11089"/>
+        </pc:sldMkLst>
+        <pc:spChg chg="mod">
+          <ac:chgData name="James, Robert" userId="2289ddc5-885d-4588-a312-b6745df56974" providerId="ADAL" clId="{DF25E5BF-D19E-463C-9870-DB282E9B171D}" dt="2026-05-03T17:54:53.380" v="180" actId="20577"/>
+          <ac:spMkLst>
+            <pc:docMk/>
+            <pc:sldMk cId="2017397866" sldId="11089"/>
+            <ac:spMk id="5" creationId="{A5EE09DA-EA0D-2E24-41FB-87D9DE0607DD}"/>
+          </ac:spMkLst>
+        </pc:spChg>
+        <pc:spChg chg="mod">
+          <ac:chgData name="James, Robert" userId="2289ddc5-885d-4588-a312-b6745df56974" providerId="ADAL" clId="{DF25E5BF-D19E-463C-9870-DB282E9B171D}" dt="2026-05-03T17:54:48.846" v="166" actId="20577"/>
+          <ac:spMkLst>
+            <pc:docMk/>
+            <pc:sldMk cId="2017397866" sldId="11089"/>
+            <ac:spMk id="6" creationId="{AA0D6D0A-25AC-2876-1550-748CF46B69B7}"/>
+          </ac:spMkLst>
+        </pc:spChg>
+        <pc:spChg chg="mod">
+          <ac:chgData name="James, Robert" userId="2289ddc5-885d-4588-a312-b6745df56974" providerId="ADAL" clId="{DF25E5BF-D19E-463C-9870-DB282E9B171D}" dt="2026-05-03T17:55:03.797" v="181" actId="207"/>
+          <ac:spMkLst>
+            <pc:docMk/>
+            <pc:sldMk cId="2017397866" sldId="11089"/>
+            <ac:spMk id="7" creationId="{D1E179AB-4DCE-FE24-6134-703A253C4539}"/>
+          </ac:spMkLst>
+        </pc:spChg>
+      </pc:sldChg>
+      <pc:sldChg chg="modSp mod">
+        <pc:chgData name="James, Robert" userId="2289ddc5-885d-4588-a312-b6745df56974" providerId="ADAL" clId="{DF25E5BF-D19E-463C-9870-DB282E9B171D}" dt="2026-05-03T17:52:16.526" v="104" actId="20577"/>
+        <pc:sldMkLst>
+          <pc:docMk/>
+          <pc:sldMk cId="3530447403" sldId="11091"/>
+        </pc:sldMkLst>
+        <pc:spChg chg="mod">
+          <ac:chgData name="James, Robert" userId="2289ddc5-885d-4588-a312-b6745df56974" providerId="ADAL" clId="{DF25E5BF-D19E-463C-9870-DB282E9B171D}" dt="2026-05-03T17:52:04.647" v="102" actId="20577"/>
+          <ac:spMkLst>
+            <pc:docMk/>
+            <pc:sldMk cId="3530447403" sldId="11091"/>
+            <ac:spMk id="5" creationId="{0F86A71B-062C-9DC3-6F25-B88AEE14E487}"/>
+          </ac:spMkLst>
+        </pc:spChg>
+        <pc:spChg chg="mod">
+          <ac:chgData name="James, Robert" userId="2289ddc5-885d-4588-a312-b6745df56974" providerId="ADAL" clId="{DF25E5BF-D19E-463C-9870-DB282E9B171D}" dt="2026-05-03T17:51:49.586" v="65" actId="20577"/>
+          <ac:spMkLst>
+            <pc:docMk/>
+            <pc:sldMk cId="3530447403" sldId="11091"/>
+            <ac:spMk id="6" creationId="{C875E457-737A-A963-0E63-9E693B495645}"/>
+          </ac:spMkLst>
+        </pc:spChg>
+        <pc:spChg chg="mod">
+          <ac:chgData name="James, Robert" userId="2289ddc5-885d-4588-a312-b6745df56974" providerId="ADAL" clId="{DF25E5BF-D19E-463C-9870-DB282E9B171D}" dt="2026-05-03T17:52:16.526" v="104" actId="20577"/>
+          <ac:spMkLst>
+            <pc:docMk/>
+            <pc:sldMk cId="3530447403" sldId="11091"/>
+            <ac:spMk id="7" creationId="{1204EBE0-101C-4413-A0FB-D607F9FF6043}"/>
+          </ac:spMkLst>
+        </pc:spChg>
+      </pc:sldChg>
+      <pc:sldChg chg="modSp new mod">
+        <pc:chgData name="James, Robert" userId="2289ddc5-885d-4588-a312-b6745df56974" providerId="ADAL" clId="{DF25E5BF-D19E-463C-9870-DB282E9B171D}" dt="2026-05-03T17:58:53.895" v="240" actId="20577"/>
+        <pc:sldMkLst>
+          <pc:docMk/>
+          <pc:sldMk cId="3717739119" sldId="11092"/>
+        </pc:sldMkLst>
+        <pc:spChg chg="mod">
+          <ac:chgData name="James, Robert" userId="2289ddc5-885d-4588-a312-b6745df56974" providerId="ADAL" clId="{DF25E5BF-D19E-463C-9870-DB282E9B171D}" dt="2026-05-03T17:58:53.895" v="240" actId="20577"/>
+          <ac:spMkLst>
+            <pc:docMk/>
+            <pc:sldMk cId="3717739119" sldId="11092"/>
+            <ac:spMk id="2" creationId="{88CE21F8-9390-3DE0-F176-6592E414D43F}"/>
+          </ac:spMkLst>
+        </pc:spChg>
+      </pc:sldChg>
+    </pc:docChg>
+  </pc:docChgLst>
+</pc:chgInfo>
+</file>
+
 <file path=ppt/notesMasters/notesMaster1.xml><?xml version="1.0" encoding="utf-8"?>
 <p:notesMaster xmlns:a="http://schemas.openxmlformats.org/drawingml/2006/main" xmlns:r="http://schemas.openxmlformats.org/officeDocument/2006/relationships" xmlns:p="http://schemas.openxmlformats.org/presentationml/2006/main">
   <p:cSld>
@@ -228,7 +490,7 @@
           <a:p>
             <a:fld id="{DD2C371D-5DA9-6C42-8A12-4A27D2753739}" type="datetimeFigureOut">
               <a:rPr lang="en-US" smtClean="0"/>
-              <a:t>5/2/2026</a:t>
+              <a:t>5/3/2026</a:t>
             </a:fld>
             <a:endParaRPr lang="en-US"/>
           </a:p>
@@ -3007,7 +3269,7 @@
             <a:spLocks noGrp="1" noRot="1" noChangeAspect="1"/>
           </p:cNvSpPr>
           <p:nvPr>
-            <p:ph type="sldImg"/>
+            <p:ph type="sldImg" idx="2"/>
           </p:nvPr>
         </p:nvSpPr>
         <p:spPr/>
@@ -3019,7 +3281,7 @@
             <a:spLocks noGrp="1"/>
           </p:cNvSpPr>
           <p:nvPr>
-            <p:ph type="body" idx="1"/>
+            <p:ph type="body" sz="quarter" idx="3"/>
           </p:nvPr>
         </p:nvSpPr>
         <p:spPr/>
@@ -3028,2247 +3290,2244 @@
           <a:lstStyle/>
           <a:p>
             <a:r>
-              <a:rPr lang="en-US" dirty="0"/>
+              <a:rPr dirty="0"/>
               <a:t># Create a more comprehensive PowerPoint based on the user's detailed instructions</a:t>
             </a:r>
           </a:p>
           <a:p>
-            <a:endParaRPr lang="en-US" dirty="0"/>
-          </a:p>
-          <a:p>
-            <a:r>
-              <a:rPr lang="en-US" dirty="0"/>
+            <a:endParaRPr dirty="0"/>
+          </a:p>
+          <a:p>
+            <a:r>
+              <a:rPr dirty="0"/>
               <a:t>from pptx import Presentation</a:t>
             </a:r>
           </a:p>
           <a:p>
             <a:r>
-              <a:rPr lang="en-US" dirty="0"/>
+              <a:rPr dirty="0"/>
               <a:t>from </a:t>
             </a:r>
             <a:r>
-              <a:rPr lang="en-US" dirty="0" err="1"/>
+              <a:rPr dirty="0" err="1"/>
               <a:t>pptx.util</a:t>
             </a:r>
             <a:r>
-              <a:rPr lang="en-US" dirty="0"/>
+              <a:rPr dirty="0"/>
               <a:t> import Inches</a:t>
             </a:r>
           </a:p>
           <a:p>
-            <a:endParaRPr lang="en-US" dirty="0"/>
-          </a:p>
-          <a:p>
-            <a:r>
-              <a:rPr lang="en-US" dirty="0"/>
+            <a:endParaRPr dirty="0"/>
+          </a:p>
+          <a:p>
+            <a:r>
+              <a:rPr dirty="0"/>
               <a:t>prs = Presentation()</a:t>
             </a:r>
           </a:p>
           <a:p>
-            <a:endParaRPr lang="en-US" dirty="0"/>
-          </a:p>
-          <a:p>
-            <a:r>
-              <a:rPr lang="en-US" dirty="0"/>
+            <a:endParaRPr dirty="0"/>
+          </a:p>
+          <a:p>
+            <a:r>
+              <a:rPr dirty="0"/>
               <a:t>def </a:t>
             </a:r>
             <a:r>
-              <a:rPr lang="en-US" dirty="0" err="1"/>
+              <a:rPr dirty="0" err="1"/>
               <a:t>add_slide</a:t>
             </a:r>
             <a:r>
-              <a:rPr lang="en-US" dirty="0"/>
+              <a:rPr dirty="0"/>
               <a:t>(title, bullets):</a:t>
             </a:r>
           </a:p>
           <a:p>
             <a:r>
-              <a:rPr lang="en-US" dirty="0"/>
+              <a:rPr dirty="0"/>
               <a:t>    </a:t>
             </a:r>
             <a:r>
-              <a:rPr lang="en-US" dirty="0" err="1"/>
+              <a:rPr dirty="0" err="1"/>
               <a:t>slide_layout</a:t>
             </a:r>
             <a:r>
-              <a:rPr lang="en-US" dirty="0"/>
+              <a:rPr dirty="0"/>
               <a:t> = </a:t>
             </a:r>
             <a:r>
-              <a:rPr lang="en-US" dirty="0" err="1"/>
+              <a:rPr dirty="0" err="1"/>
               <a:t>prs.slide_layouts</a:t>
             </a:r>
             <a:r>
-              <a:rPr lang="en-US" dirty="0"/>
+              <a:rPr dirty="0"/>
               <a:t>[1]</a:t>
             </a:r>
           </a:p>
           <a:p>
             <a:r>
-              <a:rPr lang="en-US" dirty="0"/>
+              <a:rPr dirty="0"/>
               <a:t>    slide = </a:t>
             </a:r>
             <a:r>
-              <a:rPr lang="en-US" dirty="0" err="1"/>
+              <a:rPr dirty="0" err="1"/>
               <a:t>prs.slides.add_slide</a:t>
             </a:r>
             <a:r>
-              <a:rPr lang="en-US" dirty="0"/>
+              <a:rPr dirty="0"/>
               <a:t>(</a:t>
             </a:r>
             <a:r>
-              <a:rPr lang="en-US" dirty="0" err="1"/>
+              <a:rPr dirty="0" err="1"/>
               <a:t>slide_layout</a:t>
             </a:r>
             <a:r>
-              <a:rPr lang="en-US" dirty="0"/>
+              <a:rPr dirty="0"/>
               <a:t>)</a:t>
             </a:r>
           </a:p>
           <a:p>
             <a:r>
-              <a:rPr lang="en-US" dirty="0"/>
+              <a:rPr dirty="0"/>
               <a:t>    </a:t>
             </a:r>
             <a:r>
-              <a:rPr lang="en-US" dirty="0" err="1"/>
+              <a:rPr dirty="0" err="1"/>
               <a:t>slide.shapes.title.text</a:t>
             </a:r>
             <a:r>
-              <a:rPr lang="en-US" dirty="0"/>
+              <a:rPr dirty="0"/>
               <a:t> = title</a:t>
             </a:r>
           </a:p>
           <a:p>
             <a:r>
-              <a:rPr lang="en-US" dirty="0"/>
+              <a:rPr dirty="0"/>
               <a:t>    </a:t>
             </a:r>
             <a:r>
-              <a:rPr lang="en-US" dirty="0" err="1"/>
+              <a:rPr dirty="0" err="1"/>
               <a:t>tf</a:t>
             </a:r>
             <a:r>
-              <a:rPr lang="en-US" dirty="0"/>
+              <a:rPr dirty="0"/>
               <a:t> = </a:t>
             </a:r>
             <a:r>
-              <a:rPr lang="en-US" dirty="0" err="1"/>
+              <a:rPr dirty="0" err="1"/>
               <a:t>slide.placeholders</a:t>
             </a:r>
             <a:r>
-              <a:rPr lang="en-US" dirty="0"/>
+              <a:rPr dirty="0"/>
               <a:t>[1].</a:t>
             </a:r>
             <a:r>
-              <a:rPr lang="en-US" dirty="0" err="1"/>
+              <a:rPr dirty="0" err="1"/>
               <a:t>text_frame</a:t>
             </a:r>
-            <a:endParaRPr lang="en-US" dirty="0"/>
-          </a:p>
-          <a:p>
-            <a:r>
-              <a:rPr lang="en-US" dirty="0"/>
+            <a:endParaRPr dirty="0"/>
+          </a:p>
+          <a:p>
+            <a:r>
+              <a:rPr dirty="0"/>
               <a:t>    </a:t>
             </a:r>
             <a:r>
-              <a:rPr lang="en-US" dirty="0" err="1"/>
+              <a:rPr dirty="0" err="1"/>
               <a:t>tf.clear</a:t>
             </a:r>
             <a:r>
-              <a:rPr lang="en-US" dirty="0"/>
+              <a:rPr dirty="0"/>
               <a:t>()</a:t>
             </a:r>
           </a:p>
           <a:p>
             <a:r>
-              <a:rPr lang="en-US" dirty="0"/>
+              <a:rPr dirty="0"/>
               <a:t>    for </a:t>
             </a:r>
             <a:r>
-              <a:rPr lang="en-US" dirty="0" err="1"/>
+              <a:rPr dirty="0" err="1"/>
               <a:t>i</a:t>
             </a:r>
             <a:r>
-              <a:rPr lang="en-US" dirty="0"/>
+              <a:rPr dirty="0"/>
               <a:t>, b in enumerate(bullets):</a:t>
             </a:r>
           </a:p>
           <a:p>
             <a:r>
-              <a:rPr lang="en-US" dirty="0"/>
+              <a:rPr dirty="0"/>
               <a:t>        if </a:t>
             </a:r>
             <a:r>
-              <a:rPr lang="en-US" dirty="0" err="1"/>
+              <a:rPr dirty="0" err="1"/>
               <a:t>i</a:t>
             </a:r>
             <a:r>
-              <a:rPr lang="en-US" dirty="0"/>
+              <a:rPr dirty="0"/>
               <a:t> == 0:</a:t>
             </a:r>
           </a:p>
           <a:p>
             <a:r>
-              <a:rPr lang="en-US" dirty="0"/>
+              <a:rPr dirty="0"/>
               <a:t>            </a:t>
             </a:r>
             <a:r>
-              <a:rPr lang="en-US" dirty="0" err="1"/>
+              <a:rPr dirty="0" err="1"/>
               <a:t>tf.text</a:t>
             </a:r>
             <a:r>
-              <a:rPr lang="en-US" dirty="0"/>
+              <a:rPr dirty="0"/>
               <a:t> = b</a:t>
             </a:r>
           </a:p>
           <a:p>
             <a:r>
-              <a:rPr lang="en-US" dirty="0"/>
+              <a:rPr dirty="0"/>
               <a:t>        else:</a:t>
             </a:r>
           </a:p>
           <a:p>
             <a:r>
-              <a:rPr lang="en-US" dirty="0"/>
+              <a:rPr dirty="0"/>
               <a:t>            p = </a:t>
             </a:r>
             <a:r>
-              <a:rPr lang="en-US" dirty="0" err="1"/>
+              <a:rPr dirty="0" err="1"/>
               <a:t>tf.add_paragraph</a:t>
             </a:r>
             <a:r>
-              <a:rPr lang="en-US" dirty="0"/>
+              <a:rPr dirty="0"/>
               <a:t>()</a:t>
             </a:r>
           </a:p>
           <a:p>
             <a:r>
-              <a:rPr lang="en-US" dirty="0"/>
+              <a:rPr dirty="0"/>
               <a:t>            </a:t>
             </a:r>
             <a:r>
-              <a:rPr lang="en-US" dirty="0" err="1"/>
+              <a:rPr dirty="0" err="1"/>
               <a:t>p.text</a:t>
             </a:r>
             <a:r>
-              <a:rPr lang="en-US" dirty="0"/>
+              <a:rPr dirty="0"/>
               <a:t> = b</a:t>
             </a:r>
           </a:p>
           <a:p>
             <a:r>
-              <a:rPr lang="en-US" dirty="0"/>
+              <a:rPr dirty="0"/>
               <a:t>            </a:t>
             </a:r>
             <a:r>
-              <a:rPr lang="en-US" dirty="0" err="1"/>
+              <a:rPr dirty="0" err="1"/>
               <a:t>p.level</a:t>
             </a:r>
             <a:r>
-              <a:rPr lang="en-US" dirty="0"/>
+              <a:rPr dirty="0"/>
               <a:t> = 0</a:t>
             </a:r>
           </a:p>
           <a:p>
-            <a:endParaRPr lang="en-US" dirty="0"/>
-          </a:p>
-          <a:p>
-            <a:r>
-              <a:rPr lang="en-US" dirty="0"/>
+            <a:endParaRPr dirty="0"/>
+          </a:p>
+          <a:p>
+            <a:r>
+              <a:rPr dirty="0"/>
               <a:t># 1. Title</a:t>
             </a:r>
           </a:p>
           <a:p>
             <a:r>
-              <a:rPr lang="en-US" dirty="0" err="1"/>
+              <a:rPr dirty="0" err="1"/>
               <a:t>add_slide</a:t>
             </a:r>
             <a:r>
-              <a:rPr lang="en-US" dirty="0"/>
+              <a:rPr dirty="0"/>
               <a:t>(</a:t>
             </a:r>
           </a:p>
           <a:p>
             <a:r>
-              <a:rPr lang="en-US" dirty="0"/>
+              <a:rPr dirty="0"/>
               <a:t>    "LLM Prompt Engineering for Breast Cancer Workup Extraction",</a:t>
             </a:r>
           </a:p>
           <a:p>
             <a:r>
-              <a:rPr lang="en-US" dirty="0"/>
+              <a:rPr dirty="0"/>
               <a:t>    [</a:t>
             </a:r>
           </a:p>
           <a:p>
             <a:r>
-              <a:rPr lang="en-US" dirty="0"/>
+              <a:rPr dirty="0"/>
               <a:t>        "Evaluating accuracy, hallucination, and safety",</a:t>
             </a:r>
           </a:p>
           <a:p>
             <a:r>
-              <a:rPr lang="en-US" dirty="0"/>
+              <a:rPr dirty="0"/>
               <a:t>        "Prompt engineering + RAG + </a:t>
             </a:r>
             <a:r>
-              <a:rPr lang="en-US" dirty="0" err="1"/>
+              <a:rPr dirty="0" err="1"/>
               <a:t>LangGraph</a:t>
             </a:r>
             <a:r>
-              <a:rPr lang="en-US" dirty="0"/>
+              <a:rPr dirty="0"/>
               <a:t>",</a:t>
             </a:r>
           </a:p>
           <a:p>
             <a:r>
-              <a:rPr lang="en-US" dirty="0"/>
+              <a:rPr dirty="0"/>
               <a:t>        "Memorial Sloan Kettering | Surgical Oncology AI"</a:t>
             </a:r>
           </a:p>
           <a:p>
             <a:r>
-              <a:rPr lang="en-US" dirty="0"/>
+              <a:rPr dirty="0"/>
               <a:t>    ]</a:t>
             </a:r>
           </a:p>
           <a:p>
             <a:r>
-              <a:rPr lang="en-US" dirty="0"/>
+              <a:rPr dirty="0"/>
               <a:t>)</a:t>
             </a:r>
           </a:p>
           <a:p>
-            <a:endParaRPr lang="en-US" dirty="0"/>
-          </a:p>
-          <a:p>
-            <a:r>
-              <a:rPr lang="en-US" dirty="0"/>
+            <a:endParaRPr dirty="0"/>
+          </a:p>
+          <a:p>
+            <a:r>
+              <a:rPr dirty="0"/>
               <a:t># 2. Background - LLM basics</a:t>
             </a:r>
           </a:p>
           <a:p>
             <a:r>
-              <a:rPr lang="en-US" dirty="0" err="1"/>
+              <a:rPr dirty="0" err="1"/>
               <a:t>add_slide</a:t>
             </a:r>
             <a:r>
-              <a:rPr lang="en-US" dirty="0"/>
+              <a:rPr dirty="0"/>
               <a:t>(</a:t>
             </a:r>
           </a:p>
           <a:p>
             <a:r>
-              <a:rPr lang="en-US" dirty="0"/>
+              <a:rPr dirty="0"/>
               <a:t>    "What is a Large Language Model (LLM)?",</a:t>
             </a:r>
           </a:p>
           <a:p>
             <a:r>
-              <a:rPr lang="en-US" dirty="0"/>
+              <a:rPr dirty="0"/>
               <a:t>    [</a:t>
             </a:r>
           </a:p>
           <a:p>
             <a:r>
-              <a:rPr lang="en-US" dirty="0"/>
+              <a:rPr dirty="0"/>
               <a:t>        "Neural networks trained on large text corpora",</a:t>
             </a:r>
           </a:p>
           <a:p>
             <a:r>
-              <a:rPr lang="en-US" dirty="0"/>
+              <a:rPr dirty="0"/>
               <a:t>        "Based on transformer architecture",</a:t>
             </a:r>
           </a:p>
           <a:p>
             <a:r>
-              <a:rPr lang="en-US" dirty="0"/>
+              <a:rPr dirty="0"/>
               <a:t>        "Learn probability distributions over language",</a:t>
             </a:r>
           </a:p>
           <a:p>
             <a:r>
-              <a:rPr lang="en-US" dirty="0"/>
+              <a:rPr dirty="0"/>
               <a:t>        "Non-deterministic outputs (same input ≠ same output)"</a:t>
             </a:r>
           </a:p>
           <a:p>
             <a:r>
-              <a:rPr lang="en-US" dirty="0"/>
+              <a:rPr dirty="0"/>
               <a:t>    ]</a:t>
             </a:r>
           </a:p>
           <a:p>
             <a:r>
-              <a:rPr lang="en-US" dirty="0"/>
+              <a:rPr dirty="0"/>
               <a:t>)</a:t>
             </a:r>
           </a:p>
           <a:p>
-            <a:endParaRPr lang="en-US" dirty="0"/>
-          </a:p>
-          <a:p>
-            <a:r>
-              <a:rPr lang="en-US" dirty="0"/>
+            <a:endParaRPr dirty="0"/>
+          </a:p>
+          <a:p>
+            <a:r>
+              <a:rPr dirty="0"/>
               <a:t># 3. Transformer basics</a:t>
             </a:r>
           </a:p>
           <a:p>
             <a:r>
-              <a:rPr lang="en-US" dirty="0" err="1"/>
+              <a:rPr dirty="0" err="1"/>
               <a:t>add_slide</a:t>
             </a:r>
             <a:r>
-              <a:rPr lang="en-US" dirty="0"/>
+              <a:rPr dirty="0"/>
               <a:t>(</a:t>
             </a:r>
           </a:p>
           <a:p>
             <a:r>
-              <a:rPr lang="en-US" dirty="0"/>
+              <a:rPr dirty="0"/>
               <a:t>    "Transformer Architecture (High-Level)",</a:t>
             </a:r>
           </a:p>
           <a:p>
             <a:r>
-              <a:rPr lang="en-US" dirty="0"/>
+              <a:rPr dirty="0"/>
               <a:t>    [</a:t>
             </a:r>
           </a:p>
           <a:p>
             <a:r>
-              <a:rPr lang="en-US" dirty="0"/>
+              <a:rPr dirty="0"/>
               <a:t>        "Input tokens → embeddings",</a:t>
             </a:r>
           </a:p>
           <a:p>
             <a:r>
-              <a:rPr lang="en-US" dirty="0"/>
+              <a:rPr dirty="0"/>
               <a:t>        "Multi-head self-attention layers",</a:t>
             </a:r>
           </a:p>
           <a:p>
             <a:r>
-              <a:rPr lang="en-US" dirty="0"/>
+              <a:rPr dirty="0"/>
               <a:t>        "Feedforward layers",</a:t>
             </a:r>
           </a:p>
           <a:p>
             <a:r>
-              <a:rPr lang="en-US" dirty="0"/>
+              <a:rPr dirty="0"/>
               <a:t>        "Stacked layers (depth)",</a:t>
             </a:r>
           </a:p>
           <a:p>
             <a:r>
-              <a:rPr lang="en-US" dirty="0"/>
+              <a:rPr dirty="0"/>
               <a:t>        "Output probability distribution over tokens"</a:t>
             </a:r>
           </a:p>
           <a:p>
             <a:r>
-              <a:rPr lang="en-US" dirty="0"/>
+              <a:rPr dirty="0"/>
               <a:t>    ]</a:t>
             </a:r>
           </a:p>
           <a:p>
             <a:r>
-              <a:rPr lang="en-US" dirty="0"/>
+              <a:rPr dirty="0"/>
               <a:t>)</a:t>
             </a:r>
           </a:p>
           <a:p>
-            <a:endParaRPr lang="en-US" dirty="0"/>
-          </a:p>
-          <a:p>
-            <a:r>
-              <a:rPr lang="en-US" dirty="0"/>
+            <a:endParaRPr dirty="0"/>
+          </a:p>
+          <a:p>
+            <a:r>
+              <a:rPr dirty="0"/>
               <a:t># 4. Attention intuition</a:t>
             </a:r>
           </a:p>
           <a:p>
             <a:r>
-              <a:rPr lang="en-US" dirty="0" err="1"/>
+              <a:rPr dirty="0" err="1"/>
               <a:t>add_slide</a:t>
             </a:r>
             <a:r>
-              <a:rPr lang="en-US" dirty="0"/>
+              <a:rPr dirty="0"/>
               <a:t>(</a:t>
             </a:r>
           </a:p>
           <a:p>
             <a:r>
-              <a:rPr lang="en-US" dirty="0"/>
+              <a:rPr dirty="0"/>
               <a:t>    "Self-Attention Mechanism",</a:t>
             </a:r>
           </a:p>
           <a:p>
             <a:r>
-              <a:rPr lang="en-US" dirty="0"/>
+              <a:rPr dirty="0"/>
               <a:t>    [</a:t>
             </a:r>
           </a:p>
           <a:p>
             <a:r>
-              <a:rPr lang="en-US" dirty="0"/>
+              <a:rPr dirty="0"/>
               <a:t>        "Model attends to all tokens simultaneously",</a:t>
             </a:r>
           </a:p>
           <a:p>
             <a:r>
-              <a:rPr lang="en-US" dirty="0"/>
+              <a:rPr dirty="0"/>
               <a:t>        "Captures long-range dependencies",</a:t>
             </a:r>
           </a:p>
           <a:p>
             <a:r>
-              <a:rPr lang="en-US" dirty="0"/>
+              <a:rPr dirty="0"/>
               <a:t>        "Weighted relationships between words",</a:t>
             </a:r>
           </a:p>
           <a:p>
             <a:r>
-              <a:rPr lang="en-US" dirty="0"/>
+              <a:rPr dirty="0"/>
               <a:t>        "Key driver of LLM performance"</a:t>
             </a:r>
           </a:p>
           <a:p>
             <a:r>
-              <a:rPr lang="en-US" dirty="0"/>
+              <a:rPr dirty="0"/>
               <a:t>    ]</a:t>
             </a:r>
           </a:p>
           <a:p>
             <a:r>
-              <a:rPr lang="en-US" dirty="0"/>
+              <a:rPr dirty="0"/>
               <a:t>)</a:t>
             </a:r>
           </a:p>
           <a:p>
-            <a:endParaRPr lang="en-US" dirty="0"/>
-          </a:p>
-          <a:p>
-            <a:r>
-              <a:rPr lang="en-US" dirty="0"/>
+            <a:endParaRPr dirty="0"/>
+          </a:p>
+          <a:p>
+            <a:r>
+              <a:rPr dirty="0"/>
               <a:t># 5. Model architectures comparison</a:t>
             </a:r>
           </a:p>
           <a:p>
             <a:r>
-              <a:rPr lang="en-US" dirty="0" err="1"/>
+              <a:rPr dirty="0" err="1"/>
               <a:t>add_slide</a:t>
             </a:r>
             <a:r>
-              <a:rPr lang="en-US" dirty="0"/>
+              <a:rPr dirty="0"/>
               <a:t>(</a:t>
             </a:r>
           </a:p>
           <a:p>
             <a:r>
-              <a:rPr lang="en-US" dirty="0"/>
+              <a:rPr dirty="0"/>
               <a:t>    "Modern LLM Architectures",</a:t>
             </a:r>
           </a:p>
           <a:p>
             <a:r>
-              <a:rPr lang="en-US" dirty="0"/>
+              <a:rPr dirty="0"/>
               <a:t>    [</a:t>
             </a:r>
           </a:p>
           <a:p>
             <a:r>
-              <a:rPr lang="en-US" dirty="0"/>
+              <a:rPr dirty="0"/>
               <a:t>        "Encoder (BERT): bidirectional context understanding",</a:t>
             </a:r>
           </a:p>
           <a:p>
             <a:r>
-              <a:rPr lang="en-US" dirty="0"/>
+              <a:rPr dirty="0"/>
               <a:t>        "Encoder-decoder (BART/T5): input → output transformation",</a:t>
             </a:r>
           </a:p>
           <a:p>
             <a:r>
-              <a:rPr lang="en-US" dirty="0"/>
+              <a:rPr dirty="0"/>
               <a:t>        "Decoder-only (GPT, Claude): autoregressive generation",</a:t>
             </a:r>
           </a:p>
           <a:p>
             <a:r>
-              <a:rPr lang="en-US" dirty="0"/>
+              <a:rPr dirty="0"/>
               <a:t>        "Tradeoff: understanding vs generation"</a:t>
             </a:r>
           </a:p>
           <a:p>
             <a:r>
-              <a:rPr lang="en-US" dirty="0"/>
+              <a:rPr dirty="0"/>
               <a:t>    ]</a:t>
             </a:r>
           </a:p>
           <a:p>
             <a:r>
-              <a:rPr lang="en-US" dirty="0"/>
+              <a:rPr dirty="0"/>
               <a:t>)</a:t>
             </a:r>
           </a:p>
           <a:p>
-            <a:endParaRPr lang="en-US" dirty="0"/>
-          </a:p>
-          <a:p>
-            <a:r>
-              <a:rPr lang="en-US" dirty="0"/>
+            <a:endParaRPr dirty="0"/>
+          </a:p>
+          <a:p>
+            <a:r>
+              <a:rPr dirty="0"/>
               <a:t># 6. Claude Sonnet 4 &amp; OpenAI GPT-5.2</a:t>
             </a:r>
           </a:p>
           <a:p>
             <a:r>
-              <a:rPr lang="en-US" dirty="0" err="1"/>
+              <a:rPr dirty="0" err="1"/>
               <a:t>add_slide</a:t>
             </a:r>
             <a:r>
-              <a:rPr lang="en-US" dirty="0"/>
+              <a:rPr dirty="0"/>
               <a:t>(</a:t>
             </a:r>
           </a:p>
           <a:p>
             <a:r>
-              <a:rPr lang="en-US" dirty="0"/>
+              <a:rPr dirty="0"/>
               <a:t>    "Production LLMs Used",</a:t>
             </a:r>
           </a:p>
           <a:p>
             <a:r>
-              <a:rPr lang="en-US" dirty="0"/>
+              <a:rPr dirty="0"/>
               <a:t>    [</a:t>
             </a:r>
           </a:p>
           <a:p>
             <a:r>
-              <a:rPr lang="en-US" dirty="0"/>
+              <a:rPr dirty="0"/>
               <a:t>        "Claude Sonnet 4: strong reasoning, low hallucination",</a:t>
             </a:r>
           </a:p>
           <a:p>
             <a:r>
-              <a:rPr lang="en-US" dirty="0"/>
+              <a:rPr dirty="0"/>
               <a:t>        "OpenAI GPT-5.2: structured outputs, high controllability",</a:t>
             </a:r>
           </a:p>
           <a:p>
             <a:r>
-              <a:rPr lang="en-US" dirty="0"/>
+              <a:rPr dirty="0"/>
               <a:t>        "Both support long context + JSON extraction",</a:t>
             </a:r>
           </a:p>
           <a:p>
             <a:r>
-              <a:rPr lang="en-US" dirty="0"/>
+              <a:rPr dirty="0"/>
               <a:t>        "Behavior shaped heavily by prompt design"</a:t>
             </a:r>
           </a:p>
           <a:p>
             <a:r>
-              <a:rPr lang="en-US" dirty="0"/>
+              <a:rPr dirty="0"/>
               <a:t>    ]</a:t>
             </a:r>
           </a:p>
           <a:p>
             <a:r>
-              <a:rPr lang="en-US" dirty="0"/>
+              <a:rPr dirty="0"/>
               <a:t>)</a:t>
             </a:r>
           </a:p>
           <a:p>
-            <a:endParaRPr lang="en-US" dirty="0"/>
-          </a:p>
-          <a:p>
-            <a:r>
-              <a:rPr lang="en-US" dirty="0"/>
+            <a:endParaRPr dirty="0"/>
+          </a:p>
+          <a:p>
+            <a:r>
+              <a:rPr dirty="0"/>
               <a:t># 7. Why prompt engineering matters</a:t>
             </a:r>
           </a:p>
           <a:p>
             <a:r>
-              <a:rPr lang="en-US" dirty="0" err="1"/>
+              <a:rPr dirty="0" err="1"/>
               <a:t>add_slide</a:t>
             </a:r>
             <a:r>
-              <a:rPr lang="en-US" dirty="0"/>
+              <a:rPr dirty="0"/>
               <a:t>(</a:t>
             </a:r>
           </a:p>
           <a:p>
             <a:r>
-              <a:rPr lang="en-US" dirty="0"/>
+              <a:rPr dirty="0"/>
               <a:t>    "Why Prompt Engineering?",</a:t>
             </a:r>
           </a:p>
           <a:p>
             <a:r>
-              <a:rPr lang="en-US" dirty="0"/>
+              <a:rPr dirty="0"/>
               <a:t>    [</a:t>
             </a:r>
           </a:p>
           <a:p>
             <a:r>
-              <a:rPr lang="en-US" dirty="0"/>
+              <a:rPr dirty="0"/>
               <a:t>        "LLMs are non-deterministic",</a:t>
             </a:r>
           </a:p>
           <a:p>
             <a:r>
-              <a:rPr lang="en-US" dirty="0"/>
+              <a:rPr dirty="0"/>
               <a:t>        "Outputs depend on instruction clarity",</a:t>
             </a:r>
           </a:p>
           <a:p>
             <a:r>
-              <a:rPr lang="en-US" dirty="0"/>
+              <a:rPr dirty="0"/>
               <a:t>        "Poor prompts → hallucination + inconsistency",</a:t>
             </a:r>
           </a:p>
           <a:p>
             <a:r>
-              <a:rPr lang="en-US" dirty="0"/>
+              <a:rPr dirty="0"/>
               <a:t>        "Goal: maximize accuracy, minimize fabrication"</a:t>
             </a:r>
           </a:p>
           <a:p>
             <a:r>
-              <a:rPr lang="en-US" dirty="0"/>
+              <a:rPr dirty="0"/>
               <a:t>    ]</a:t>
             </a:r>
           </a:p>
           <a:p>
             <a:r>
-              <a:rPr lang="en-US" dirty="0"/>
+              <a:rPr dirty="0"/>
               <a:t>)</a:t>
             </a:r>
           </a:p>
           <a:p>
-            <a:endParaRPr lang="en-US" dirty="0"/>
-          </a:p>
-          <a:p>
-            <a:r>
-              <a:rPr lang="en-US" dirty="0"/>
+            <a:endParaRPr dirty="0"/>
+          </a:p>
+          <a:p>
+            <a:r>
+              <a:rPr dirty="0"/>
               <a:t># 8. Prompt engineering definition</a:t>
             </a:r>
           </a:p>
           <a:p>
             <a:r>
-              <a:rPr lang="en-US" dirty="0" err="1"/>
+              <a:rPr dirty="0" err="1"/>
               <a:t>add_slide</a:t>
             </a:r>
             <a:r>
-              <a:rPr lang="en-US" dirty="0"/>
+              <a:rPr dirty="0"/>
               <a:t>(</a:t>
             </a:r>
           </a:p>
           <a:p>
             <a:r>
-              <a:rPr lang="en-US" dirty="0"/>
+              <a:rPr dirty="0"/>
               <a:t>    "Prompt Engineering",</a:t>
             </a:r>
           </a:p>
           <a:p>
             <a:r>
-              <a:rPr lang="en-US" dirty="0"/>
+              <a:rPr dirty="0"/>
               <a:t>    [</a:t>
             </a:r>
           </a:p>
           <a:p>
             <a:r>
-              <a:rPr lang="en-US" dirty="0"/>
+              <a:rPr dirty="0"/>
               <a:t>        "Designing instructions to control model behavior",</a:t>
             </a:r>
           </a:p>
           <a:p>
             <a:r>
-              <a:rPr lang="en-US" dirty="0"/>
+              <a:rPr dirty="0"/>
               <a:t>        "Uses roles, constraints, examples, formatting",</a:t>
             </a:r>
           </a:p>
           <a:p>
             <a:r>
-              <a:rPr lang="en-US" dirty="0"/>
+              <a:rPr dirty="0"/>
               <a:t>        "Critical for clinical safety applications",</a:t>
             </a:r>
           </a:p>
           <a:p>
             <a:r>
-              <a:rPr lang="en-US" dirty="0"/>
+              <a:rPr dirty="0"/>
               <a:t>        "Enables structured extraction without retraining"</a:t>
             </a:r>
           </a:p>
           <a:p>
             <a:r>
-              <a:rPr lang="en-US" dirty="0"/>
+              <a:rPr dirty="0"/>
               <a:t>    ]</a:t>
             </a:r>
           </a:p>
           <a:p>
             <a:r>
-              <a:rPr lang="en-US" dirty="0"/>
+              <a:rPr dirty="0"/>
               <a:t>)</a:t>
             </a:r>
           </a:p>
           <a:p>
-            <a:endParaRPr lang="en-US" dirty="0"/>
-          </a:p>
-          <a:p>
-            <a:r>
-              <a:rPr lang="en-US" dirty="0"/>
+            <a:endParaRPr dirty="0"/>
+          </a:p>
+          <a:p>
+            <a:r>
+              <a:rPr dirty="0"/>
               <a:t># 9. Automated prompt engineering</a:t>
             </a:r>
           </a:p>
           <a:p>
             <a:r>
-              <a:rPr lang="en-US" dirty="0" err="1"/>
+              <a:rPr dirty="0" err="1"/>
               <a:t>add_slide</a:t>
             </a:r>
             <a:r>
-              <a:rPr lang="en-US" dirty="0"/>
+              <a:rPr dirty="0"/>
               <a:t>(</a:t>
             </a:r>
           </a:p>
           <a:p>
             <a:r>
-              <a:rPr lang="en-US" dirty="0"/>
+              <a:rPr dirty="0"/>
               <a:t>    "Automated Prompt Engineering",</a:t>
             </a:r>
           </a:p>
           <a:p>
             <a:r>
-              <a:rPr lang="en-US" dirty="0"/>
+              <a:rPr dirty="0"/>
               <a:t>    [</a:t>
             </a:r>
           </a:p>
           <a:p>
             <a:r>
-              <a:rPr lang="en-US" dirty="0"/>
+              <a:rPr dirty="0"/>
               <a:t>        "Systematic testing of prompt variants",</a:t>
             </a:r>
           </a:p>
           <a:p>
             <a:r>
-              <a:rPr lang="en-US" dirty="0"/>
+              <a:rPr dirty="0"/>
               <a:t>        "Evaluate performance across multiple runs",</a:t>
             </a:r>
           </a:p>
           <a:p>
             <a:r>
-              <a:rPr lang="en-US" dirty="0"/>
+              <a:rPr dirty="0"/>
               <a:t>        "Optimize prompts based on metrics",</a:t>
             </a:r>
           </a:p>
           <a:p>
             <a:r>
-              <a:rPr lang="en-US" dirty="0"/>
+              <a:rPr dirty="0"/>
               <a:t>        "Treat prompts as version-controlled artifacts"</a:t>
             </a:r>
           </a:p>
           <a:p>
             <a:r>
-              <a:rPr lang="en-US" dirty="0"/>
+              <a:rPr dirty="0"/>
               <a:t>    ]</a:t>
             </a:r>
           </a:p>
           <a:p>
             <a:r>
-              <a:rPr lang="en-US" dirty="0"/>
+              <a:rPr dirty="0"/>
               <a:t>)</a:t>
             </a:r>
           </a:p>
           <a:p>
-            <a:endParaRPr lang="en-US" dirty="0"/>
-          </a:p>
-          <a:p>
-            <a:r>
-              <a:rPr lang="en-US" dirty="0"/>
+            <a:endParaRPr dirty="0"/>
+          </a:p>
+          <a:p>
+            <a:r>
+              <a:rPr dirty="0"/>
               <a:t># 10. Project overview</a:t>
             </a:r>
           </a:p>
           <a:p>
             <a:r>
-              <a:rPr lang="en-US" dirty="0" err="1"/>
+              <a:rPr dirty="0" err="1"/>
               <a:t>add_slide</a:t>
             </a:r>
             <a:r>
-              <a:rPr lang="en-US" dirty="0"/>
+              <a:rPr dirty="0"/>
               <a:t>(</a:t>
             </a:r>
           </a:p>
           <a:p>
             <a:r>
-              <a:rPr lang="en-US" dirty="0"/>
+              <a:rPr dirty="0"/>
               <a:t>    "Project Overview",</a:t>
             </a:r>
           </a:p>
           <a:p>
             <a:r>
-              <a:rPr lang="en-US" dirty="0"/>
+              <a:rPr dirty="0"/>
               <a:t>    [</a:t>
             </a:r>
           </a:p>
           <a:p>
             <a:r>
-              <a:rPr lang="en-US" dirty="0"/>
+              <a:rPr dirty="0"/>
               <a:t>        "Input: breast cancer radiology + pathology PDFs",</a:t>
             </a:r>
           </a:p>
           <a:p>
             <a:r>
-              <a:rPr lang="en-US" dirty="0"/>
+              <a:rPr dirty="0"/>
               <a:t>        "Task: extract 14 structured clinical features",</a:t>
             </a:r>
           </a:p>
           <a:p>
             <a:r>
-              <a:rPr lang="en-US" dirty="0"/>
+              <a:rPr dirty="0"/>
               <a:t>        "Compare LLM vs human annotations",</a:t>
             </a:r>
           </a:p>
           <a:p>
             <a:r>
-              <a:rPr lang="en-US" dirty="0"/>
+              <a:rPr dirty="0"/>
               <a:t>        "Evaluate accuracy, omission, fabrication"</a:t>
             </a:r>
           </a:p>
           <a:p>
             <a:r>
-              <a:rPr lang="en-US" dirty="0"/>
+              <a:rPr dirty="0"/>
               <a:t>    ]</a:t>
             </a:r>
           </a:p>
           <a:p>
             <a:r>
-              <a:rPr lang="en-US" dirty="0"/>
+              <a:rPr dirty="0"/>
               <a:t>)</a:t>
             </a:r>
           </a:p>
           <a:p>
-            <a:endParaRPr lang="en-US" dirty="0"/>
-          </a:p>
-          <a:p>
-            <a:r>
-              <a:rPr lang="en-US" dirty="0"/>
+            <a:endParaRPr dirty="0"/>
+          </a:p>
+          <a:p>
+            <a:r>
+              <a:rPr dirty="0"/>
               <a:t># 11. Key metric definitions</a:t>
             </a:r>
           </a:p>
           <a:p>
             <a:r>
-              <a:rPr lang="en-US" dirty="0" err="1"/>
+              <a:rPr dirty="0" err="1"/>
               <a:t>add_slide</a:t>
             </a:r>
             <a:r>
-              <a:rPr lang="en-US" dirty="0"/>
+              <a:rPr dirty="0"/>
               <a:t>(</a:t>
             </a:r>
           </a:p>
           <a:p>
             <a:r>
-              <a:rPr lang="en-US" dirty="0"/>
+              <a:rPr dirty="0"/>
               <a:t>    "Evaluation Metrics",</a:t>
             </a:r>
           </a:p>
           <a:p>
             <a:r>
-              <a:rPr lang="en-US" dirty="0"/>
+              <a:rPr dirty="0"/>
               <a:t>    [</a:t>
             </a:r>
           </a:p>
           <a:p>
             <a:r>
-              <a:rPr lang="en-US" dirty="0"/>
+              <a:rPr dirty="0"/>
               <a:t>        "TP: correct extraction",</a:t>
             </a:r>
           </a:p>
           <a:p>
             <a:r>
-              <a:rPr lang="en-US" dirty="0"/>
+              <a:rPr dirty="0"/>
               <a:t>        "FN: omission",</a:t>
             </a:r>
           </a:p>
           <a:p>
             <a:r>
-              <a:rPr lang="en-US" dirty="0"/>
+              <a:rPr dirty="0"/>
               <a:t>        "FP: fabrication",</a:t>
             </a:r>
           </a:p>
           <a:p>
             <a:r>
-              <a:rPr lang="en-US" dirty="0"/>
+              <a:rPr dirty="0"/>
               <a:t>        "TN: correct absence",</a:t>
             </a:r>
           </a:p>
           <a:p>
             <a:r>
-              <a:rPr lang="en-US" dirty="0"/>
+              <a:rPr dirty="0"/>
               <a:t>        "Primary outcome: fabrication rate = FP / (FP + TN)"</a:t>
             </a:r>
           </a:p>
           <a:p>
             <a:r>
-              <a:rPr lang="en-US" dirty="0"/>
+              <a:rPr dirty="0"/>
               <a:t>    ]</a:t>
             </a:r>
           </a:p>
           <a:p>
             <a:r>
-              <a:rPr lang="en-US" dirty="0"/>
+              <a:rPr dirty="0"/>
               <a:t>)</a:t>
             </a:r>
           </a:p>
           <a:p>
-            <a:endParaRPr lang="en-US" dirty="0"/>
-          </a:p>
-          <a:p>
-            <a:r>
-              <a:rPr lang="en-US" dirty="0"/>
+            <a:endParaRPr dirty="0"/>
+          </a:p>
+          <a:p>
+            <a:r>
+              <a:rPr dirty="0"/>
               <a:t># 12. Prompt versions</a:t>
             </a:r>
           </a:p>
           <a:p>
             <a:r>
-              <a:rPr lang="en-US" dirty="0" err="1"/>
+              <a:rPr dirty="0" err="1"/>
               <a:t>add_slide</a:t>
             </a:r>
             <a:r>
-              <a:rPr lang="en-US" dirty="0"/>
+              <a:rPr dirty="0"/>
               <a:t>(</a:t>
             </a:r>
           </a:p>
           <a:p>
             <a:r>
-              <a:rPr lang="en-US" dirty="0"/>
+              <a:rPr dirty="0"/>
               <a:t>    "Prompt Versions",</a:t>
             </a:r>
           </a:p>
           <a:p>
             <a:r>
-              <a:rPr lang="en-US" dirty="0"/>
+              <a:rPr dirty="0"/>
               <a:t>    [</a:t>
             </a:r>
           </a:p>
           <a:p>
             <a:r>
-              <a:rPr lang="en-US" dirty="0"/>
+              <a:rPr dirty="0"/>
               <a:t>        "Prompt V1: zero-shot extraction",</a:t>
             </a:r>
           </a:p>
           <a:p>
             <a:r>
-              <a:rPr lang="en-US" dirty="0"/>
+              <a:rPr dirty="0"/>
               <a:t>        "Prompt V2: structured developer prompt",</a:t>
             </a:r>
           </a:p>
           <a:p>
             <a:r>
-              <a:rPr lang="en-US" dirty="0"/>
+              <a:rPr dirty="0"/>
               <a:t>        "Strict anti-fabrication rules",</a:t>
             </a:r>
           </a:p>
           <a:p>
             <a:r>
-              <a:rPr lang="en-US" dirty="0"/>
+              <a:rPr dirty="0"/>
               <a:t>        "JSON output enforcement"</a:t>
             </a:r>
           </a:p>
           <a:p>
             <a:r>
-              <a:rPr lang="en-US" dirty="0"/>
+              <a:rPr dirty="0"/>
               <a:t>    ]</a:t>
             </a:r>
           </a:p>
           <a:p>
             <a:r>
-              <a:rPr lang="en-US" dirty="0"/>
+              <a:rPr dirty="0"/>
               <a:t>)</a:t>
             </a:r>
           </a:p>
           <a:p>
-            <a:endParaRPr lang="en-US" dirty="0"/>
-          </a:p>
-          <a:p>
-            <a:r>
-              <a:rPr lang="en-US" dirty="0"/>
+            <a:endParaRPr dirty="0"/>
+          </a:p>
+          <a:p>
+            <a:r>
+              <a:rPr dirty="0"/>
               <a:t># 13. Developer prompt principles</a:t>
             </a:r>
           </a:p>
           <a:p>
             <a:r>
-              <a:rPr lang="en-US" dirty="0" err="1"/>
+              <a:rPr dirty="0" err="1"/>
               <a:t>add_slide</a:t>
             </a:r>
             <a:r>
-              <a:rPr lang="en-US" dirty="0"/>
+              <a:rPr dirty="0"/>
               <a:t>(</a:t>
             </a:r>
           </a:p>
           <a:p>
             <a:r>
-              <a:rPr lang="en-US" dirty="0"/>
+              <a:rPr dirty="0"/>
               <a:t>    "Structured Developer Prompt (V2)",</a:t>
             </a:r>
           </a:p>
           <a:p>
             <a:r>
-              <a:rPr lang="en-US" dirty="0"/>
+              <a:rPr dirty="0"/>
               <a:t>    [</a:t>
             </a:r>
           </a:p>
           <a:p>
             <a:r>
-              <a:rPr lang="en-US" dirty="0"/>
+              <a:rPr dirty="0"/>
               <a:t>        "Hard constraints: no inference allowed",</a:t>
             </a:r>
           </a:p>
           <a:p>
             <a:r>
-              <a:rPr lang="en-US" dirty="0"/>
+              <a:rPr dirty="0"/>
               <a:t>        "Return 'Not reported' if missing",</a:t>
             </a:r>
           </a:p>
           <a:p>
             <a:r>
-              <a:rPr lang="en-US" dirty="0"/>
+              <a:rPr dirty="0"/>
               <a:t>        "Return 'Indeterminate' if conflicting",</a:t>
             </a:r>
           </a:p>
           <a:p>
             <a:r>
-              <a:rPr lang="en-US" dirty="0"/>
+              <a:rPr dirty="0"/>
               <a:t>        "Evidence-based extraction required"</a:t>
             </a:r>
           </a:p>
           <a:p>
             <a:r>
-              <a:rPr lang="en-US" dirty="0"/>
+              <a:rPr dirty="0"/>
               <a:t>    ]</a:t>
             </a:r>
           </a:p>
           <a:p>
             <a:r>
-              <a:rPr lang="en-US" dirty="0"/>
+              <a:rPr dirty="0"/>
               <a:t>)</a:t>
             </a:r>
           </a:p>
           <a:p>
-            <a:endParaRPr lang="en-US" dirty="0"/>
-          </a:p>
-          <a:p>
-            <a:r>
-              <a:rPr lang="en-US" dirty="0"/>
+            <a:endParaRPr dirty="0"/>
+          </a:p>
+          <a:p>
+            <a:r>
+              <a:rPr dirty="0"/>
               <a:t># 14. Prompt structure</a:t>
             </a:r>
           </a:p>
           <a:p>
             <a:r>
-              <a:rPr lang="en-US" dirty="0" err="1"/>
+              <a:rPr dirty="0" err="1"/>
               <a:t>add_slide</a:t>
             </a:r>
             <a:r>
-              <a:rPr lang="en-US" dirty="0"/>
+              <a:rPr dirty="0"/>
               <a:t>(</a:t>
             </a:r>
           </a:p>
           <a:p>
             <a:r>
-              <a:rPr lang="en-US" dirty="0"/>
+              <a:rPr dirty="0"/>
               <a:t>    "Prompt Structure",</a:t>
             </a:r>
           </a:p>
           <a:p>
             <a:r>
-              <a:rPr lang="en-US" dirty="0"/>
+              <a:rPr dirty="0"/>
               <a:t>    [</a:t>
             </a:r>
           </a:p>
           <a:p>
             <a:r>
-              <a:rPr lang="en-US" dirty="0"/>
+              <a:rPr dirty="0"/>
               <a:t>        "System / developer message defines rules",</a:t>
             </a:r>
           </a:p>
           <a:p>
             <a:r>
-              <a:rPr lang="en-US" dirty="0"/>
+              <a:rPr dirty="0"/>
               <a:t>        "User message provides document",</a:t>
             </a:r>
           </a:p>
           <a:p>
             <a:r>
-              <a:rPr lang="en-US" dirty="0"/>
+              <a:rPr dirty="0"/>
               <a:t>        "Assistant outputs structured JSON",</a:t>
             </a:r>
           </a:p>
           <a:p>
             <a:r>
-              <a:rPr lang="en-US" dirty="0"/>
+              <a:rPr dirty="0"/>
               <a:t>        "Separation of instructions and data"</a:t>
             </a:r>
           </a:p>
           <a:p>
             <a:r>
-              <a:rPr lang="en-US" dirty="0"/>
+              <a:rPr dirty="0"/>
               <a:t>    ]</a:t>
             </a:r>
           </a:p>
           <a:p>
             <a:r>
-              <a:rPr lang="en-US" dirty="0"/>
+              <a:rPr dirty="0"/>
               <a:t>)</a:t>
             </a:r>
           </a:p>
           <a:p>
-            <a:endParaRPr lang="en-US" dirty="0"/>
-          </a:p>
-          <a:p>
-            <a:r>
-              <a:rPr lang="en-US" dirty="0"/>
+            <a:endParaRPr dirty="0"/>
+          </a:p>
+          <a:p>
+            <a:r>
+              <a:rPr dirty="0"/>
               <a:t># 15. Prompting techniques</a:t>
             </a:r>
           </a:p>
           <a:p>
             <a:r>
-              <a:rPr lang="en-US" dirty="0" err="1"/>
+              <a:rPr dirty="0" err="1"/>
               <a:t>add_slide</a:t>
             </a:r>
             <a:r>
-              <a:rPr lang="en-US" dirty="0"/>
+              <a:rPr dirty="0"/>
               <a:t>(</a:t>
             </a:r>
           </a:p>
           <a:p>
             <a:r>
-              <a:rPr lang="en-US" dirty="0"/>
+              <a:rPr dirty="0"/>
               <a:t>    "Prompting Techniques Evaluated",</a:t>
             </a:r>
           </a:p>
           <a:p>
             <a:r>
-              <a:rPr lang="en-US" dirty="0"/>
+              <a:rPr dirty="0"/>
               <a:t>    [</a:t>
             </a:r>
           </a:p>
           <a:p>
             <a:r>
-              <a:rPr lang="en-US" dirty="0"/>
+              <a:rPr dirty="0"/>
               <a:t>        "Zero-shot",</a:t>
             </a:r>
           </a:p>
           <a:p>
             <a:r>
-              <a:rPr lang="en-US" dirty="0"/>
+              <a:rPr dirty="0"/>
               <a:t>        "Chain-of-thought",</a:t>
             </a:r>
           </a:p>
           <a:p>
             <a:r>
-              <a:rPr lang="en-US" dirty="0"/>
+              <a:rPr dirty="0"/>
               <a:t>        "Few-shot",</a:t>
             </a:r>
           </a:p>
           <a:p>
             <a:r>
-              <a:rPr lang="en-US" dirty="0"/>
+              <a:rPr dirty="0"/>
               <a:t>        "RAG (retrieval augmented generation)",</a:t>
             </a:r>
           </a:p>
           <a:p>
             <a:r>
-              <a:rPr lang="en-US" dirty="0"/>
+              <a:rPr dirty="0"/>
               <a:t>        "Program-aided prompting",</a:t>
             </a:r>
           </a:p>
           <a:p>
             <a:r>
-              <a:rPr lang="en-US" dirty="0"/>
+              <a:rPr dirty="0"/>
               <a:t>        "</a:t>
             </a:r>
             <a:r>
-              <a:rPr lang="en-US" dirty="0" err="1"/>
+              <a:rPr dirty="0" err="1"/>
               <a:t>ReAct</a:t>
             </a:r>
             <a:r>
-              <a:rPr lang="en-US" dirty="0"/>
+              <a:rPr dirty="0"/>
               <a:t> / BFOP"</a:t>
             </a:r>
           </a:p>
           <a:p>
             <a:r>
-              <a:rPr lang="en-US" dirty="0"/>
+              <a:rPr dirty="0"/>
               <a:t>    ]</a:t>
             </a:r>
           </a:p>
           <a:p>
             <a:r>
-              <a:rPr lang="en-US" dirty="0"/>
+              <a:rPr dirty="0"/>
               <a:t>)</a:t>
             </a:r>
           </a:p>
           <a:p>
-            <a:endParaRPr lang="en-US" dirty="0"/>
-          </a:p>
-          <a:p>
-            <a:r>
-              <a:rPr lang="en-US" dirty="0"/>
+            <a:endParaRPr dirty="0"/>
+          </a:p>
+          <a:p>
+            <a:r>
+              <a:rPr dirty="0"/>
               <a:t># 16. Why prompting over fine-tuning</a:t>
             </a:r>
           </a:p>
           <a:p>
             <a:r>
-              <a:rPr lang="en-US" dirty="0" err="1"/>
+              <a:rPr dirty="0" err="1"/>
               <a:t>add_slide</a:t>
             </a:r>
             <a:r>
-              <a:rPr lang="en-US" dirty="0"/>
+              <a:rPr dirty="0"/>
               <a:t>(</a:t>
             </a:r>
           </a:p>
           <a:p>
             <a:r>
-              <a:rPr lang="en-US" dirty="0"/>
+              <a:rPr dirty="0"/>
               <a:t>    "Prompting vs Fine-Tuning",</a:t>
             </a:r>
           </a:p>
           <a:p>
             <a:r>
-              <a:rPr lang="en-US" dirty="0"/>
+              <a:rPr dirty="0"/>
               <a:t>    [</a:t>
             </a:r>
           </a:p>
           <a:p>
             <a:r>
-              <a:rPr lang="en-US" dirty="0"/>
+              <a:rPr dirty="0"/>
               <a:t>        "No need for large labeled datasets",</a:t>
             </a:r>
           </a:p>
           <a:p>
             <a:r>
-              <a:rPr lang="en-US" dirty="0"/>
+              <a:rPr dirty="0"/>
               <a:t>        "Faster iteration cycle",</a:t>
             </a:r>
           </a:p>
           <a:p>
             <a:r>
-              <a:rPr lang="en-US" dirty="0"/>
+              <a:rPr dirty="0"/>
               <a:t>        "Lower cost",</a:t>
             </a:r>
           </a:p>
           <a:p>
             <a:r>
-              <a:rPr lang="en-US" dirty="0"/>
+              <a:rPr dirty="0"/>
               <a:t>        "More interpretable and controllable",</a:t>
             </a:r>
           </a:p>
           <a:p>
             <a:r>
-              <a:rPr lang="en-US" dirty="0"/>
+              <a:rPr dirty="0"/>
               <a:t>        "Easier safety constraints"</a:t>
             </a:r>
           </a:p>
           <a:p>
             <a:r>
-              <a:rPr lang="en-US" dirty="0"/>
+              <a:rPr dirty="0"/>
               <a:t>    ]</a:t>
             </a:r>
           </a:p>
           <a:p>
             <a:r>
-              <a:rPr lang="en-US" dirty="0"/>
+              <a:rPr dirty="0"/>
               <a:t>)</a:t>
             </a:r>
           </a:p>
           <a:p>
-            <a:endParaRPr lang="en-US" dirty="0"/>
-          </a:p>
-          <a:p>
-            <a:r>
-              <a:rPr lang="en-US" dirty="0"/>
+            <a:endParaRPr dirty="0"/>
+          </a:p>
+          <a:p>
+            <a:r>
+              <a:rPr dirty="0"/>
               <a:t># 17. Meta prompting</a:t>
             </a:r>
           </a:p>
           <a:p>
             <a:r>
-              <a:rPr lang="en-US" dirty="0" err="1"/>
+              <a:rPr dirty="0" err="1"/>
               <a:t>add_slide</a:t>
             </a:r>
             <a:r>
-              <a:rPr lang="en-US" dirty="0"/>
+              <a:rPr dirty="0"/>
               <a:t>(</a:t>
             </a:r>
           </a:p>
           <a:p>
             <a:r>
-              <a:rPr lang="en-US" dirty="0"/>
+              <a:rPr dirty="0"/>
               <a:t>    "Meta Prompting",</a:t>
             </a:r>
           </a:p>
           <a:p>
             <a:r>
-              <a:rPr lang="en-US" dirty="0"/>
+              <a:rPr dirty="0"/>
               <a:t>    [</a:t>
             </a:r>
           </a:p>
           <a:p>
             <a:r>
-              <a:rPr lang="en-US" dirty="0"/>
+              <a:rPr dirty="0"/>
               <a:t>        "Prompts that define how prompts should behave",</a:t>
             </a:r>
           </a:p>
           <a:p>
             <a:r>
-              <a:rPr lang="en-US" dirty="0"/>
+              <a:rPr dirty="0"/>
               <a:t>        "Controls reasoning, format, and validation",</a:t>
             </a:r>
           </a:p>
           <a:p>
             <a:r>
-              <a:rPr lang="en-US" dirty="0"/>
+              <a:rPr dirty="0"/>
               <a:t>        "Used to enforce consistency",</a:t>
             </a:r>
           </a:p>
           <a:p>
             <a:r>
-              <a:rPr lang="en-US" dirty="0"/>
+              <a:rPr dirty="0"/>
               <a:t>        "Critical for production systems"</a:t>
             </a:r>
           </a:p>
           <a:p>
             <a:r>
-              <a:rPr lang="en-US" dirty="0"/>
+              <a:rPr dirty="0"/>
               <a:t>    ]</a:t>
             </a:r>
           </a:p>
           <a:p>
             <a:r>
-              <a:rPr lang="en-US" dirty="0"/>
+              <a:rPr dirty="0"/>
               <a:t>)</a:t>
             </a:r>
           </a:p>
           <a:p>
-            <a:endParaRPr lang="en-US" dirty="0"/>
-          </a:p>
-          <a:p>
-            <a:r>
-              <a:rPr lang="en-US" dirty="0"/>
+            <a:endParaRPr dirty="0"/>
+          </a:p>
+          <a:p>
+            <a:r>
+              <a:rPr dirty="0"/>
               <a:t># 18. RAG introduction</a:t>
             </a:r>
           </a:p>
           <a:p>
             <a:r>
-              <a:rPr lang="en-US" dirty="0" err="1"/>
+              <a:rPr dirty="0" err="1"/>
               <a:t>add_slide</a:t>
             </a:r>
             <a:r>
-              <a:rPr lang="en-US" dirty="0"/>
+              <a:rPr dirty="0"/>
               <a:t>(</a:t>
             </a:r>
           </a:p>
           <a:p>
             <a:r>
-              <a:rPr lang="en-US" dirty="0"/>
+              <a:rPr dirty="0"/>
               <a:t>    "Retrieval-Augmented Generation (RAG)",</a:t>
             </a:r>
           </a:p>
           <a:p>
             <a:r>
-              <a:rPr lang="en-US" dirty="0"/>
+              <a:rPr dirty="0"/>
               <a:t>    [</a:t>
             </a:r>
           </a:p>
           <a:p>
             <a:r>
-              <a:rPr lang="en-US" dirty="0"/>
+              <a:rPr dirty="0"/>
               <a:t>        "LLM restricted to retrieved document chunks",</a:t>
             </a:r>
           </a:p>
           <a:p>
             <a:r>
-              <a:rPr lang="en-US" dirty="0"/>
+              <a:rPr dirty="0"/>
               <a:t>        "Reduces hallucination",</a:t>
             </a:r>
           </a:p>
           <a:p>
             <a:r>
-              <a:rPr lang="en-US" dirty="0"/>
+              <a:rPr dirty="0"/>
               <a:t>        "Improves factual grounding",</a:t>
             </a:r>
           </a:p>
           <a:p>
             <a:r>
-              <a:rPr lang="en-US" dirty="0"/>
+              <a:rPr dirty="0"/>
               <a:t>        "Core component of pipeline"</a:t>
             </a:r>
           </a:p>
           <a:p>
             <a:r>
-              <a:rPr lang="en-US" dirty="0"/>
+              <a:rPr dirty="0"/>
               <a:t>    ]</a:t>
             </a:r>
           </a:p>
           <a:p>
             <a:r>
-              <a:rPr lang="en-US" dirty="0"/>
+              <a:rPr dirty="0"/>
               <a:t>)</a:t>
             </a:r>
           </a:p>
           <a:p>
-            <a:endParaRPr lang="en-US" dirty="0"/>
-          </a:p>
-          <a:p>
-            <a:r>
-              <a:rPr lang="en-US" dirty="0"/>
+            <a:endParaRPr dirty="0"/>
+          </a:p>
+          <a:p>
+            <a:r>
+              <a:rPr dirty="0"/>
               <a:t># 19. </a:t>
             </a:r>
             <a:r>
-              <a:rPr lang="en-US" dirty="0" err="1"/>
+              <a:rPr dirty="0" err="1"/>
               <a:t>LangGraph</a:t>
             </a:r>
             <a:r>
-              <a:rPr lang="en-US" dirty="0"/>
+              <a:rPr dirty="0"/>
               <a:t> pipeline</a:t>
             </a:r>
           </a:p>
           <a:p>
             <a:r>
-              <a:rPr lang="en-US" dirty="0" err="1"/>
+              <a:rPr dirty="0" err="1"/>
               <a:t>add_slide</a:t>
             </a:r>
             <a:r>
-              <a:rPr lang="en-US" dirty="0"/>
+              <a:rPr dirty="0"/>
               <a:t>(</a:t>
             </a:r>
           </a:p>
           <a:p>
             <a:r>
-              <a:rPr lang="en-US" dirty="0"/>
+              <a:rPr dirty="0"/>
               <a:t>    "</a:t>
             </a:r>
             <a:r>
-              <a:rPr lang="en-US" dirty="0" err="1"/>
+              <a:rPr dirty="0" err="1"/>
               <a:t>LangGraph</a:t>
             </a:r>
             <a:r>
-              <a:rPr lang="en-US" dirty="0"/>
+              <a:rPr dirty="0"/>
               <a:t> Agentic Pipeline",</a:t>
             </a:r>
           </a:p>
           <a:p>
             <a:r>
-              <a:rPr lang="en-US" dirty="0"/>
+              <a:rPr dirty="0"/>
               <a:t>    [</a:t>
             </a:r>
           </a:p>
           <a:p>
             <a:r>
-              <a:rPr lang="en-US" dirty="0"/>
+              <a:rPr dirty="0"/>
               <a:t>        "Query generation",</a:t>
             </a:r>
           </a:p>
           <a:p>
             <a:r>
-              <a:rPr lang="en-US" dirty="0"/>
+              <a:rPr dirty="0"/>
               <a:t>        "Evidence retrieval",</a:t>
             </a:r>
           </a:p>
           <a:p>
             <a:r>
-              <a:rPr lang="en-US" dirty="0"/>
+              <a:rPr dirty="0"/>
               <a:t>        "Evidence grading",</a:t>
             </a:r>
           </a:p>
           <a:p>
             <a:r>
-              <a:rPr lang="en-US" dirty="0"/>
+              <a:rPr dirty="0"/>
               <a:t>        "Validation decision",</a:t>
             </a:r>
           </a:p>
           <a:p>
             <a:r>
-              <a:rPr lang="en-US" dirty="0"/>
+              <a:rPr dirty="0"/>
               <a:t>        "Iterative query refinement"</a:t>
             </a:r>
           </a:p>
           <a:p>
             <a:r>
-              <a:rPr lang="en-US" dirty="0"/>
+              <a:rPr dirty="0"/>
               <a:t>    ]</a:t>
             </a:r>
           </a:p>
           <a:p>
             <a:r>
-              <a:rPr lang="en-US" dirty="0"/>
+              <a:rPr dirty="0"/>
               <a:t>)</a:t>
             </a:r>
           </a:p>
           <a:p>
-            <a:endParaRPr lang="en-US" dirty="0"/>
-          </a:p>
-          <a:p>
-            <a:r>
-              <a:rPr lang="en-US" dirty="0"/>
+            <a:endParaRPr dirty="0"/>
+          </a:p>
+          <a:p>
+            <a:r>
+              <a:rPr dirty="0"/>
               <a:t># 20. Knowledge graph</a:t>
             </a:r>
           </a:p>
           <a:p>
             <a:r>
-              <a:rPr lang="en-US" dirty="0" err="1"/>
+              <a:rPr dirty="0" err="1"/>
               <a:t>add_slide</a:t>
             </a:r>
             <a:r>
-              <a:rPr lang="en-US" dirty="0"/>
+              <a:rPr dirty="0"/>
               <a:t>(</a:t>
             </a:r>
           </a:p>
           <a:p>
             <a:r>
-              <a:rPr lang="en-US" dirty="0"/>
+              <a:rPr dirty="0"/>
               <a:t>    "Knowledge Graph Layer",</a:t>
             </a:r>
           </a:p>
           <a:p>
             <a:r>
-              <a:rPr lang="en-US" dirty="0"/>
+              <a:rPr dirty="0"/>
               <a:t>    [</a:t>
             </a:r>
           </a:p>
           <a:p>
             <a:r>
-              <a:rPr lang="en-US" dirty="0"/>
+              <a:rPr dirty="0"/>
               <a:t>        "Nodes: patient, features, observations, evidence",</a:t>
             </a:r>
           </a:p>
           <a:p>
             <a:r>
-              <a:rPr lang="en-US" dirty="0"/>
+              <a:rPr dirty="0"/>
               <a:t>        "Edges connect evidence to extracted features",</a:t>
             </a:r>
           </a:p>
           <a:p>
             <a:r>
-              <a:rPr lang="en-US" dirty="0"/>
+              <a:rPr dirty="0"/>
               <a:t>        "Used for validation and hallucination detection",</a:t>
             </a:r>
           </a:p>
           <a:p>
             <a:r>
-              <a:rPr lang="en-US" dirty="0"/>
+              <a:rPr dirty="0"/>
               <a:t>        "Supports agentic reasoning"</a:t>
             </a:r>
           </a:p>
           <a:p>
             <a:r>
-              <a:rPr lang="en-US" dirty="0"/>
+              <a:rPr dirty="0"/>
               <a:t>    ]</a:t>
             </a:r>
           </a:p>
           <a:p>
             <a:r>
-              <a:rPr lang="en-US" dirty="0"/>
+              <a:rPr dirty="0"/>
               <a:t>)</a:t>
             </a:r>
           </a:p>
           <a:p>
-            <a:endParaRPr lang="en-US" dirty="0"/>
-          </a:p>
-          <a:p>
-            <a:r>
-              <a:rPr lang="en-US" dirty="0"/>
+            <a:endParaRPr dirty="0"/>
+          </a:p>
+          <a:p>
+            <a:r>
+              <a:rPr dirty="0"/>
               <a:t># 21. Fabrication detection</a:t>
             </a:r>
           </a:p>
           <a:p>
             <a:r>
-              <a:rPr lang="en-US" dirty="0" err="1"/>
+              <a:rPr dirty="0" err="1"/>
               <a:t>add_slide</a:t>
             </a:r>
             <a:r>
-              <a:rPr lang="en-US" dirty="0"/>
+              <a:rPr dirty="0"/>
               <a:t>(</a:t>
             </a:r>
           </a:p>
           <a:p>
             <a:r>
-              <a:rPr lang="en-US" dirty="0"/>
+              <a:rPr dirty="0"/>
               <a:t>    "Fabrication Detection",</a:t>
             </a:r>
           </a:p>
           <a:p>
             <a:r>
-              <a:rPr lang="en-US" dirty="0"/>
+              <a:rPr dirty="0"/>
               <a:t>    [</a:t>
             </a:r>
           </a:p>
           <a:p>
             <a:r>
-              <a:rPr lang="en-US" dirty="0"/>
+              <a:rPr dirty="0"/>
               <a:t>        "Compare LLM output vs source evidence",</a:t>
             </a:r>
           </a:p>
           <a:p>
             <a:r>
-              <a:rPr lang="en-US" dirty="0"/>
+              <a:rPr dirty="0"/>
               <a:t>        "Flag unsupported claims",</a:t>
             </a:r>
           </a:p>
           <a:p>
             <a:r>
-              <a:rPr lang="en-US" dirty="0"/>
+              <a:rPr dirty="0"/>
               <a:t>        "Classify: correct, fabrication, omission, uncertain",</a:t>
             </a:r>
           </a:p>
           <a:p>
             <a:r>
-              <a:rPr lang="en-US" dirty="0"/>
+              <a:rPr dirty="0"/>
               <a:t>        "Generate corrected outputs"</a:t>
             </a:r>
           </a:p>
           <a:p>
             <a:r>
-              <a:rPr lang="en-US" dirty="0"/>
+              <a:rPr dirty="0"/>
               <a:t>    ]</a:t>
             </a:r>
           </a:p>
           <a:p>
             <a:r>
-              <a:rPr lang="en-US" dirty="0"/>
+              <a:rPr dirty="0"/>
               <a:t>)</a:t>
             </a:r>
           </a:p>
           <a:p>
-            <a:endParaRPr lang="en-US" dirty="0"/>
-          </a:p>
-          <a:p>
-            <a:r>
-              <a:rPr lang="en-US" dirty="0"/>
+            <a:endParaRPr dirty="0"/>
+          </a:p>
+          <a:p>
+            <a:r>
+              <a:rPr dirty="0"/>
               <a:t># 22. Self-consistency metric (image slide)</a:t>
             </a:r>
           </a:p>
           <a:p>
             <a:r>
-              <a:rPr lang="en-US" dirty="0" err="1"/>
+              <a:rPr dirty="0" err="1"/>
               <a:t>slide_layout</a:t>
             </a:r>
             <a:r>
-              <a:rPr lang="en-US" dirty="0"/>
+              <a:rPr dirty="0"/>
               <a:t> = </a:t>
             </a:r>
             <a:r>
-              <a:rPr lang="en-US" dirty="0" err="1"/>
+              <a:rPr dirty="0" err="1"/>
               <a:t>prs.slide_layouts</a:t>
             </a:r>
             <a:r>
-              <a:rPr lang="en-US" dirty="0"/>
+              <a:rPr dirty="0"/>
               <a:t>[5]</a:t>
             </a:r>
           </a:p>
           <a:p>
             <a:r>
-              <a:rPr lang="en-US" dirty="0"/>
+              <a:rPr dirty="0"/>
               <a:t>slide = </a:t>
             </a:r>
             <a:r>
-              <a:rPr lang="en-US" dirty="0" err="1"/>
+              <a:rPr dirty="0" err="1"/>
               <a:t>prs.slides.add_slide</a:t>
             </a:r>
             <a:r>
-              <a:rPr lang="en-US" dirty="0"/>
+              <a:rPr dirty="0"/>
               <a:t>(</a:t>
             </a:r>
             <a:r>
-              <a:rPr lang="en-US" dirty="0" err="1"/>
+              <a:rPr dirty="0" err="1"/>
               <a:t>slide_layout</a:t>
             </a:r>
             <a:r>
-              <a:rPr lang="en-US" dirty="0"/>
+              <a:rPr dirty="0"/>
               <a:t>)</a:t>
             </a:r>
           </a:p>
           <a:p>
             <a:r>
-              <a:rPr lang="en-US" dirty="0" err="1"/>
+              <a:rPr dirty="0" err="1"/>
               <a:t>slide.shapes.title.text</a:t>
             </a:r>
             <a:r>
-              <a:rPr lang="en-US" dirty="0"/>
+              <a:rPr dirty="0"/>
               <a:t> = "Self-Consistency &amp; Reproducibility"</a:t>
             </a:r>
           </a:p>
           <a:p>
-            <a:endParaRPr lang="en-US" dirty="0"/>
-          </a:p>
-          <a:p>
-            <a:r>
-              <a:rPr lang="en-US" dirty="0" err="1"/>
+            <a:endParaRPr dirty="0"/>
+          </a:p>
+          <a:p>
+            <a:r>
+              <a:rPr dirty="0" err="1"/>
               <a:t>img_path</a:t>
             </a:r>
             <a:r>
-              <a:rPr lang="en-US" dirty="0"/>
+              <a:rPr dirty="0"/>
               <a:t> = "/</a:t>
             </a:r>
             <a:r>
-              <a:rPr lang="en-US" dirty="0" err="1"/>
+              <a:rPr dirty="0" err="1"/>
               <a:t>mnt</a:t>
             </a:r>
             <a:r>
-              <a:rPr lang="en-US" dirty="0"/>
+              <a:rPr dirty="0"/>
               <a:t>/data/51ce234e-ae92-4f08-9e2d-9a1f7d769c22.png"</a:t>
             </a:r>
           </a:p>
           <a:p>
             <a:r>
-              <a:rPr lang="en-US" dirty="0" err="1"/>
+              <a:rPr dirty="0" err="1"/>
               <a:t>slide.shapes.add_picture</a:t>
             </a:r>
             <a:r>
-              <a:rPr lang="en-US" dirty="0"/>
+              <a:rPr dirty="0"/>
               <a:t>(</a:t>
             </a:r>
             <a:r>
-              <a:rPr lang="en-US" dirty="0" err="1"/>
+              <a:rPr dirty="0" err="1"/>
               <a:t>img_path</a:t>
             </a:r>
             <a:r>
-              <a:rPr lang="en-US" dirty="0"/>
+              <a:rPr dirty="0"/>
               <a:t>, Inches(1), Inches(1.5), width=Inches(6))</a:t>
             </a:r>
           </a:p>
           <a:p>
-            <a:endParaRPr lang="en-US" dirty="0"/>
-          </a:p>
-          <a:p>
-            <a:r>
-              <a:rPr lang="en-US" dirty="0"/>
+            <a:endParaRPr dirty="0"/>
+          </a:p>
+          <a:p>
+            <a:r>
+              <a:rPr dirty="0"/>
               <a:t># 23. Explanation slide</a:t>
             </a:r>
           </a:p>
           <a:p>
             <a:r>
-              <a:rPr lang="en-US" dirty="0" err="1"/>
+              <a:rPr dirty="0" err="1"/>
               <a:t>add_slide</a:t>
             </a:r>
             <a:r>
-              <a:rPr lang="en-US" dirty="0"/>
+              <a:rPr dirty="0"/>
               <a:t>(</a:t>
             </a:r>
           </a:p>
           <a:p>
             <a:r>
-              <a:rPr lang="en-US" dirty="0"/>
+              <a:rPr dirty="0"/>
               <a:t>    "Why Self-Consistency?",</a:t>
             </a:r>
           </a:p>
           <a:p>
             <a:r>
-              <a:rPr lang="en-US" dirty="0"/>
+              <a:rPr dirty="0"/>
               <a:t>    [</a:t>
             </a:r>
           </a:p>
           <a:p>
             <a:r>
-              <a:rPr lang="en-US" dirty="0"/>
+              <a:rPr dirty="0"/>
               <a:t>        "LLM outputs vary across runs",</a:t>
             </a:r>
           </a:p>
           <a:p>
             <a:r>
-              <a:rPr lang="en-US" dirty="0"/>
+              <a:rPr dirty="0"/>
               <a:t>        "Multiple iterations needed for reliability",</a:t>
             </a:r>
           </a:p>
           <a:p>
             <a:r>
-              <a:rPr lang="en-US" dirty="0"/>
+              <a:rPr dirty="0"/>
               <a:t>        "≥5 runs per case improves stability",</a:t>
             </a:r>
           </a:p>
           <a:p>
             <a:r>
-              <a:rPr lang="en-US" dirty="0"/>
+              <a:rPr dirty="0"/>
               <a:t>        "Measure agreement across outputs"</a:t>
             </a:r>
           </a:p>
           <a:p>
             <a:r>
-              <a:rPr lang="en-US" dirty="0"/>
+              <a:rPr dirty="0"/>
               <a:t>    ]</a:t>
             </a:r>
           </a:p>
           <a:p>
             <a:r>
-              <a:rPr lang="en-US" dirty="0"/>
+              <a:rPr dirty="0"/>
               <a:t>)</a:t>
             </a:r>
           </a:p>
           <a:p>
-            <a:endParaRPr lang="en-US" dirty="0"/>
-          </a:p>
-          <a:p>
-            <a:r>
-              <a:rPr lang="en-US" dirty="0"/>
+            <a:endParaRPr dirty="0"/>
+          </a:p>
+          <a:p>
+            <a:r>
+              <a:rPr dirty="0"/>
               <a:t># 24. HCAT safety metrics</a:t>
             </a:r>
           </a:p>
           <a:p>
             <a:r>
-              <a:rPr lang="en-US" dirty="0" err="1"/>
+              <a:rPr dirty="0" err="1"/>
               <a:t>add_slide</a:t>
             </a:r>
             <a:r>
-              <a:rPr lang="en-US" dirty="0"/>
+              <a:rPr dirty="0"/>
               <a:t>(</a:t>
             </a:r>
           </a:p>
           <a:p>
             <a:r>
-              <a:rPr lang="en-US" dirty="0"/>
+              <a:rPr dirty="0"/>
               <a:t>    "HCAT Safety Metrics",</a:t>
             </a:r>
           </a:p>
           <a:p>
             <a:r>
-              <a:rPr lang="en-US" dirty="0"/>
+              <a:rPr dirty="0"/>
               <a:t>    [</a:t>
             </a:r>
           </a:p>
           <a:p>
             <a:r>
-              <a:rPr lang="en-US" dirty="0"/>
+              <a:rPr dirty="0"/>
               <a:t>        "Measure residual PHI risk after deidentification",</a:t>
             </a:r>
           </a:p>
           <a:p>
             <a:r>
-              <a:rPr lang="en-US" dirty="0"/>
+              <a:rPr dirty="0"/>
               <a:t>        "PHI recall, precision, F1",</a:t>
             </a:r>
           </a:p>
           <a:p>
             <a:r>
-              <a:rPr lang="en-US" dirty="0"/>
+              <a:rPr dirty="0"/>
               <a:t>        "False negative rate (critical safety metric)",</a:t>
             </a:r>
           </a:p>
           <a:p>
             <a:r>
-              <a:rPr lang="en-US" dirty="0"/>
+              <a:rPr dirty="0"/>
               <a:t>        "Residual PHI risk score"</a:t>
             </a:r>
           </a:p>
           <a:p>
             <a:r>
-              <a:rPr lang="en-US" dirty="0"/>
+              <a:rPr dirty="0"/>
               <a:t>    ]</a:t>
             </a:r>
           </a:p>
           <a:p>
             <a:r>
-              <a:rPr lang="en-US" dirty="0"/>
+              <a:rPr dirty="0"/>
               <a:t>)</a:t>
             </a:r>
           </a:p>
           <a:p>
-            <a:endParaRPr lang="en-US" dirty="0"/>
-          </a:p>
-          <a:p>
-            <a:r>
-              <a:rPr lang="en-US" dirty="0"/>
+            <a:endParaRPr dirty="0"/>
+          </a:p>
+          <a:p>
+            <a:r>
+              <a:rPr dirty="0"/>
               <a:t># 25. Safety importance</a:t>
             </a:r>
           </a:p>
           <a:p>
             <a:r>
-              <a:rPr lang="en-US" dirty="0" err="1"/>
+              <a:rPr dirty="0" err="1"/>
               <a:t>add_slide</a:t>
             </a:r>
             <a:r>
-              <a:rPr lang="en-US" dirty="0"/>
+              <a:rPr dirty="0"/>
               <a:t>(</a:t>
             </a:r>
           </a:p>
           <a:p>
             <a:r>
-              <a:rPr lang="en-US" dirty="0"/>
+              <a:rPr dirty="0"/>
               <a:t>    "Why Safety Matters",</a:t>
             </a:r>
           </a:p>
           <a:p>
             <a:r>
-              <a:rPr lang="en-US" dirty="0"/>
+              <a:rPr dirty="0"/>
               <a:t>    [</a:t>
             </a:r>
           </a:p>
           <a:p>
             <a:r>
-              <a:rPr lang="en-US" dirty="0"/>
+              <a:rPr dirty="0"/>
               <a:t>        "Clinical data must remain de-identified",</a:t>
             </a:r>
           </a:p>
           <a:p>
             <a:r>
-              <a:rPr lang="en-US" dirty="0"/>
+              <a:rPr dirty="0"/>
               <a:t>        "Prevent PHI leakage",</a:t>
             </a:r>
           </a:p>
           <a:p>
             <a:r>
-              <a:rPr lang="en-US" dirty="0"/>
+              <a:rPr dirty="0"/>
               <a:t>        "Ensure HIPAA compliance",</a:t>
             </a:r>
           </a:p>
           <a:p>
             <a:r>
-              <a:rPr lang="en-US" dirty="0"/>
+              <a:rPr dirty="0"/>
               <a:t>        "Quantify risk using HCAT framework"</a:t>
             </a:r>
           </a:p>
           <a:p>
             <a:r>
-              <a:rPr lang="en-US" dirty="0"/>
+              <a:rPr dirty="0"/>
               <a:t>    ]</a:t>
             </a:r>
           </a:p>
           <a:p>
             <a:r>
-              <a:rPr lang="en-US" dirty="0"/>
+              <a:rPr dirty="0"/>
               <a:t>)</a:t>
             </a:r>
           </a:p>
           <a:p>
-            <a:endParaRPr lang="en-US" dirty="0"/>
-          </a:p>
-          <a:p>
-            <a:r>
-              <a:rPr lang="en-US" dirty="0"/>
+            <a:endParaRPr dirty="0"/>
+          </a:p>
+          <a:p>
+            <a:r>
+              <a:rPr dirty="0"/>
               <a:t># 26. Full pipeline</a:t>
             </a:r>
           </a:p>
           <a:p>
             <a:r>
-              <a:rPr lang="en-US" dirty="0" err="1"/>
+              <a:rPr dirty="0" err="1"/>
               <a:t>add_slide</a:t>
             </a:r>
             <a:r>
-              <a:rPr lang="en-US" dirty="0"/>
+              <a:rPr dirty="0"/>
               <a:t>(</a:t>
             </a:r>
           </a:p>
           <a:p>
             <a:r>
-              <a:rPr lang="en-US" dirty="0"/>
+              <a:rPr dirty="0"/>
               <a:t>    "End-to-End Pipeline",</a:t>
             </a:r>
           </a:p>
           <a:p>
             <a:r>
-              <a:rPr lang="en-US" dirty="0"/>
+              <a:rPr dirty="0"/>
               <a:t>    [</a:t>
             </a:r>
           </a:p>
           <a:p>
             <a:r>
-              <a:rPr lang="en-US" dirty="0"/>
+              <a:rPr dirty="0"/>
               <a:t>        "OCR + deidentification",</a:t>
             </a:r>
           </a:p>
           <a:p>
             <a:r>
-              <a:rPr lang="en-US" dirty="0"/>
+              <a:rPr dirty="0"/>
               <a:t>        "LLM extraction (prompt variants)",</a:t>
             </a:r>
           </a:p>
           <a:p>
             <a:r>
-              <a:rPr lang="en-US" dirty="0"/>
+              <a:rPr dirty="0"/>
               <a:t>        "Human validation",</a:t>
             </a:r>
           </a:p>
           <a:p>
             <a:r>
-              <a:rPr lang="en-US" dirty="0"/>
+              <a:rPr dirty="0"/>
               <a:t>        "Metric computation",</a:t>
             </a:r>
           </a:p>
           <a:p>
             <a:r>
-              <a:rPr lang="en-US" dirty="0"/>
+              <a:rPr dirty="0"/>
               <a:t>        "RAG-based validation layer"</a:t>
             </a:r>
           </a:p>
           <a:p>
             <a:r>
-              <a:rPr lang="en-US" dirty="0"/>
+              <a:rPr dirty="0"/>
               <a:t>    ]</a:t>
             </a:r>
           </a:p>
           <a:p>
             <a:r>
-              <a:rPr lang="en-US" dirty="0"/>
+              <a:rPr dirty="0"/>
               <a:t>)</a:t>
             </a:r>
           </a:p>
           <a:p>
-            <a:endParaRPr lang="en-US" dirty="0"/>
-          </a:p>
-          <a:p>
-            <a:r>
-              <a:rPr lang="en-US" dirty="0"/>
+            <a:endParaRPr dirty="0"/>
+          </a:p>
+          <a:p>
+            <a:r>
+              <a:rPr dirty="0"/>
               <a:t># 27. Contributions</a:t>
             </a:r>
           </a:p>
           <a:p>
             <a:r>
-              <a:rPr lang="en-US" dirty="0" err="1"/>
+              <a:rPr dirty="0" err="1"/>
               <a:t>add_slide</a:t>
             </a:r>
             <a:r>
-              <a:rPr lang="en-US" dirty="0"/>
+              <a:rPr dirty="0"/>
               <a:t>(</a:t>
             </a:r>
           </a:p>
           <a:p>
             <a:r>
-              <a:rPr lang="en-US" dirty="0"/>
+              <a:rPr dirty="0"/>
               <a:t>    "Key Contributions",</a:t>
             </a:r>
           </a:p>
           <a:p>
             <a:r>
-              <a:rPr lang="en-US" dirty="0"/>
+              <a:rPr dirty="0"/>
               <a:t>    [</a:t>
             </a:r>
           </a:p>
           <a:p>
             <a:r>
-              <a:rPr lang="en-US" dirty="0"/>
+              <a:rPr dirty="0"/>
               <a:t>        "Clinical evaluation of LLM summarization",</a:t>
             </a:r>
           </a:p>
           <a:p>
             <a:r>
-              <a:rPr lang="en-US" dirty="0"/>
+              <a:rPr dirty="0"/>
               <a:t>        "Fabrication-focused safety analysis",</a:t>
             </a:r>
           </a:p>
           <a:p>
             <a:r>
-              <a:rPr lang="en-US" dirty="0"/>
+              <a:rPr dirty="0"/>
               <a:t>        "Prompt optimization framework",</a:t>
             </a:r>
           </a:p>
           <a:p>
             <a:r>
-              <a:rPr lang="en-US" dirty="0"/>
+              <a:rPr dirty="0"/>
               <a:t>        "Production monitoring strategy"</a:t>
             </a:r>
           </a:p>
           <a:p>
             <a:r>
-              <a:rPr lang="en-US" dirty="0"/>
+              <a:rPr dirty="0"/>
               <a:t>    ]</a:t>
             </a:r>
           </a:p>
           <a:p>
             <a:r>
-              <a:rPr lang="en-US" dirty="0"/>
+              <a:rPr dirty="0"/>
               <a:t>)</a:t>
             </a:r>
           </a:p>
           <a:p>
-            <a:endParaRPr lang="en-US" dirty="0"/>
-          </a:p>
-          <a:p>
-            <a:r>
-              <a:rPr lang="en-US" dirty="0"/>
+            <a:endParaRPr dirty="0"/>
+          </a:p>
+          <a:p>
+            <a:r>
+              <a:rPr dirty="0"/>
               <a:t># Save</a:t>
             </a:r>
           </a:p>
           <a:p>
             <a:r>
-              <a:rPr lang="en-US" dirty="0" err="1"/>
+              <a:rPr dirty="0" err="1"/>
               <a:t>file_path</a:t>
             </a:r>
             <a:r>
-              <a:rPr lang="en-US" dirty="0"/>
+              <a:rPr dirty="0"/>
               <a:t> = "/</a:t>
             </a:r>
             <a:r>
-              <a:rPr lang="en-US" dirty="0" err="1"/>
+              <a:rPr dirty="0" err="1"/>
               <a:t>mnt</a:t>
             </a:r>
             <a:r>
-              <a:rPr lang="en-US" dirty="0"/>
+              <a:rPr dirty="0"/>
               <a:t>/data/llm_prompt_engineering_breast_cancer_v2.pptx"</a:t>
             </a:r>
           </a:p>
           <a:p>
             <a:r>
-              <a:rPr lang="en-US" dirty="0" err="1"/>
+              <a:rPr dirty="0" err="1"/>
               <a:t>prs.save</a:t>
             </a:r>
             <a:r>
-              <a:rPr lang="en-US" dirty="0"/>
+              <a:rPr dirty="0"/>
               <a:t>(</a:t>
             </a:r>
             <a:r>
-              <a:rPr lang="en-US" dirty="0" err="1"/>
+              <a:rPr dirty="0" err="1"/>
               <a:t>file_path</a:t>
             </a:r>
             <a:r>
-              <a:rPr lang="en-US" dirty="0"/>
+              <a:rPr dirty="0"/>
               <a:t>)</a:t>
             </a:r>
           </a:p>
           <a:p>
-            <a:endParaRPr lang="en-US" dirty="0"/>
-          </a:p>
-          <a:p>
-            <a:r>
-              <a:rPr lang="en-US" dirty="0" err="1"/>
+            <a:endParaRPr dirty="0"/>
+          </a:p>
+          <a:p>
+            <a:r>
+              <a:rPr dirty="0" err="1"/>
               <a:t>file_path</a:t>
             </a:r>
-            <a:endParaRPr lang="en-US" dirty="0"/>
-          </a:p>
-          <a:p>
-            <a:endParaRPr lang="en-US" dirty="0"/>
-          </a:p>
-          <a:p>
-            <a:r>
-              <a:rPr lang="en-US" dirty="0"/>
+            <a:endParaRPr dirty="0"/>
+          </a:p>
+          <a:p>
+            <a:endParaRPr dirty="0"/>
+          </a:p>
+          <a:p>
+            <a:r>
+              <a:rPr dirty="0"/>
               <a:t>Meta-prompting: A higher-order prompting strategy where the model is instructed on how to reason, structure outputs, and validate responses.</a:t>
             </a:r>
           </a:p>
           <a:p>
             <a:r>
-              <a:rPr lang="en-US" dirty="0"/>
+              <a:rPr dirty="0"/>
               <a:t>Uses task-agnostic scaffolding to generalize across tasks.</a:t>
             </a:r>
           </a:p>
           <a:p>
             <a:r>
-              <a:rPr lang="en-US" dirty="0"/>
+              <a:rPr dirty="0"/>
               <a:t>Improves consistency, reasoning reliability, and reduces hallucination.</a:t>
             </a:r>
           </a:p>
           <a:p>
             <a:r>
-              <a:rPr lang="en-US" dirty="0"/>
+              <a:rPr dirty="0"/>
               <a:t>In this project: meta-prompts enforce evidence grounding, structured JSON outputs, and anti-fabrication rules.</a:t>
             </a:r>
           </a:p>
           <a:p>
             <a:r>
-              <a:rPr lang="en-US" dirty="0"/>
+              <a:rPr dirty="0"/>
               <a:t>Acts as a control layer over base prompts rather than task-specific tuning.</a:t>
             </a:r>
           </a:p>
-          <a:p>
-            <a:endParaRPr lang="en-US" dirty="0"/>
-          </a:p>
         </p:txBody>
       </p:sp>
       <p:sp>
@@ -5282,24 +5541,8 @@
           </p:nvPr>
         </p:nvSpPr>
         <p:spPr/>
-        <p:txBody>
-          <a:bodyPr/>
-          <a:lstStyle/>
-          <a:p>
-            <a:fld id="{8FA3C7F4-74C8-4BBC-A06B-08B4E1006477}" type="slidenum">
-              <a:rPr lang="en-US" smtClean="0"/>
-              <a:t>15</a:t>
-            </a:fld>
-            <a:endParaRPr lang="en-US"/>
-          </a:p>
-        </p:txBody>
       </p:sp>
     </p:spTree>
-    <p:extLst>
-      <p:ext uri="{BB962C8B-B14F-4D97-AF65-F5344CB8AC3E}">
-        <p14:creationId xmlns:p14="http://schemas.microsoft.com/office/powerpoint/2010/main" val="2854410567"/>
-      </p:ext>
-    </p:extLst>
   </p:cSld>
   <p:clrMapOvr>
     <a:masterClrMapping/>
@@ -5308,2311 +5551,6 @@
 </file>
 
 <file path=ppt/notesSlides/notesSlide4.xml><?xml version="1.0" encoding="utf-8"?>
-<p:notes xmlns:a="http://schemas.openxmlformats.org/drawingml/2006/main" xmlns:r="http://schemas.openxmlformats.org/officeDocument/2006/relationships" xmlns:p="http://schemas.openxmlformats.org/presentationml/2006/main">
-  <p:cSld>
-    <p:spTree>
-      <p:nvGrpSpPr>
-        <p:cNvPr id="1" name=""/>
-        <p:cNvGrpSpPr/>
-        <p:nvPr/>
-      </p:nvGrpSpPr>
-      <p:grpSpPr>
-        <a:xfrm>
-          <a:off x="0" y="0"/>
-          <a:ext cx="0" cy="0"/>
-          <a:chOff x="0" y="0"/>
-          <a:chExt cx="0" cy="0"/>
-        </a:xfrm>
-      </p:grpSpPr>
-      <p:sp>
-        <p:nvSpPr>
-          <p:cNvPr id="2" name="Slide Image Placeholder 1"/>
-          <p:cNvSpPr>
-            <a:spLocks noGrp="1" noRot="1" noChangeAspect="1"/>
-          </p:cNvSpPr>
-          <p:nvPr>
-            <p:ph type="sldImg" idx="2"/>
-          </p:nvPr>
-        </p:nvSpPr>
-        <p:spPr/>
-      </p:sp>
-      <p:sp>
-        <p:nvSpPr>
-          <p:cNvPr id="3" name="Notes Placeholder 2"/>
-          <p:cNvSpPr>
-            <a:spLocks noGrp="1"/>
-          </p:cNvSpPr>
-          <p:nvPr>
-            <p:ph type="body" sz="quarter" idx="3"/>
-          </p:nvPr>
-        </p:nvSpPr>
-        <p:spPr/>
-        <p:txBody>
-          <a:bodyPr/>
-          <a:lstStyle/>
-          <a:p>
-            <a:r>
-              <a:rPr dirty="0"/>
-              <a:t># Create a more comprehensive PowerPoint based on the user's detailed instructions</a:t>
-            </a:r>
-          </a:p>
-          <a:p>
-            <a:endParaRPr dirty="0"/>
-          </a:p>
-          <a:p>
-            <a:r>
-              <a:rPr dirty="0"/>
-              <a:t>from pptx import Presentation</a:t>
-            </a:r>
-          </a:p>
-          <a:p>
-            <a:r>
-              <a:rPr dirty="0"/>
-              <a:t>from </a:t>
-            </a:r>
-            <a:r>
-              <a:rPr dirty="0" err="1"/>
-              <a:t>pptx.util</a:t>
-            </a:r>
-            <a:r>
-              <a:rPr dirty="0"/>
-              <a:t> import Inches</a:t>
-            </a:r>
-          </a:p>
-          <a:p>
-            <a:endParaRPr dirty="0"/>
-          </a:p>
-          <a:p>
-            <a:r>
-              <a:rPr dirty="0"/>
-              <a:t>prs = Presentation()</a:t>
-            </a:r>
-          </a:p>
-          <a:p>
-            <a:endParaRPr dirty="0"/>
-          </a:p>
-          <a:p>
-            <a:r>
-              <a:rPr dirty="0"/>
-              <a:t>def </a:t>
-            </a:r>
-            <a:r>
-              <a:rPr dirty="0" err="1"/>
-              <a:t>add_slide</a:t>
-            </a:r>
-            <a:r>
-              <a:rPr dirty="0"/>
-              <a:t>(title, bullets):</a:t>
-            </a:r>
-          </a:p>
-          <a:p>
-            <a:r>
-              <a:rPr dirty="0"/>
-              <a:t>    </a:t>
-            </a:r>
-            <a:r>
-              <a:rPr dirty="0" err="1"/>
-              <a:t>slide_layout</a:t>
-            </a:r>
-            <a:r>
-              <a:rPr dirty="0"/>
-              <a:t> = </a:t>
-            </a:r>
-            <a:r>
-              <a:rPr dirty="0" err="1"/>
-              <a:t>prs.slide_layouts</a:t>
-            </a:r>
-            <a:r>
-              <a:rPr dirty="0"/>
-              <a:t>[1]</a:t>
-            </a:r>
-          </a:p>
-          <a:p>
-            <a:r>
-              <a:rPr dirty="0"/>
-              <a:t>    slide = </a:t>
-            </a:r>
-            <a:r>
-              <a:rPr dirty="0" err="1"/>
-              <a:t>prs.slides.add_slide</a:t>
-            </a:r>
-            <a:r>
-              <a:rPr dirty="0"/>
-              <a:t>(</a:t>
-            </a:r>
-            <a:r>
-              <a:rPr dirty="0" err="1"/>
-              <a:t>slide_layout</a:t>
-            </a:r>
-            <a:r>
-              <a:rPr dirty="0"/>
-              <a:t>)</a:t>
-            </a:r>
-          </a:p>
-          <a:p>
-            <a:r>
-              <a:rPr dirty="0"/>
-              <a:t>    </a:t>
-            </a:r>
-            <a:r>
-              <a:rPr dirty="0" err="1"/>
-              <a:t>slide.shapes.title.text</a:t>
-            </a:r>
-            <a:r>
-              <a:rPr dirty="0"/>
-              <a:t> = title</a:t>
-            </a:r>
-          </a:p>
-          <a:p>
-            <a:r>
-              <a:rPr dirty="0"/>
-              <a:t>    </a:t>
-            </a:r>
-            <a:r>
-              <a:rPr dirty="0" err="1"/>
-              <a:t>tf</a:t>
-            </a:r>
-            <a:r>
-              <a:rPr dirty="0"/>
-              <a:t> = </a:t>
-            </a:r>
-            <a:r>
-              <a:rPr dirty="0" err="1"/>
-              <a:t>slide.placeholders</a:t>
-            </a:r>
-            <a:r>
-              <a:rPr dirty="0"/>
-              <a:t>[1].</a:t>
-            </a:r>
-            <a:r>
-              <a:rPr dirty="0" err="1"/>
-              <a:t>text_frame</a:t>
-            </a:r>
-            <a:endParaRPr dirty="0"/>
-          </a:p>
-          <a:p>
-            <a:r>
-              <a:rPr dirty="0"/>
-              <a:t>    </a:t>
-            </a:r>
-            <a:r>
-              <a:rPr dirty="0" err="1"/>
-              <a:t>tf.clear</a:t>
-            </a:r>
-            <a:r>
-              <a:rPr dirty="0"/>
-              <a:t>()</a:t>
-            </a:r>
-          </a:p>
-          <a:p>
-            <a:r>
-              <a:rPr dirty="0"/>
-              <a:t>    for </a:t>
-            </a:r>
-            <a:r>
-              <a:rPr dirty="0" err="1"/>
-              <a:t>i</a:t>
-            </a:r>
-            <a:r>
-              <a:rPr dirty="0"/>
-              <a:t>, b in enumerate(bullets):</a:t>
-            </a:r>
-          </a:p>
-          <a:p>
-            <a:r>
-              <a:rPr dirty="0"/>
-              <a:t>        if </a:t>
-            </a:r>
-            <a:r>
-              <a:rPr dirty="0" err="1"/>
-              <a:t>i</a:t>
-            </a:r>
-            <a:r>
-              <a:rPr dirty="0"/>
-              <a:t> == 0:</a:t>
-            </a:r>
-          </a:p>
-          <a:p>
-            <a:r>
-              <a:rPr dirty="0"/>
-              <a:t>            </a:t>
-            </a:r>
-            <a:r>
-              <a:rPr dirty="0" err="1"/>
-              <a:t>tf.text</a:t>
-            </a:r>
-            <a:r>
-              <a:rPr dirty="0"/>
-              <a:t> = b</a:t>
-            </a:r>
-          </a:p>
-          <a:p>
-            <a:r>
-              <a:rPr dirty="0"/>
-              <a:t>        else:</a:t>
-            </a:r>
-          </a:p>
-          <a:p>
-            <a:r>
-              <a:rPr dirty="0"/>
-              <a:t>            p = </a:t>
-            </a:r>
-            <a:r>
-              <a:rPr dirty="0" err="1"/>
-              <a:t>tf.add_paragraph</a:t>
-            </a:r>
-            <a:r>
-              <a:rPr dirty="0"/>
-              <a:t>()</a:t>
-            </a:r>
-          </a:p>
-          <a:p>
-            <a:r>
-              <a:rPr dirty="0"/>
-              <a:t>            </a:t>
-            </a:r>
-            <a:r>
-              <a:rPr dirty="0" err="1"/>
-              <a:t>p.text</a:t>
-            </a:r>
-            <a:r>
-              <a:rPr dirty="0"/>
-              <a:t> = b</a:t>
-            </a:r>
-          </a:p>
-          <a:p>
-            <a:r>
-              <a:rPr dirty="0"/>
-              <a:t>            </a:t>
-            </a:r>
-            <a:r>
-              <a:rPr dirty="0" err="1"/>
-              <a:t>p.level</a:t>
-            </a:r>
-            <a:r>
-              <a:rPr dirty="0"/>
-              <a:t> = 0</a:t>
-            </a:r>
-          </a:p>
-          <a:p>
-            <a:endParaRPr dirty="0"/>
-          </a:p>
-          <a:p>
-            <a:r>
-              <a:rPr dirty="0"/>
-              <a:t># 1. Title</a:t>
-            </a:r>
-          </a:p>
-          <a:p>
-            <a:r>
-              <a:rPr dirty="0" err="1"/>
-              <a:t>add_slide</a:t>
-            </a:r>
-            <a:r>
-              <a:rPr dirty="0"/>
-              <a:t>(</a:t>
-            </a:r>
-          </a:p>
-          <a:p>
-            <a:r>
-              <a:rPr dirty="0"/>
-              <a:t>    "LLM Prompt Engineering for Breast Cancer Workup Extraction",</a:t>
-            </a:r>
-          </a:p>
-          <a:p>
-            <a:r>
-              <a:rPr dirty="0"/>
-              <a:t>    [</a:t>
-            </a:r>
-          </a:p>
-          <a:p>
-            <a:r>
-              <a:rPr dirty="0"/>
-              <a:t>        "Evaluating accuracy, hallucination, and safety",</a:t>
-            </a:r>
-          </a:p>
-          <a:p>
-            <a:r>
-              <a:rPr dirty="0"/>
-              <a:t>        "Prompt engineering + RAG + </a:t>
-            </a:r>
-            <a:r>
-              <a:rPr dirty="0" err="1"/>
-              <a:t>LangGraph</a:t>
-            </a:r>
-            <a:r>
-              <a:rPr dirty="0"/>
-              <a:t>",</a:t>
-            </a:r>
-          </a:p>
-          <a:p>
-            <a:r>
-              <a:rPr dirty="0"/>
-              <a:t>        "Memorial Sloan Kettering | Surgical Oncology AI"</a:t>
-            </a:r>
-          </a:p>
-          <a:p>
-            <a:r>
-              <a:rPr dirty="0"/>
-              <a:t>    ]</a:t>
-            </a:r>
-          </a:p>
-          <a:p>
-            <a:r>
-              <a:rPr dirty="0"/>
-              <a:t>)</a:t>
-            </a:r>
-          </a:p>
-          <a:p>
-            <a:endParaRPr dirty="0"/>
-          </a:p>
-          <a:p>
-            <a:r>
-              <a:rPr dirty="0"/>
-              <a:t># 2. Background - LLM basics</a:t>
-            </a:r>
-          </a:p>
-          <a:p>
-            <a:r>
-              <a:rPr dirty="0" err="1"/>
-              <a:t>add_slide</a:t>
-            </a:r>
-            <a:r>
-              <a:rPr dirty="0"/>
-              <a:t>(</a:t>
-            </a:r>
-          </a:p>
-          <a:p>
-            <a:r>
-              <a:rPr dirty="0"/>
-              <a:t>    "What is a Large Language Model (LLM)?",</a:t>
-            </a:r>
-          </a:p>
-          <a:p>
-            <a:r>
-              <a:rPr dirty="0"/>
-              <a:t>    [</a:t>
-            </a:r>
-          </a:p>
-          <a:p>
-            <a:r>
-              <a:rPr dirty="0"/>
-              <a:t>        "Neural networks trained on large text corpora",</a:t>
-            </a:r>
-          </a:p>
-          <a:p>
-            <a:r>
-              <a:rPr dirty="0"/>
-              <a:t>        "Based on transformer architecture",</a:t>
-            </a:r>
-          </a:p>
-          <a:p>
-            <a:r>
-              <a:rPr dirty="0"/>
-              <a:t>        "Learn probability distributions over language",</a:t>
-            </a:r>
-          </a:p>
-          <a:p>
-            <a:r>
-              <a:rPr dirty="0"/>
-              <a:t>        "Non-deterministic outputs (same input ≠ same output)"</a:t>
-            </a:r>
-          </a:p>
-          <a:p>
-            <a:r>
-              <a:rPr dirty="0"/>
-              <a:t>    ]</a:t>
-            </a:r>
-          </a:p>
-          <a:p>
-            <a:r>
-              <a:rPr dirty="0"/>
-              <a:t>)</a:t>
-            </a:r>
-          </a:p>
-          <a:p>
-            <a:endParaRPr dirty="0"/>
-          </a:p>
-          <a:p>
-            <a:r>
-              <a:rPr dirty="0"/>
-              <a:t># 3. Transformer basics</a:t>
-            </a:r>
-          </a:p>
-          <a:p>
-            <a:r>
-              <a:rPr dirty="0" err="1"/>
-              <a:t>add_slide</a:t>
-            </a:r>
-            <a:r>
-              <a:rPr dirty="0"/>
-              <a:t>(</a:t>
-            </a:r>
-          </a:p>
-          <a:p>
-            <a:r>
-              <a:rPr dirty="0"/>
-              <a:t>    "Transformer Architecture (High-Level)",</a:t>
-            </a:r>
-          </a:p>
-          <a:p>
-            <a:r>
-              <a:rPr dirty="0"/>
-              <a:t>    [</a:t>
-            </a:r>
-          </a:p>
-          <a:p>
-            <a:r>
-              <a:rPr dirty="0"/>
-              <a:t>        "Input tokens → embeddings",</a:t>
-            </a:r>
-          </a:p>
-          <a:p>
-            <a:r>
-              <a:rPr dirty="0"/>
-              <a:t>        "Multi-head self-attention layers",</a:t>
-            </a:r>
-          </a:p>
-          <a:p>
-            <a:r>
-              <a:rPr dirty="0"/>
-              <a:t>        "Feedforward layers",</a:t>
-            </a:r>
-          </a:p>
-          <a:p>
-            <a:r>
-              <a:rPr dirty="0"/>
-              <a:t>        "Stacked layers (depth)",</a:t>
-            </a:r>
-          </a:p>
-          <a:p>
-            <a:r>
-              <a:rPr dirty="0"/>
-              <a:t>        "Output probability distribution over tokens"</a:t>
-            </a:r>
-          </a:p>
-          <a:p>
-            <a:r>
-              <a:rPr dirty="0"/>
-              <a:t>    ]</a:t>
-            </a:r>
-          </a:p>
-          <a:p>
-            <a:r>
-              <a:rPr dirty="0"/>
-              <a:t>)</a:t>
-            </a:r>
-          </a:p>
-          <a:p>
-            <a:endParaRPr dirty="0"/>
-          </a:p>
-          <a:p>
-            <a:r>
-              <a:rPr dirty="0"/>
-              <a:t># 4. Attention intuition</a:t>
-            </a:r>
-          </a:p>
-          <a:p>
-            <a:r>
-              <a:rPr dirty="0" err="1"/>
-              <a:t>add_slide</a:t>
-            </a:r>
-            <a:r>
-              <a:rPr dirty="0"/>
-              <a:t>(</a:t>
-            </a:r>
-          </a:p>
-          <a:p>
-            <a:r>
-              <a:rPr dirty="0"/>
-              <a:t>    "Self-Attention Mechanism",</a:t>
-            </a:r>
-          </a:p>
-          <a:p>
-            <a:r>
-              <a:rPr dirty="0"/>
-              <a:t>    [</a:t>
-            </a:r>
-          </a:p>
-          <a:p>
-            <a:r>
-              <a:rPr dirty="0"/>
-              <a:t>        "Model attends to all tokens simultaneously",</a:t>
-            </a:r>
-          </a:p>
-          <a:p>
-            <a:r>
-              <a:rPr dirty="0"/>
-              <a:t>        "Captures long-range dependencies",</a:t>
-            </a:r>
-          </a:p>
-          <a:p>
-            <a:r>
-              <a:rPr dirty="0"/>
-              <a:t>        "Weighted relationships between words",</a:t>
-            </a:r>
-          </a:p>
-          <a:p>
-            <a:r>
-              <a:rPr dirty="0"/>
-              <a:t>        "Key driver of LLM performance"</a:t>
-            </a:r>
-          </a:p>
-          <a:p>
-            <a:r>
-              <a:rPr dirty="0"/>
-              <a:t>    ]</a:t>
-            </a:r>
-          </a:p>
-          <a:p>
-            <a:r>
-              <a:rPr dirty="0"/>
-              <a:t>)</a:t>
-            </a:r>
-          </a:p>
-          <a:p>
-            <a:endParaRPr dirty="0"/>
-          </a:p>
-          <a:p>
-            <a:r>
-              <a:rPr dirty="0"/>
-              <a:t># 5. Model architectures comparison</a:t>
-            </a:r>
-          </a:p>
-          <a:p>
-            <a:r>
-              <a:rPr dirty="0" err="1"/>
-              <a:t>add_slide</a:t>
-            </a:r>
-            <a:r>
-              <a:rPr dirty="0"/>
-              <a:t>(</a:t>
-            </a:r>
-          </a:p>
-          <a:p>
-            <a:r>
-              <a:rPr dirty="0"/>
-              <a:t>    "Modern LLM Architectures",</a:t>
-            </a:r>
-          </a:p>
-          <a:p>
-            <a:r>
-              <a:rPr dirty="0"/>
-              <a:t>    [</a:t>
-            </a:r>
-          </a:p>
-          <a:p>
-            <a:r>
-              <a:rPr dirty="0"/>
-              <a:t>        "Encoder (BERT): bidirectional context understanding",</a:t>
-            </a:r>
-          </a:p>
-          <a:p>
-            <a:r>
-              <a:rPr dirty="0"/>
-              <a:t>        "Encoder-decoder (BART/T5): input → output transformation",</a:t>
-            </a:r>
-          </a:p>
-          <a:p>
-            <a:r>
-              <a:rPr dirty="0"/>
-              <a:t>        "Decoder-only (GPT, Claude): autoregressive generation",</a:t>
-            </a:r>
-          </a:p>
-          <a:p>
-            <a:r>
-              <a:rPr dirty="0"/>
-              <a:t>        "Tradeoff: understanding vs generation"</a:t>
-            </a:r>
-          </a:p>
-          <a:p>
-            <a:r>
-              <a:rPr dirty="0"/>
-              <a:t>    ]</a:t>
-            </a:r>
-          </a:p>
-          <a:p>
-            <a:r>
-              <a:rPr dirty="0"/>
-              <a:t>)</a:t>
-            </a:r>
-          </a:p>
-          <a:p>
-            <a:endParaRPr dirty="0"/>
-          </a:p>
-          <a:p>
-            <a:r>
-              <a:rPr dirty="0"/>
-              <a:t># 6. Claude Sonnet 4 &amp; OpenAI GPT-5.2</a:t>
-            </a:r>
-          </a:p>
-          <a:p>
-            <a:r>
-              <a:rPr dirty="0" err="1"/>
-              <a:t>add_slide</a:t>
-            </a:r>
-            <a:r>
-              <a:rPr dirty="0"/>
-              <a:t>(</a:t>
-            </a:r>
-          </a:p>
-          <a:p>
-            <a:r>
-              <a:rPr dirty="0"/>
-              <a:t>    "Production LLMs Used",</a:t>
-            </a:r>
-          </a:p>
-          <a:p>
-            <a:r>
-              <a:rPr dirty="0"/>
-              <a:t>    [</a:t>
-            </a:r>
-          </a:p>
-          <a:p>
-            <a:r>
-              <a:rPr dirty="0"/>
-              <a:t>        "Claude Sonnet 4: strong reasoning, low hallucination",</a:t>
-            </a:r>
-          </a:p>
-          <a:p>
-            <a:r>
-              <a:rPr dirty="0"/>
-              <a:t>        "OpenAI GPT-5.2: structured outputs, high controllability",</a:t>
-            </a:r>
-          </a:p>
-          <a:p>
-            <a:r>
-              <a:rPr dirty="0"/>
-              <a:t>        "Both support long context + JSON extraction",</a:t>
-            </a:r>
-          </a:p>
-          <a:p>
-            <a:r>
-              <a:rPr dirty="0"/>
-              <a:t>        "Behavior shaped heavily by prompt design"</a:t>
-            </a:r>
-          </a:p>
-          <a:p>
-            <a:r>
-              <a:rPr dirty="0"/>
-              <a:t>    ]</a:t>
-            </a:r>
-          </a:p>
-          <a:p>
-            <a:r>
-              <a:rPr dirty="0"/>
-              <a:t>)</a:t>
-            </a:r>
-          </a:p>
-          <a:p>
-            <a:endParaRPr dirty="0"/>
-          </a:p>
-          <a:p>
-            <a:r>
-              <a:rPr dirty="0"/>
-              <a:t># 7. Why prompt engineering matters</a:t>
-            </a:r>
-          </a:p>
-          <a:p>
-            <a:r>
-              <a:rPr dirty="0" err="1"/>
-              <a:t>add_slide</a:t>
-            </a:r>
-            <a:r>
-              <a:rPr dirty="0"/>
-              <a:t>(</a:t>
-            </a:r>
-          </a:p>
-          <a:p>
-            <a:r>
-              <a:rPr dirty="0"/>
-              <a:t>    "Why Prompt Engineering?",</a:t>
-            </a:r>
-          </a:p>
-          <a:p>
-            <a:r>
-              <a:rPr dirty="0"/>
-              <a:t>    [</a:t>
-            </a:r>
-          </a:p>
-          <a:p>
-            <a:r>
-              <a:rPr dirty="0"/>
-              <a:t>        "LLMs are non-deterministic",</a:t>
-            </a:r>
-          </a:p>
-          <a:p>
-            <a:r>
-              <a:rPr dirty="0"/>
-              <a:t>        "Outputs depend on instruction clarity",</a:t>
-            </a:r>
-          </a:p>
-          <a:p>
-            <a:r>
-              <a:rPr dirty="0"/>
-              <a:t>        "Poor prompts → hallucination + inconsistency",</a:t>
-            </a:r>
-          </a:p>
-          <a:p>
-            <a:r>
-              <a:rPr dirty="0"/>
-              <a:t>        "Goal: maximize accuracy, minimize fabrication"</a:t>
-            </a:r>
-          </a:p>
-          <a:p>
-            <a:r>
-              <a:rPr dirty="0"/>
-              <a:t>    ]</a:t>
-            </a:r>
-          </a:p>
-          <a:p>
-            <a:r>
-              <a:rPr dirty="0"/>
-              <a:t>)</a:t>
-            </a:r>
-          </a:p>
-          <a:p>
-            <a:endParaRPr dirty="0"/>
-          </a:p>
-          <a:p>
-            <a:r>
-              <a:rPr dirty="0"/>
-              <a:t># 8. Prompt engineering definition</a:t>
-            </a:r>
-          </a:p>
-          <a:p>
-            <a:r>
-              <a:rPr dirty="0" err="1"/>
-              <a:t>add_slide</a:t>
-            </a:r>
-            <a:r>
-              <a:rPr dirty="0"/>
-              <a:t>(</a:t>
-            </a:r>
-          </a:p>
-          <a:p>
-            <a:r>
-              <a:rPr dirty="0"/>
-              <a:t>    "Prompt Engineering",</a:t>
-            </a:r>
-          </a:p>
-          <a:p>
-            <a:r>
-              <a:rPr dirty="0"/>
-              <a:t>    [</a:t>
-            </a:r>
-          </a:p>
-          <a:p>
-            <a:r>
-              <a:rPr dirty="0"/>
-              <a:t>        "Designing instructions to control model behavior",</a:t>
-            </a:r>
-          </a:p>
-          <a:p>
-            <a:r>
-              <a:rPr dirty="0"/>
-              <a:t>        "Uses roles, constraints, examples, formatting",</a:t>
-            </a:r>
-          </a:p>
-          <a:p>
-            <a:r>
-              <a:rPr dirty="0"/>
-              <a:t>        "Critical for clinical safety applications",</a:t>
-            </a:r>
-          </a:p>
-          <a:p>
-            <a:r>
-              <a:rPr dirty="0"/>
-              <a:t>        "Enables structured extraction without retraining"</a:t>
-            </a:r>
-          </a:p>
-          <a:p>
-            <a:r>
-              <a:rPr dirty="0"/>
-              <a:t>    ]</a:t>
-            </a:r>
-          </a:p>
-          <a:p>
-            <a:r>
-              <a:rPr dirty="0"/>
-              <a:t>)</a:t>
-            </a:r>
-          </a:p>
-          <a:p>
-            <a:endParaRPr dirty="0"/>
-          </a:p>
-          <a:p>
-            <a:r>
-              <a:rPr dirty="0"/>
-              <a:t># 9. Automated prompt engineering</a:t>
-            </a:r>
-          </a:p>
-          <a:p>
-            <a:r>
-              <a:rPr dirty="0" err="1"/>
-              <a:t>add_slide</a:t>
-            </a:r>
-            <a:r>
-              <a:rPr dirty="0"/>
-              <a:t>(</a:t>
-            </a:r>
-          </a:p>
-          <a:p>
-            <a:r>
-              <a:rPr dirty="0"/>
-              <a:t>    "Automated Prompt Engineering",</a:t>
-            </a:r>
-          </a:p>
-          <a:p>
-            <a:r>
-              <a:rPr dirty="0"/>
-              <a:t>    [</a:t>
-            </a:r>
-          </a:p>
-          <a:p>
-            <a:r>
-              <a:rPr dirty="0"/>
-              <a:t>        "Systematic testing of prompt variants",</a:t>
-            </a:r>
-          </a:p>
-          <a:p>
-            <a:r>
-              <a:rPr dirty="0"/>
-              <a:t>        "Evaluate performance across multiple runs",</a:t>
-            </a:r>
-          </a:p>
-          <a:p>
-            <a:r>
-              <a:rPr dirty="0"/>
-              <a:t>        "Optimize prompts based on metrics",</a:t>
-            </a:r>
-          </a:p>
-          <a:p>
-            <a:r>
-              <a:rPr dirty="0"/>
-              <a:t>        "Treat prompts as version-controlled artifacts"</a:t>
-            </a:r>
-          </a:p>
-          <a:p>
-            <a:r>
-              <a:rPr dirty="0"/>
-              <a:t>    ]</a:t>
-            </a:r>
-          </a:p>
-          <a:p>
-            <a:r>
-              <a:rPr dirty="0"/>
-              <a:t>)</a:t>
-            </a:r>
-          </a:p>
-          <a:p>
-            <a:endParaRPr dirty="0"/>
-          </a:p>
-          <a:p>
-            <a:r>
-              <a:rPr dirty="0"/>
-              <a:t># 10. Project overview</a:t>
-            </a:r>
-          </a:p>
-          <a:p>
-            <a:r>
-              <a:rPr dirty="0" err="1"/>
-              <a:t>add_slide</a:t>
-            </a:r>
-            <a:r>
-              <a:rPr dirty="0"/>
-              <a:t>(</a:t>
-            </a:r>
-          </a:p>
-          <a:p>
-            <a:r>
-              <a:rPr dirty="0"/>
-              <a:t>    "Project Overview",</a:t>
-            </a:r>
-          </a:p>
-          <a:p>
-            <a:r>
-              <a:rPr dirty="0"/>
-              <a:t>    [</a:t>
-            </a:r>
-          </a:p>
-          <a:p>
-            <a:r>
-              <a:rPr dirty="0"/>
-              <a:t>        "Input: breast cancer radiology + pathology PDFs",</a:t>
-            </a:r>
-          </a:p>
-          <a:p>
-            <a:r>
-              <a:rPr dirty="0"/>
-              <a:t>        "Task: extract 14 structured clinical features",</a:t>
-            </a:r>
-          </a:p>
-          <a:p>
-            <a:r>
-              <a:rPr dirty="0"/>
-              <a:t>        "Compare LLM vs human annotations",</a:t>
-            </a:r>
-          </a:p>
-          <a:p>
-            <a:r>
-              <a:rPr dirty="0"/>
-              <a:t>        "Evaluate accuracy, omission, fabrication"</a:t>
-            </a:r>
-          </a:p>
-          <a:p>
-            <a:r>
-              <a:rPr dirty="0"/>
-              <a:t>    ]</a:t>
-            </a:r>
-          </a:p>
-          <a:p>
-            <a:r>
-              <a:rPr dirty="0"/>
-              <a:t>)</a:t>
-            </a:r>
-          </a:p>
-          <a:p>
-            <a:endParaRPr dirty="0"/>
-          </a:p>
-          <a:p>
-            <a:r>
-              <a:rPr dirty="0"/>
-              <a:t># 11. Key metric definitions</a:t>
-            </a:r>
-          </a:p>
-          <a:p>
-            <a:r>
-              <a:rPr dirty="0" err="1"/>
-              <a:t>add_slide</a:t>
-            </a:r>
-            <a:r>
-              <a:rPr dirty="0"/>
-              <a:t>(</a:t>
-            </a:r>
-          </a:p>
-          <a:p>
-            <a:r>
-              <a:rPr dirty="0"/>
-              <a:t>    "Evaluation Metrics",</a:t>
-            </a:r>
-          </a:p>
-          <a:p>
-            <a:r>
-              <a:rPr dirty="0"/>
-              <a:t>    [</a:t>
-            </a:r>
-          </a:p>
-          <a:p>
-            <a:r>
-              <a:rPr dirty="0"/>
-              <a:t>        "TP: correct extraction",</a:t>
-            </a:r>
-          </a:p>
-          <a:p>
-            <a:r>
-              <a:rPr dirty="0"/>
-              <a:t>        "FN: omission",</a:t>
-            </a:r>
-          </a:p>
-          <a:p>
-            <a:r>
-              <a:rPr dirty="0"/>
-              <a:t>        "FP: fabrication",</a:t>
-            </a:r>
-          </a:p>
-          <a:p>
-            <a:r>
-              <a:rPr dirty="0"/>
-              <a:t>        "TN: correct absence",</a:t>
-            </a:r>
-          </a:p>
-          <a:p>
-            <a:r>
-              <a:rPr dirty="0"/>
-              <a:t>        "Primary outcome: fabrication rate = FP / (FP + TN)"</a:t>
-            </a:r>
-          </a:p>
-          <a:p>
-            <a:r>
-              <a:rPr dirty="0"/>
-              <a:t>    ]</a:t>
-            </a:r>
-          </a:p>
-          <a:p>
-            <a:r>
-              <a:rPr dirty="0"/>
-              <a:t>)</a:t>
-            </a:r>
-          </a:p>
-          <a:p>
-            <a:endParaRPr dirty="0"/>
-          </a:p>
-          <a:p>
-            <a:r>
-              <a:rPr dirty="0"/>
-              <a:t># 12. Prompt versions</a:t>
-            </a:r>
-          </a:p>
-          <a:p>
-            <a:r>
-              <a:rPr dirty="0" err="1"/>
-              <a:t>add_slide</a:t>
-            </a:r>
-            <a:r>
-              <a:rPr dirty="0"/>
-              <a:t>(</a:t>
-            </a:r>
-          </a:p>
-          <a:p>
-            <a:r>
-              <a:rPr dirty="0"/>
-              <a:t>    "Prompt Versions",</a:t>
-            </a:r>
-          </a:p>
-          <a:p>
-            <a:r>
-              <a:rPr dirty="0"/>
-              <a:t>    [</a:t>
-            </a:r>
-          </a:p>
-          <a:p>
-            <a:r>
-              <a:rPr dirty="0"/>
-              <a:t>        "Prompt V1: zero-shot extraction",</a:t>
-            </a:r>
-          </a:p>
-          <a:p>
-            <a:r>
-              <a:rPr dirty="0"/>
-              <a:t>        "Prompt V2: structured developer prompt",</a:t>
-            </a:r>
-          </a:p>
-          <a:p>
-            <a:r>
-              <a:rPr dirty="0"/>
-              <a:t>        "Strict anti-fabrication rules",</a:t>
-            </a:r>
-          </a:p>
-          <a:p>
-            <a:r>
-              <a:rPr dirty="0"/>
-              <a:t>        "JSON output enforcement"</a:t>
-            </a:r>
-          </a:p>
-          <a:p>
-            <a:r>
-              <a:rPr dirty="0"/>
-              <a:t>    ]</a:t>
-            </a:r>
-          </a:p>
-          <a:p>
-            <a:r>
-              <a:rPr dirty="0"/>
-              <a:t>)</a:t>
-            </a:r>
-          </a:p>
-          <a:p>
-            <a:endParaRPr dirty="0"/>
-          </a:p>
-          <a:p>
-            <a:r>
-              <a:rPr dirty="0"/>
-              <a:t># 13. Developer prompt principles</a:t>
-            </a:r>
-          </a:p>
-          <a:p>
-            <a:r>
-              <a:rPr dirty="0" err="1"/>
-              <a:t>add_slide</a:t>
-            </a:r>
-            <a:r>
-              <a:rPr dirty="0"/>
-              <a:t>(</a:t>
-            </a:r>
-          </a:p>
-          <a:p>
-            <a:r>
-              <a:rPr dirty="0"/>
-              <a:t>    "Structured Developer Prompt (V2)",</a:t>
-            </a:r>
-          </a:p>
-          <a:p>
-            <a:r>
-              <a:rPr dirty="0"/>
-              <a:t>    [</a:t>
-            </a:r>
-          </a:p>
-          <a:p>
-            <a:r>
-              <a:rPr dirty="0"/>
-              <a:t>        "Hard constraints: no inference allowed",</a:t>
-            </a:r>
-          </a:p>
-          <a:p>
-            <a:r>
-              <a:rPr dirty="0"/>
-              <a:t>        "Return 'Not reported' if missing",</a:t>
-            </a:r>
-          </a:p>
-          <a:p>
-            <a:r>
-              <a:rPr dirty="0"/>
-              <a:t>        "Return 'Indeterminate' if conflicting",</a:t>
-            </a:r>
-          </a:p>
-          <a:p>
-            <a:r>
-              <a:rPr dirty="0"/>
-              <a:t>        "Evidence-based extraction required"</a:t>
-            </a:r>
-          </a:p>
-          <a:p>
-            <a:r>
-              <a:rPr dirty="0"/>
-              <a:t>    ]</a:t>
-            </a:r>
-          </a:p>
-          <a:p>
-            <a:r>
-              <a:rPr dirty="0"/>
-              <a:t>)</a:t>
-            </a:r>
-          </a:p>
-          <a:p>
-            <a:endParaRPr dirty="0"/>
-          </a:p>
-          <a:p>
-            <a:r>
-              <a:rPr dirty="0"/>
-              <a:t># 14. Prompt structure</a:t>
-            </a:r>
-          </a:p>
-          <a:p>
-            <a:r>
-              <a:rPr dirty="0" err="1"/>
-              <a:t>add_slide</a:t>
-            </a:r>
-            <a:r>
-              <a:rPr dirty="0"/>
-              <a:t>(</a:t>
-            </a:r>
-          </a:p>
-          <a:p>
-            <a:r>
-              <a:rPr dirty="0"/>
-              <a:t>    "Prompt Structure",</a:t>
-            </a:r>
-          </a:p>
-          <a:p>
-            <a:r>
-              <a:rPr dirty="0"/>
-              <a:t>    [</a:t>
-            </a:r>
-          </a:p>
-          <a:p>
-            <a:r>
-              <a:rPr dirty="0"/>
-              <a:t>        "System / developer message defines rules",</a:t>
-            </a:r>
-          </a:p>
-          <a:p>
-            <a:r>
-              <a:rPr dirty="0"/>
-              <a:t>        "User message provides document",</a:t>
-            </a:r>
-          </a:p>
-          <a:p>
-            <a:r>
-              <a:rPr dirty="0"/>
-              <a:t>        "Assistant outputs structured JSON",</a:t>
-            </a:r>
-          </a:p>
-          <a:p>
-            <a:r>
-              <a:rPr dirty="0"/>
-              <a:t>        "Separation of instructions and data"</a:t>
-            </a:r>
-          </a:p>
-          <a:p>
-            <a:r>
-              <a:rPr dirty="0"/>
-              <a:t>    ]</a:t>
-            </a:r>
-          </a:p>
-          <a:p>
-            <a:r>
-              <a:rPr dirty="0"/>
-              <a:t>)</a:t>
-            </a:r>
-          </a:p>
-          <a:p>
-            <a:endParaRPr dirty="0"/>
-          </a:p>
-          <a:p>
-            <a:r>
-              <a:rPr dirty="0"/>
-              <a:t># 15. Prompting techniques</a:t>
-            </a:r>
-          </a:p>
-          <a:p>
-            <a:r>
-              <a:rPr dirty="0" err="1"/>
-              <a:t>add_slide</a:t>
-            </a:r>
-            <a:r>
-              <a:rPr dirty="0"/>
-              <a:t>(</a:t>
-            </a:r>
-          </a:p>
-          <a:p>
-            <a:r>
-              <a:rPr dirty="0"/>
-              <a:t>    "Prompting Techniques Evaluated",</a:t>
-            </a:r>
-          </a:p>
-          <a:p>
-            <a:r>
-              <a:rPr dirty="0"/>
-              <a:t>    [</a:t>
-            </a:r>
-          </a:p>
-          <a:p>
-            <a:r>
-              <a:rPr dirty="0"/>
-              <a:t>        "Zero-shot",</a:t>
-            </a:r>
-          </a:p>
-          <a:p>
-            <a:r>
-              <a:rPr dirty="0"/>
-              <a:t>        "Chain-of-thought",</a:t>
-            </a:r>
-          </a:p>
-          <a:p>
-            <a:r>
-              <a:rPr dirty="0"/>
-              <a:t>        "Few-shot",</a:t>
-            </a:r>
-          </a:p>
-          <a:p>
-            <a:r>
-              <a:rPr dirty="0"/>
-              <a:t>        "RAG (retrieval augmented generation)",</a:t>
-            </a:r>
-          </a:p>
-          <a:p>
-            <a:r>
-              <a:rPr dirty="0"/>
-              <a:t>        "Program-aided prompting",</a:t>
-            </a:r>
-          </a:p>
-          <a:p>
-            <a:r>
-              <a:rPr dirty="0"/>
-              <a:t>        "</a:t>
-            </a:r>
-            <a:r>
-              <a:rPr dirty="0" err="1"/>
-              <a:t>ReAct</a:t>
-            </a:r>
-            <a:r>
-              <a:rPr dirty="0"/>
-              <a:t> / BFOP"</a:t>
-            </a:r>
-          </a:p>
-          <a:p>
-            <a:r>
-              <a:rPr dirty="0"/>
-              <a:t>    ]</a:t>
-            </a:r>
-          </a:p>
-          <a:p>
-            <a:r>
-              <a:rPr dirty="0"/>
-              <a:t>)</a:t>
-            </a:r>
-          </a:p>
-          <a:p>
-            <a:endParaRPr dirty="0"/>
-          </a:p>
-          <a:p>
-            <a:r>
-              <a:rPr dirty="0"/>
-              <a:t># 16. Why prompting over fine-tuning</a:t>
-            </a:r>
-          </a:p>
-          <a:p>
-            <a:r>
-              <a:rPr dirty="0" err="1"/>
-              <a:t>add_slide</a:t>
-            </a:r>
-            <a:r>
-              <a:rPr dirty="0"/>
-              <a:t>(</a:t>
-            </a:r>
-          </a:p>
-          <a:p>
-            <a:r>
-              <a:rPr dirty="0"/>
-              <a:t>    "Prompting vs Fine-Tuning",</a:t>
-            </a:r>
-          </a:p>
-          <a:p>
-            <a:r>
-              <a:rPr dirty="0"/>
-              <a:t>    [</a:t>
-            </a:r>
-          </a:p>
-          <a:p>
-            <a:r>
-              <a:rPr dirty="0"/>
-              <a:t>        "No need for large labeled datasets",</a:t>
-            </a:r>
-          </a:p>
-          <a:p>
-            <a:r>
-              <a:rPr dirty="0"/>
-              <a:t>        "Faster iteration cycle",</a:t>
-            </a:r>
-          </a:p>
-          <a:p>
-            <a:r>
-              <a:rPr dirty="0"/>
-              <a:t>        "Lower cost",</a:t>
-            </a:r>
-          </a:p>
-          <a:p>
-            <a:r>
-              <a:rPr dirty="0"/>
-              <a:t>        "More interpretable and controllable",</a:t>
-            </a:r>
-          </a:p>
-          <a:p>
-            <a:r>
-              <a:rPr dirty="0"/>
-              <a:t>        "Easier safety constraints"</a:t>
-            </a:r>
-          </a:p>
-          <a:p>
-            <a:r>
-              <a:rPr dirty="0"/>
-              <a:t>    ]</a:t>
-            </a:r>
-          </a:p>
-          <a:p>
-            <a:r>
-              <a:rPr dirty="0"/>
-              <a:t>)</a:t>
-            </a:r>
-          </a:p>
-          <a:p>
-            <a:endParaRPr dirty="0"/>
-          </a:p>
-          <a:p>
-            <a:r>
-              <a:rPr dirty="0"/>
-              <a:t># 17. Meta prompting</a:t>
-            </a:r>
-          </a:p>
-          <a:p>
-            <a:r>
-              <a:rPr dirty="0" err="1"/>
-              <a:t>add_slide</a:t>
-            </a:r>
-            <a:r>
-              <a:rPr dirty="0"/>
-              <a:t>(</a:t>
-            </a:r>
-          </a:p>
-          <a:p>
-            <a:r>
-              <a:rPr dirty="0"/>
-              <a:t>    "Meta Prompting",</a:t>
-            </a:r>
-          </a:p>
-          <a:p>
-            <a:r>
-              <a:rPr dirty="0"/>
-              <a:t>    [</a:t>
-            </a:r>
-          </a:p>
-          <a:p>
-            <a:r>
-              <a:rPr dirty="0"/>
-              <a:t>        "Prompts that define how prompts should behave",</a:t>
-            </a:r>
-          </a:p>
-          <a:p>
-            <a:r>
-              <a:rPr dirty="0"/>
-              <a:t>        "Controls reasoning, format, and validation",</a:t>
-            </a:r>
-          </a:p>
-          <a:p>
-            <a:r>
-              <a:rPr dirty="0"/>
-              <a:t>        "Used to enforce consistency",</a:t>
-            </a:r>
-          </a:p>
-          <a:p>
-            <a:r>
-              <a:rPr dirty="0"/>
-              <a:t>        "Critical for production systems"</a:t>
-            </a:r>
-          </a:p>
-          <a:p>
-            <a:r>
-              <a:rPr dirty="0"/>
-              <a:t>    ]</a:t>
-            </a:r>
-          </a:p>
-          <a:p>
-            <a:r>
-              <a:rPr dirty="0"/>
-              <a:t>)</a:t>
-            </a:r>
-          </a:p>
-          <a:p>
-            <a:endParaRPr dirty="0"/>
-          </a:p>
-          <a:p>
-            <a:r>
-              <a:rPr dirty="0"/>
-              <a:t># 18. RAG introduction</a:t>
-            </a:r>
-          </a:p>
-          <a:p>
-            <a:r>
-              <a:rPr dirty="0" err="1"/>
-              <a:t>add_slide</a:t>
-            </a:r>
-            <a:r>
-              <a:rPr dirty="0"/>
-              <a:t>(</a:t>
-            </a:r>
-          </a:p>
-          <a:p>
-            <a:r>
-              <a:rPr dirty="0"/>
-              <a:t>    "Retrieval-Augmented Generation (RAG)",</a:t>
-            </a:r>
-          </a:p>
-          <a:p>
-            <a:r>
-              <a:rPr dirty="0"/>
-              <a:t>    [</a:t>
-            </a:r>
-          </a:p>
-          <a:p>
-            <a:r>
-              <a:rPr dirty="0"/>
-              <a:t>        "LLM restricted to retrieved document chunks",</a:t>
-            </a:r>
-          </a:p>
-          <a:p>
-            <a:r>
-              <a:rPr dirty="0"/>
-              <a:t>        "Reduces hallucination",</a:t>
-            </a:r>
-          </a:p>
-          <a:p>
-            <a:r>
-              <a:rPr dirty="0"/>
-              <a:t>        "Improves factual grounding",</a:t>
-            </a:r>
-          </a:p>
-          <a:p>
-            <a:r>
-              <a:rPr dirty="0"/>
-              <a:t>        "Core component of pipeline"</a:t>
-            </a:r>
-          </a:p>
-          <a:p>
-            <a:r>
-              <a:rPr dirty="0"/>
-              <a:t>    ]</a:t>
-            </a:r>
-          </a:p>
-          <a:p>
-            <a:r>
-              <a:rPr dirty="0"/>
-              <a:t>)</a:t>
-            </a:r>
-          </a:p>
-          <a:p>
-            <a:endParaRPr dirty="0"/>
-          </a:p>
-          <a:p>
-            <a:r>
-              <a:rPr dirty="0"/>
-              <a:t># 19. </a:t>
-            </a:r>
-            <a:r>
-              <a:rPr dirty="0" err="1"/>
-              <a:t>LangGraph</a:t>
-            </a:r>
-            <a:r>
-              <a:rPr dirty="0"/>
-              <a:t> pipeline</a:t>
-            </a:r>
-          </a:p>
-          <a:p>
-            <a:r>
-              <a:rPr dirty="0" err="1"/>
-              <a:t>add_slide</a:t>
-            </a:r>
-            <a:r>
-              <a:rPr dirty="0"/>
-              <a:t>(</a:t>
-            </a:r>
-          </a:p>
-          <a:p>
-            <a:r>
-              <a:rPr dirty="0"/>
-              <a:t>    "</a:t>
-            </a:r>
-            <a:r>
-              <a:rPr dirty="0" err="1"/>
-              <a:t>LangGraph</a:t>
-            </a:r>
-            <a:r>
-              <a:rPr dirty="0"/>
-              <a:t> Agentic Pipeline",</a:t>
-            </a:r>
-          </a:p>
-          <a:p>
-            <a:r>
-              <a:rPr dirty="0"/>
-              <a:t>    [</a:t>
-            </a:r>
-          </a:p>
-          <a:p>
-            <a:r>
-              <a:rPr dirty="0"/>
-              <a:t>        "Query generation",</a:t>
-            </a:r>
-          </a:p>
-          <a:p>
-            <a:r>
-              <a:rPr dirty="0"/>
-              <a:t>        "Evidence retrieval",</a:t>
-            </a:r>
-          </a:p>
-          <a:p>
-            <a:r>
-              <a:rPr dirty="0"/>
-              <a:t>        "Evidence grading",</a:t>
-            </a:r>
-          </a:p>
-          <a:p>
-            <a:r>
-              <a:rPr dirty="0"/>
-              <a:t>        "Validation decision",</a:t>
-            </a:r>
-          </a:p>
-          <a:p>
-            <a:r>
-              <a:rPr dirty="0"/>
-              <a:t>        "Iterative query refinement"</a:t>
-            </a:r>
-          </a:p>
-          <a:p>
-            <a:r>
-              <a:rPr dirty="0"/>
-              <a:t>    ]</a:t>
-            </a:r>
-          </a:p>
-          <a:p>
-            <a:r>
-              <a:rPr dirty="0"/>
-              <a:t>)</a:t>
-            </a:r>
-          </a:p>
-          <a:p>
-            <a:endParaRPr dirty="0"/>
-          </a:p>
-          <a:p>
-            <a:r>
-              <a:rPr dirty="0"/>
-              <a:t># 20. Knowledge graph</a:t>
-            </a:r>
-          </a:p>
-          <a:p>
-            <a:r>
-              <a:rPr dirty="0" err="1"/>
-              <a:t>add_slide</a:t>
-            </a:r>
-            <a:r>
-              <a:rPr dirty="0"/>
-              <a:t>(</a:t>
-            </a:r>
-          </a:p>
-          <a:p>
-            <a:r>
-              <a:rPr dirty="0"/>
-              <a:t>    "Knowledge Graph Layer",</a:t>
-            </a:r>
-          </a:p>
-          <a:p>
-            <a:r>
-              <a:rPr dirty="0"/>
-              <a:t>    [</a:t>
-            </a:r>
-          </a:p>
-          <a:p>
-            <a:r>
-              <a:rPr dirty="0"/>
-              <a:t>        "Nodes: patient, features, observations, evidence",</a:t>
-            </a:r>
-          </a:p>
-          <a:p>
-            <a:r>
-              <a:rPr dirty="0"/>
-              <a:t>        "Edges connect evidence to extracted features",</a:t>
-            </a:r>
-          </a:p>
-          <a:p>
-            <a:r>
-              <a:rPr dirty="0"/>
-              <a:t>        "Used for validation and hallucination detection",</a:t>
-            </a:r>
-          </a:p>
-          <a:p>
-            <a:r>
-              <a:rPr dirty="0"/>
-              <a:t>        "Supports agentic reasoning"</a:t>
-            </a:r>
-          </a:p>
-          <a:p>
-            <a:r>
-              <a:rPr dirty="0"/>
-              <a:t>    ]</a:t>
-            </a:r>
-          </a:p>
-          <a:p>
-            <a:r>
-              <a:rPr dirty="0"/>
-              <a:t>)</a:t>
-            </a:r>
-          </a:p>
-          <a:p>
-            <a:endParaRPr dirty="0"/>
-          </a:p>
-          <a:p>
-            <a:r>
-              <a:rPr dirty="0"/>
-              <a:t># 21. Fabrication detection</a:t>
-            </a:r>
-          </a:p>
-          <a:p>
-            <a:r>
-              <a:rPr dirty="0" err="1"/>
-              <a:t>add_slide</a:t>
-            </a:r>
-            <a:r>
-              <a:rPr dirty="0"/>
-              <a:t>(</a:t>
-            </a:r>
-          </a:p>
-          <a:p>
-            <a:r>
-              <a:rPr dirty="0"/>
-              <a:t>    "Fabrication Detection",</a:t>
-            </a:r>
-          </a:p>
-          <a:p>
-            <a:r>
-              <a:rPr dirty="0"/>
-              <a:t>    [</a:t>
-            </a:r>
-          </a:p>
-          <a:p>
-            <a:r>
-              <a:rPr dirty="0"/>
-              <a:t>        "Compare LLM output vs source evidence",</a:t>
-            </a:r>
-          </a:p>
-          <a:p>
-            <a:r>
-              <a:rPr dirty="0"/>
-              <a:t>        "Flag unsupported claims",</a:t>
-            </a:r>
-          </a:p>
-          <a:p>
-            <a:r>
-              <a:rPr dirty="0"/>
-              <a:t>        "Classify: correct, fabrication, omission, uncertain",</a:t>
-            </a:r>
-          </a:p>
-          <a:p>
-            <a:r>
-              <a:rPr dirty="0"/>
-              <a:t>        "Generate corrected outputs"</a:t>
-            </a:r>
-          </a:p>
-          <a:p>
-            <a:r>
-              <a:rPr dirty="0"/>
-              <a:t>    ]</a:t>
-            </a:r>
-          </a:p>
-          <a:p>
-            <a:r>
-              <a:rPr dirty="0"/>
-              <a:t>)</a:t>
-            </a:r>
-          </a:p>
-          <a:p>
-            <a:endParaRPr dirty="0"/>
-          </a:p>
-          <a:p>
-            <a:r>
-              <a:rPr dirty="0"/>
-              <a:t># 22. Self-consistency metric (image slide)</a:t>
-            </a:r>
-          </a:p>
-          <a:p>
-            <a:r>
-              <a:rPr dirty="0" err="1"/>
-              <a:t>slide_layout</a:t>
-            </a:r>
-            <a:r>
-              <a:rPr dirty="0"/>
-              <a:t> = </a:t>
-            </a:r>
-            <a:r>
-              <a:rPr dirty="0" err="1"/>
-              <a:t>prs.slide_layouts</a:t>
-            </a:r>
-            <a:r>
-              <a:rPr dirty="0"/>
-              <a:t>[5]</a:t>
-            </a:r>
-          </a:p>
-          <a:p>
-            <a:r>
-              <a:rPr dirty="0"/>
-              <a:t>slide = </a:t>
-            </a:r>
-            <a:r>
-              <a:rPr dirty="0" err="1"/>
-              <a:t>prs.slides.add_slide</a:t>
-            </a:r>
-            <a:r>
-              <a:rPr dirty="0"/>
-              <a:t>(</a:t>
-            </a:r>
-            <a:r>
-              <a:rPr dirty="0" err="1"/>
-              <a:t>slide_layout</a:t>
-            </a:r>
-            <a:r>
-              <a:rPr dirty="0"/>
-              <a:t>)</a:t>
-            </a:r>
-          </a:p>
-          <a:p>
-            <a:r>
-              <a:rPr dirty="0" err="1"/>
-              <a:t>slide.shapes.title.text</a:t>
-            </a:r>
-            <a:r>
-              <a:rPr dirty="0"/>
-              <a:t> = "Self-Consistency &amp; Reproducibility"</a:t>
-            </a:r>
-          </a:p>
-          <a:p>
-            <a:endParaRPr dirty="0"/>
-          </a:p>
-          <a:p>
-            <a:r>
-              <a:rPr dirty="0" err="1"/>
-              <a:t>img_path</a:t>
-            </a:r>
-            <a:r>
-              <a:rPr dirty="0"/>
-              <a:t> = "/</a:t>
-            </a:r>
-            <a:r>
-              <a:rPr dirty="0" err="1"/>
-              <a:t>mnt</a:t>
-            </a:r>
-            <a:r>
-              <a:rPr dirty="0"/>
-              <a:t>/data/51ce234e-ae92-4f08-9e2d-9a1f7d769c22.png"</a:t>
-            </a:r>
-          </a:p>
-          <a:p>
-            <a:r>
-              <a:rPr dirty="0" err="1"/>
-              <a:t>slide.shapes.add_picture</a:t>
-            </a:r>
-            <a:r>
-              <a:rPr dirty="0"/>
-              <a:t>(</a:t>
-            </a:r>
-            <a:r>
-              <a:rPr dirty="0" err="1"/>
-              <a:t>img_path</a:t>
-            </a:r>
-            <a:r>
-              <a:rPr dirty="0"/>
-              <a:t>, Inches(1), Inches(1.5), width=Inches(6))</a:t>
-            </a:r>
-          </a:p>
-          <a:p>
-            <a:endParaRPr dirty="0"/>
-          </a:p>
-          <a:p>
-            <a:r>
-              <a:rPr dirty="0"/>
-              <a:t># 23. Explanation slide</a:t>
-            </a:r>
-          </a:p>
-          <a:p>
-            <a:r>
-              <a:rPr dirty="0" err="1"/>
-              <a:t>add_slide</a:t>
-            </a:r>
-            <a:r>
-              <a:rPr dirty="0"/>
-              <a:t>(</a:t>
-            </a:r>
-          </a:p>
-          <a:p>
-            <a:r>
-              <a:rPr dirty="0"/>
-              <a:t>    "Why Self-Consistency?",</a:t>
-            </a:r>
-          </a:p>
-          <a:p>
-            <a:r>
-              <a:rPr dirty="0"/>
-              <a:t>    [</a:t>
-            </a:r>
-          </a:p>
-          <a:p>
-            <a:r>
-              <a:rPr dirty="0"/>
-              <a:t>        "LLM outputs vary across runs",</a:t>
-            </a:r>
-          </a:p>
-          <a:p>
-            <a:r>
-              <a:rPr dirty="0"/>
-              <a:t>        "Multiple iterations needed for reliability",</a:t>
-            </a:r>
-          </a:p>
-          <a:p>
-            <a:r>
-              <a:rPr dirty="0"/>
-              <a:t>        "≥5 runs per case improves stability",</a:t>
-            </a:r>
-          </a:p>
-          <a:p>
-            <a:r>
-              <a:rPr dirty="0"/>
-              <a:t>        "Measure agreement across outputs"</a:t>
-            </a:r>
-          </a:p>
-          <a:p>
-            <a:r>
-              <a:rPr dirty="0"/>
-              <a:t>    ]</a:t>
-            </a:r>
-          </a:p>
-          <a:p>
-            <a:r>
-              <a:rPr dirty="0"/>
-              <a:t>)</a:t>
-            </a:r>
-          </a:p>
-          <a:p>
-            <a:endParaRPr dirty="0"/>
-          </a:p>
-          <a:p>
-            <a:r>
-              <a:rPr dirty="0"/>
-              <a:t># 24. HCAT safety metrics</a:t>
-            </a:r>
-          </a:p>
-          <a:p>
-            <a:r>
-              <a:rPr dirty="0" err="1"/>
-              <a:t>add_slide</a:t>
-            </a:r>
-            <a:r>
-              <a:rPr dirty="0"/>
-              <a:t>(</a:t>
-            </a:r>
-          </a:p>
-          <a:p>
-            <a:r>
-              <a:rPr dirty="0"/>
-              <a:t>    "HCAT Safety Metrics",</a:t>
-            </a:r>
-          </a:p>
-          <a:p>
-            <a:r>
-              <a:rPr dirty="0"/>
-              <a:t>    [</a:t>
-            </a:r>
-          </a:p>
-          <a:p>
-            <a:r>
-              <a:rPr dirty="0"/>
-              <a:t>        "Measure residual PHI risk after deidentification",</a:t>
-            </a:r>
-          </a:p>
-          <a:p>
-            <a:r>
-              <a:rPr dirty="0"/>
-              <a:t>        "PHI recall, precision, F1",</a:t>
-            </a:r>
-          </a:p>
-          <a:p>
-            <a:r>
-              <a:rPr dirty="0"/>
-              <a:t>        "False negative rate (critical safety metric)",</a:t>
-            </a:r>
-          </a:p>
-          <a:p>
-            <a:r>
-              <a:rPr dirty="0"/>
-              <a:t>        "Residual PHI risk score"</a:t>
-            </a:r>
-          </a:p>
-          <a:p>
-            <a:r>
-              <a:rPr dirty="0"/>
-              <a:t>    ]</a:t>
-            </a:r>
-          </a:p>
-          <a:p>
-            <a:r>
-              <a:rPr dirty="0"/>
-              <a:t>)</a:t>
-            </a:r>
-          </a:p>
-          <a:p>
-            <a:endParaRPr dirty="0"/>
-          </a:p>
-          <a:p>
-            <a:r>
-              <a:rPr dirty="0"/>
-              <a:t># 25. Safety importance</a:t>
-            </a:r>
-          </a:p>
-          <a:p>
-            <a:r>
-              <a:rPr dirty="0" err="1"/>
-              <a:t>add_slide</a:t>
-            </a:r>
-            <a:r>
-              <a:rPr dirty="0"/>
-              <a:t>(</a:t>
-            </a:r>
-          </a:p>
-          <a:p>
-            <a:r>
-              <a:rPr dirty="0"/>
-              <a:t>    "Why Safety Matters",</a:t>
-            </a:r>
-          </a:p>
-          <a:p>
-            <a:r>
-              <a:rPr dirty="0"/>
-              <a:t>    [</a:t>
-            </a:r>
-          </a:p>
-          <a:p>
-            <a:r>
-              <a:rPr dirty="0"/>
-              <a:t>        "Clinical data must remain de-identified",</a:t>
-            </a:r>
-          </a:p>
-          <a:p>
-            <a:r>
-              <a:rPr dirty="0"/>
-              <a:t>        "Prevent PHI leakage",</a:t>
-            </a:r>
-          </a:p>
-          <a:p>
-            <a:r>
-              <a:rPr dirty="0"/>
-              <a:t>        "Ensure HIPAA compliance",</a:t>
-            </a:r>
-          </a:p>
-          <a:p>
-            <a:r>
-              <a:rPr dirty="0"/>
-              <a:t>        "Quantify risk using HCAT framework"</a:t>
-            </a:r>
-          </a:p>
-          <a:p>
-            <a:r>
-              <a:rPr dirty="0"/>
-              <a:t>    ]</a:t>
-            </a:r>
-          </a:p>
-          <a:p>
-            <a:r>
-              <a:rPr dirty="0"/>
-              <a:t>)</a:t>
-            </a:r>
-          </a:p>
-          <a:p>
-            <a:endParaRPr dirty="0"/>
-          </a:p>
-          <a:p>
-            <a:r>
-              <a:rPr dirty="0"/>
-              <a:t># 26. Full pipeline</a:t>
-            </a:r>
-          </a:p>
-          <a:p>
-            <a:r>
-              <a:rPr dirty="0" err="1"/>
-              <a:t>add_slide</a:t>
-            </a:r>
-            <a:r>
-              <a:rPr dirty="0"/>
-              <a:t>(</a:t>
-            </a:r>
-          </a:p>
-          <a:p>
-            <a:r>
-              <a:rPr dirty="0"/>
-              <a:t>    "End-to-End Pipeline",</a:t>
-            </a:r>
-          </a:p>
-          <a:p>
-            <a:r>
-              <a:rPr dirty="0"/>
-              <a:t>    [</a:t>
-            </a:r>
-          </a:p>
-          <a:p>
-            <a:r>
-              <a:rPr dirty="0"/>
-              <a:t>        "OCR + deidentification",</a:t>
-            </a:r>
-          </a:p>
-          <a:p>
-            <a:r>
-              <a:rPr dirty="0"/>
-              <a:t>        "LLM extraction (prompt variants)",</a:t>
-            </a:r>
-          </a:p>
-          <a:p>
-            <a:r>
-              <a:rPr dirty="0"/>
-              <a:t>        "Human validation",</a:t>
-            </a:r>
-          </a:p>
-          <a:p>
-            <a:r>
-              <a:rPr dirty="0"/>
-              <a:t>        "Metric computation",</a:t>
-            </a:r>
-          </a:p>
-          <a:p>
-            <a:r>
-              <a:rPr dirty="0"/>
-              <a:t>        "RAG-based validation layer"</a:t>
-            </a:r>
-          </a:p>
-          <a:p>
-            <a:r>
-              <a:rPr dirty="0"/>
-              <a:t>    ]</a:t>
-            </a:r>
-          </a:p>
-          <a:p>
-            <a:r>
-              <a:rPr dirty="0"/>
-              <a:t>)</a:t>
-            </a:r>
-          </a:p>
-          <a:p>
-            <a:endParaRPr dirty="0"/>
-          </a:p>
-          <a:p>
-            <a:r>
-              <a:rPr dirty="0"/>
-              <a:t># 27. Contributions</a:t>
-            </a:r>
-          </a:p>
-          <a:p>
-            <a:r>
-              <a:rPr dirty="0" err="1"/>
-              <a:t>add_slide</a:t>
-            </a:r>
-            <a:r>
-              <a:rPr dirty="0"/>
-              <a:t>(</a:t>
-            </a:r>
-          </a:p>
-          <a:p>
-            <a:r>
-              <a:rPr dirty="0"/>
-              <a:t>    "Key Contributions",</a:t>
-            </a:r>
-          </a:p>
-          <a:p>
-            <a:r>
-              <a:rPr dirty="0"/>
-              <a:t>    [</a:t>
-            </a:r>
-          </a:p>
-          <a:p>
-            <a:r>
-              <a:rPr dirty="0"/>
-              <a:t>        "Clinical evaluation of LLM summarization",</a:t>
-            </a:r>
-          </a:p>
-          <a:p>
-            <a:r>
-              <a:rPr dirty="0"/>
-              <a:t>        "Fabrication-focused safety analysis",</a:t>
-            </a:r>
-          </a:p>
-          <a:p>
-            <a:r>
-              <a:rPr dirty="0"/>
-              <a:t>        "Prompt optimization framework",</a:t>
-            </a:r>
-          </a:p>
-          <a:p>
-            <a:r>
-              <a:rPr dirty="0"/>
-              <a:t>        "Production monitoring strategy"</a:t>
-            </a:r>
-          </a:p>
-          <a:p>
-            <a:r>
-              <a:rPr dirty="0"/>
-              <a:t>    ]</a:t>
-            </a:r>
-          </a:p>
-          <a:p>
-            <a:r>
-              <a:rPr dirty="0"/>
-              <a:t>)</a:t>
-            </a:r>
-          </a:p>
-          <a:p>
-            <a:endParaRPr dirty="0"/>
-          </a:p>
-          <a:p>
-            <a:r>
-              <a:rPr dirty="0"/>
-              <a:t># Save</a:t>
-            </a:r>
-          </a:p>
-          <a:p>
-            <a:r>
-              <a:rPr dirty="0" err="1"/>
-              <a:t>file_path</a:t>
-            </a:r>
-            <a:r>
-              <a:rPr dirty="0"/>
-              <a:t> = "/</a:t>
-            </a:r>
-            <a:r>
-              <a:rPr dirty="0" err="1"/>
-              <a:t>mnt</a:t>
-            </a:r>
-            <a:r>
-              <a:rPr dirty="0"/>
-              <a:t>/data/llm_prompt_engineering_breast_cancer_v2.pptx"</a:t>
-            </a:r>
-          </a:p>
-          <a:p>
-            <a:r>
-              <a:rPr dirty="0" err="1"/>
-              <a:t>prs.save</a:t>
-            </a:r>
-            <a:r>
-              <a:rPr dirty="0"/>
-              <a:t>(</a:t>
-            </a:r>
-            <a:r>
-              <a:rPr dirty="0" err="1"/>
-              <a:t>file_path</a:t>
-            </a:r>
-            <a:r>
-              <a:rPr dirty="0"/>
-              <a:t>)</a:t>
-            </a:r>
-          </a:p>
-          <a:p>
-            <a:endParaRPr dirty="0"/>
-          </a:p>
-          <a:p>
-            <a:r>
-              <a:rPr dirty="0" err="1"/>
-              <a:t>file_path</a:t>
-            </a:r>
-            <a:endParaRPr dirty="0"/>
-          </a:p>
-          <a:p>
-            <a:endParaRPr dirty="0"/>
-          </a:p>
-          <a:p>
-            <a:r>
-              <a:rPr dirty="0"/>
-              <a:t>Meta-prompting: A higher-order prompting strategy where the model is instructed on how to reason, structure outputs, and validate responses.</a:t>
-            </a:r>
-          </a:p>
-          <a:p>
-            <a:r>
-              <a:rPr dirty="0"/>
-              <a:t>Uses task-agnostic scaffolding to generalize across tasks.</a:t>
-            </a:r>
-          </a:p>
-          <a:p>
-            <a:r>
-              <a:rPr dirty="0"/>
-              <a:t>Improves consistency, reasoning reliability, and reduces hallucination.</a:t>
-            </a:r>
-          </a:p>
-          <a:p>
-            <a:r>
-              <a:rPr dirty="0"/>
-              <a:t>In this project: meta-prompts enforce evidence grounding, structured JSON outputs, and anti-fabrication rules.</a:t>
-            </a:r>
-          </a:p>
-          <a:p>
-            <a:r>
-              <a:rPr dirty="0"/>
-              <a:t>Acts as a control layer over base prompts rather than task-specific tuning.</a:t>
-            </a:r>
-          </a:p>
-        </p:txBody>
-      </p:sp>
-      <p:sp>
-        <p:nvSpPr>
-          <p:cNvPr id="4" name="Slide Number Placeholder 3"/>
-          <p:cNvSpPr>
-            <a:spLocks noGrp="1"/>
-          </p:cNvSpPr>
-          <p:nvPr>
-            <p:ph type="sldNum" sz="quarter" idx="5"/>
-          </p:nvPr>
-        </p:nvSpPr>
-        <p:spPr/>
-      </p:sp>
-    </p:spTree>
-  </p:cSld>
-  <p:clrMapOvr>
-    <a:masterClrMapping/>
-  </p:clrMapOvr>
-</p:notes>
-</file>
-
-<file path=ppt/notesSlides/notesSlide5.xml><?xml version="1.0" encoding="utf-8"?>
 <p:notes xmlns:a="http://schemas.openxmlformats.org/drawingml/2006/main" xmlns:r="http://schemas.openxmlformats.org/officeDocument/2006/relationships" xmlns:p="http://schemas.openxmlformats.org/presentationml/2006/main">
   <p:cSld>
     <p:spTree>
@@ -7723,7 +5661,7 @@
 </p:notes>
 </file>
 
-<file path=ppt/notesSlides/notesSlide6.xml><?xml version="1.0" encoding="utf-8"?>
+<file path=ppt/notesSlides/notesSlide5.xml><?xml version="1.0" encoding="utf-8"?>
 <p:notes xmlns:a="http://schemas.openxmlformats.org/drawingml/2006/main" xmlns:r="http://schemas.openxmlformats.org/officeDocument/2006/relationships" xmlns:p="http://schemas.openxmlformats.org/presentationml/2006/main">
   <p:cSld>
     <p:spTree>
@@ -34949,7 +32887,7 @@
           <a:p>
             <a:fld id="{5BCAD085-E8A6-8845-BD4E-CB4CCA059FC4}" type="datetimeFigureOut">
               <a:rPr lang="en-US" smtClean="0"/>
-              <a:t>5/2/2026</a:t>
+              <a:t>5/3/2026</a:t>
             </a:fld>
             <a:endParaRPr lang="en-US"/>
           </a:p>
@@ -37684,7 +35622,8 @@
           <a:lstStyle/>
           <a:p>
             <a:r>
-              <a:t>Prompting Techniques</a:t>
+              <a:rPr lang="en-US" dirty="0"/>
+              <a:t>Prompt structure and safety guardrails</a:t>
             </a:r>
           </a:p>
         </p:txBody>
@@ -37707,71 +35646,30 @@
           <a:lstStyle/>
           <a:p>
             <a:r>
-              <a:rPr dirty="0"/>
-              <a:t>Zero-shot</a:t>
-            </a:r>
-          </a:p>
-          <a:p>
-            <a:r>
-              <a:rPr dirty="0"/>
-              <a:t>Chain-of-thought</a:t>
-            </a:r>
-          </a:p>
-          <a:p>
-            <a:r>
-              <a:rPr dirty="0"/>
-              <a:t>Few-shot</a:t>
-            </a:r>
-          </a:p>
-          <a:p>
-            <a:r>
-              <a:rPr dirty="0"/>
-              <a:t>RAG</a:t>
-            </a:r>
-          </a:p>
-          <a:p>
-            <a:r>
-              <a:rPr dirty="0" err="1"/>
-              <a:t>ReAct</a:t>
-            </a:r>
-            <a:r>
-              <a:rPr lang="en-US" dirty="0"/>
-              <a:t>/BFOP</a:t>
-            </a:r>
-          </a:p>
-          <a:p>
-            <a:r>
-              <a:rPr lang="en-US" dirty="0"/>
-              <a:t>Program aided prompting</a:t>
-            </a:r>
-          </a:p>
-          <a:p>
-            <a:r>
-              <a:rPr lang="en-US" dirty="0"/>
-              <a:t>Custom</a:t>
-            </a:r>
-          </a:p>
-          <a:p>
-            <a:pPr lvl="1"/>
-            <a:r>
-              <a:rPr lang="en-US" dirty="0"/>
-              <a:t>Model specific zero shot</a:t>
-            </a:r>
-          </a:p>
-          <a:p>
-            <a:pPr lvl="1"/>
-            <a:r>
-              <a:rPr lang="en-US" dirty="0"/>
-              <a:t>M-code </a:t>
-            </a:r>
-            <a:r>
-              <a:rPr lang="en-US" dirty="0" err="1"/>
-              <a:t>hierachial</a:t>
-            </a:r>
+              <a:rPr lang="en-US" dirty="0"/>
+              <a:t>System / developer message defines rules",</a:t>
+            </a:r>
+          </a:p>
+          <a:p>
+            <a:r>
+              <a:rPr lang="en-US" dirty="0"/>
+              <a:t>User message provides document",</a:t>
+            </a:r>
+          </a:p>
+          <a:p>
+            <a:r>
+              <a:rPr lang="en-US" dirty="0"/>
+              <a:t> Assistant outputs structured JSON",</a:t>
+            </a:r>
+          </a:p>
+          <a:p>
+            <a:r>
+              <a:rPr lang="en-US" dirty="0"/>
+              <a:t>        "Separation of instructions and data"</a:t>
+            </a:r>
+          </a:p>
+          <a:p>
             <a:endParaRPr lang="en-US" dirty="0"/>
-          </a:p>
-          <a:p>
-            <a:endParaRPr dirty="0"/>
           </a:p>
         </p:txBody>
       </p:sp>
@@ -37802,7 +35700,13 @@
       </p:grpSpPr>
       <p:sp>
         <p:nvSpPr>
-          <p:cNvPr id="2" name="Title 1"/>
+          <p:cNvPr id="2" name="Title 1">
+            <a:extLst>
+              <a:ext uri="{FF2B5EF4-FFF2-40B4-BE49-F238E27FC236}">
+                <a16:creationId xmlns:a16="http://schemas.microsoft.com/office/drawing/2014/main" id="{99CCC169-F7A7-C762-898D-3985142230CB}"/>
+              </a:ext>
+            </a:extLst>
+          </p:cNvPr>
           <p:cNvSpPr>
             <a:spLocks noGrp="1"/>
           </p:cNvSpPr>
@@ -37817,14 +35721,20 @@
           <a:p>
             <a:r>
               <a:rPr lang="en-US" dirty="0"/>
-              <a:t>Prompt structure</a:t>
-            </a:r>
-          </a:p>
-        </p:txBody>
-      </p:sp>
-      <p:sp>
-        <p:nvSpPr>
-          <p:cNvPr id="3" name="Content Placeholder 2"/>
+              <a:t>Prompt versioning</a:t>
+            </a:r>
+          </a:p>
+        </p:txBody>
+      </p:sp>
+      <p:sp>
+        <p:nvSpPr>
+          <p:cNvPr id="3" name="Content Placeholder 2">
+            <a:extLst>
+              <a:ext uri="{FF2B5EF4-FFF2-40B4-BE49-F238E27FC236}">
+                <a16:creationId xmlns:a16="http://schemas.microsoft.com/office/drawing/2014/main" id="{6328D4AA-88F0-A000-4DC7-A03C0F2E06B2}"/>
+              </a:ext>
+            </a:extLst>
+          </p:cNvPr>
           <p:cNvSpPr>
             <a:spLocks noGrp="1"/>
           </p:cNvSpPr>
@@ -37841,25 +35751,41 @@
           <a:p>
             <a:r>
               <a:rPr lang="en-US" dirty="0"/>
-              <a:t>System / developer message defines rules",</a:t>
-            </a:r>
-          </a:p>
-          <a:p>
-            <a:r>
-              <a:rPr lang="en-US" dirty="0"/>
-              <a:t>User message provides document",</a:t>
-            </a:r>
-          </a:p>
-          <a:p>
-            <a:r>
-              <a:rPr lang="en-US" dirty="0"/>
-              <a:t> Assistant outputs structured JSON",</a:t>
-            </a:r>
-          </a:p>
-          <a:p>
-            <a:r>
-              <a:rPr lang="en-US" dirty="0"/>
-              <a:t>        "Separation of instructions and data"</a:t>
+              <a:t>Prompt V1: zero-shot extraction</a:t>
+            </a:r>
+          </a:p>
+          <a:p>
+            <a:r>
+              <a:rPr lang="en-US" dirty="0"/>
+              <a:t>Prompt V2: structured zero-shot with strict anti-fabrication guardrails </a:t>
+            </a:r>
+          </a:p>
+          <a:p>
+            <a:pPr lvl="2"/>
+            <a:r>
+              <a:rPr lang="en-US" dirty="0"/>
+              <a:t>Hard constraints: no inference allowed</a:t>
+            </a:r>
+          </a:p>
+          <a:p>
+            <a:pPr lvl="2"/>
+            <a:r>
+              <a:rPr lang="en-US" dirty="0"/>
+              <a:t>Return 'Not reported' if missing"</a:t>
+            </a:r>
+          </a:p>
+          <a:p>
+            <a:pPr lvl="2"/>
+            <a:r>
+              <a:rPr lang="en-US" dirty="0"/>
+              <a:t>Return 'Indeterminate' if conflicting"</a:t>
+            </a:r>
+          </a:p>
+          <a:p>
+            <a:pPr lvl="2"/>
+            <a:r>
+              <a:rPr lang="en-US" dirty="0"/>
+              <a:t>Evidence-based extraction required</a:t>
             </a:r>
           </a:p>
           <a:p>
@@ -37868,6 +35794,11 @@
         </p:txBody>
       </p:sp>
     </p:spTree>
+    <p:extLst>
+      <p:ext uri="{BB962C8B-B14F-4D97-AF65-F5344CB8AC3E}">
+        <p14:creationId xmlns:p14="http://schemas.microsoft.com/office/powerpoint/2010/main" val="1052225801"/>
+      </p:ext>
+    </p:extLst>
   </p:cSld>
   <p:clrMapOvr>
     <a:masterClrMapping/>
@@ -37897,7 +35828,7 @@
           <p:cNvPr id="2" name="Title 1">
             <a:extLst>
               <a:ext uri="{FF2B5EF4-FFF2-40B4-BE49-F238E27FC236}">
-                <a16:creationId xmlns:a16="http://schemas.microsoft.com/office/drawing/2014/main" id="{99CCC169-F7A7-C762-898D-3985142230CB}"/>
+                <a16:creationId xmlns:a16="http://schemas.microsoft.com/office/drawing/2014/main" id="{EF7921CE-2B0F-48A5-99A4-4C0C1F60561A}"/>
               </a:ext>
             </a:extLst>
           </p:cNvPr>
@@ -37906,34 +35837,6 @@
           </p:cNvSpPr>
           <p:nvPr>
             <p:ph type="title"/>
-          </p:nvPr>
-        </p:nvSpPr>
-        <p:spPr/>
-        <p:txBody>
-          <a:bodyPr/>
-          <a:lstStyle/>
-          <a:p>
-            <a:r>
-              <a:rPr lang="en-US" dirty="0"/>
-              <a:t>Prompt versioning</a:t>
-            </a:r>
-          </a:p>
-        </p:txBody>
-      </p:sp>
-      <p:sp>
-        <p:nvSpPr>
-          <p:cNvPr id="3" name="Content Placeholder 2">
-            <a:extLst>
-              <a:ext uri="{FF2B5EF4-FFF2-40B4-BE49-F238E27FC236}">
-                <a16:creationId xmlns:a16="http://schemas.microsoft.com/office/drawing/2014/main" id="{6328D4AA-88F0-A000-4DC7-A03C0F2E06B2}"/>
-              </a:ext>
-            </a:extLst>
-          </p:cNvPr>
-          <p:cNvSpPr>
-            <a:spLocks noGrp="1"/>
-          </p:cNvSpPr>
-          <p:nvPr>
-            <p:ph idx="1"/>
           </p:nvPr>
         </p:nvSpPr>
         <p:spPr/>
@@ -37945,59 +35848,205 @@
           <a:p>
             <a:r>
               <a:rPr lang="en-US" dirty="0"/>
-              <a:t>Prompt V1: zero-shot extraction</a:t>
-            </a:r>
-          </a:p>
-          <a:p>
-            <a:r>
-              <a:rPr lang="en-US" dirty="0"/>
-              <a:t>Prompt V2: structured zero-shot with strict anti-fabrication guardrails </a:t>
-            </a:r>
-          </a:p>
-          <a:p>
-            <a:pPr lvl="2"/>
-            <a:r>
-              <a:rPr lang="en-US" dirty="0"/>
-              <a:t>Hard constraints: no inference allowed</a:t>
-            </a:r>
-          </a:p>
-          <a:p>
-            <a:pPr lvl="2"/>
-            <a:r>
-              <a:rPr lang="en-US" dirty="0"/>
-              <a:t>Return 'Not reported' if missing"</a:t>
-            </a:r>
-          </a:p>
-          <a:p>
-            <a:pPr lvl="2"/>
-            <a:r>
-              <a:rPr lang="en-US" dirty="0"/>
-              <a:t>Return 'Indeterminate' if conflicting"</a:t>
-            </a:r>
-          </a:p>
-          <a:p>
-            <a:pPr lvl="2"/>
-            <a:r>
-              <a:rPr lang="en-US" dirty="0"/>
-              <a:t>Evidence-based extraction required</a:t>
-            </a:r>
-          </a:p>
-          <a:p>
-            <a:pPr lvl="1"/>
-            <a:r>
-              <a:rPr lang="en-US" dirty="0"/>
-              <a:t>JSON output enforcement</a:t>
-            </a:r>
-          </a:p>
+              <a:t>Prompt performance evaluation</a:t>
+            </a:r>
+          </a:p>
+        </p:txBody>
+      </p:sp>
+      <p:sp>
+        <p:nvSpPr>
+          <p:cNvPr id="3" name="Content Placeholder 2">
+            <a:extLst>
+              <a:ext uri="{FF2B5EF4-FFF2-40B4-BE49-F238E27FC236}">
+                <a16:creationId xmlns:a16="http://schemas.microsoft.com/office/drawing/2014/main" id="{6834FC33-2700-048C-29F8-44B7A7DE2E4A}"/>
+              </a:ext>
+            </a:extLst>
+          </p:cNvPr>
+          <p:cNvSpPr>
+            <a:spLocks noGrp="1"/>
+          </p:cNvSpPr>
+          <p:nvPr>
+            <p:ph idx="1"/>
+          </p:nvPr>
+        </p:nvSpPr>
+        <p:spPr>
+          <a:xfrm>
+            <a:off x="1981200" y="1166019"/>
+            <a:ext cx="8229600" cy="4525963"/>
+          </a:xfrm>
+        </p:spPr>
+        <p:txBody>
+          <a:bodyPr>
+            <a:normAutofit fontScale="40000" lnSpcReduction="20000"/>
+          </a:bodyPr>
+          <a:lstStyle/>
           <a:p>
             <a:endParaRPr lang="en-US" dirty="0"/>
+          </a:p>
+          <a:p>
+            <a:r>
+              <a:rPr lang="en-US" dirty="0"/>
+              <a:t>{</a:t>
+            </a:r>
+          </a:p>
+          <a:p>
+            <a:r>
+              <a:rPr lang="en-US" dirty="0"/>
+              <a:t>“prompt_v1": {</a:t>
+            </a:r>
+          </a:p>
+          <a:p>
+            <a:r>
+              <a:rPr lang="en-US" dirty="0"/>
+              <a:t>"id": "P1",</a:t>
+            </a:r>
+          </a:p>
+          <a:p>
+            <a:r>
+              <a:rPr lang="en-US" dirty="0"/>
+              <a:t>"date_frozen": "2026-02-28",</a:t>
+            </a:r>
+          </a:p>
+          <a:p>
+            <a:r>
+              <a:rPr lang="en-US" dirty="0"/>
+              <a:t>"approach": "structured extraction",</a:t>
+            </a:r>
+          </a:p>
+          <a:p>
+            <a:r>
+              <a:rPr lang="en-US" dirty="0"/>
+              <a:t>"model": "gpt-4.x",</a:t>
+            </a:r>
+          </a:p>
+          <a:p>
+            <a:r>
+              <a:rPr lang="en-US" dirty="0"/>
+              <a:t>"temperature": 0.0,</a:t>
+            </a:r>
+          </a:p>
+          <a:p>
+            <a:r>
+              <a:rPr lang="en-US" dirty="0"/>
+              <a:t>"status": "frozen"},</a:t>
+            </a:r>
+          </a:p>
+          <a:p>
+            <a:endParaRPr lang="en-US" dirty="0"/>
+          </a:p>
+          <a:p>
+            <a:r>
+              <a:rPr lang="en-US" dirty="0"/>
+              <a:t>"prompt_v2": {</a:t>
+            </a:r>
+          </a:p>
+          <a:p>
+            <a:r>
+              <a:rPr lang="en-US" dirty="0"/>
+              <a:t>"id": "P2",</a:t>
+            </a:r>
+          </a:p>
+          <a:p>
+            <a:r>
+              <a:rPr lang="en-US" dirty="0"/>
+              <a:t>"date_frozen": "2026-03-01",</a:t>
+            </a:r>
+          </a:p>
+          <a:p>
+            <a:r>
+              <a:rPr lang="en-US" dirty="0"/>
+              <a:t>"approach": "refined extraction",</a:t>
+            </a:r>
+          </a:p>
+          <a:p>
+            <a:r>
+              <a:rPr lang="en-US" dirty="0"/>
+              <a:t>“status": "frozen"}</a:t>
+            </a:r>
+          </a:p>
+          <a:p>
+            <a:r>
+              <a:rPr lang="en-US" dirty="0"/>
+              <a:t>}</a:t>
+            </a:r>
+          </a:p>
+          <a:p>
+            <a:endParaRPr lang="en-US" dirty="0"/>
+          </a:p>
+          <a:p>
+            <a:r>
+              <a:rPr lang="en-US" dirty="0"/>
+              <a:t>Classification performance run log:</a:t>
+            </a:r>
+          </a:p>
+          <a:p>
+            <a:r>
+              <a:rPr lang="en-US" dirty="0"/>
+              <a:t>{"</a:t>
+            </a:r>
+            <a:r>
+              <a:rPr lang="en-US" dirty="0" err="1"/>
+              <a:t>run_id</a:t>
+            </a:r>
+            <a:r>
+              <a:rPr lang="en-US" dirty="0"/>
+              <a:t>": "R23",</a:t>
+            </a:r>
+          </a:p>
+          <a:p>
+            <a:r>
+              <a:rPr lang="en-US" dirty="0"/>
+              <a:t>"model": "gpt-4.x",</a:t>
+            </a:r>
+          </a:p>
+          <a:p>
+            <a:r>
+              <a:rPr lang="en-US" dirty="0"/>
+              <a:t>"prompt_id": "P17",“</a:t>
+            </a:r>
+          </a:p>
+          <a:p>
+            <a:r>
+              <a:rPr lang="en-US" dirty="0"/>
+              <a:t>approach": "BFOP",</a:t>
+            </a:r>
+          </a:p>
+          <a:p>
+            <a:r>
+              <a:rPr lang="en-US" dirty="0"/>
+              <a:t>"timestamp": "2026-03-10",</a:t>
+            </a:r>
+          </a:p>
+          <a:p>
+            <a:r>
+              <a:rPr lang="en-US" dirty="0"/>
+              <a:t>"overall_accuracy": 0.82,</a:t>
+            </a:r>
+          </a:p>
+          <a:p>
+            <a:r>
+              <a:rPr lang="en-US" dirty="0"/>
+              <a:t>"fabrication_rate": 0.05,</a:t>
+            </a:r>
+          </a:p>
+          <a:p>
+            <a:r>
+              <a:rPr lang="en-US" dirty="0"/>
+              <a:t>"domain_breakdown": {</a:t>
+            </a:r>
+          </a:p>
+          <a:p>
+            <a:r>
+              <a:rPr lang="en-US" dirty="0"/>
+              <a:t>"radiology": 0.84,"pathology": 0.79}}</a:t>
+            </a:r>
           </a:p>
         </p:txBody>
       </p:sp>
     </p:spTree>
     <p:extLst>
       <p:ext uri="{BB962C8B-B14F-4D97-AF65-F5344CB8AC3E}">
-        <p14:creationId xmlns:p14="http://schemas.microsoft.com/office/powerpoint/2010/main" val="1052225801"/>
+        <p14:creationId xmlns:p14="http://schemas.microsoft.com/office/powerpoint/2010/main" val="570611450"/>
       </p:ext>
     </p:extLst>
   </p:cSld>
@@ -38029,7 +36078,7 @@
           <p:cNvPr id="2" name="Title 1">
             <a:extLst>
               <a:ext uri="{FF2B5EF4-FFF2-40B4-BE49-F238E27FC236}">
-                <a16:creationId xmlns:a16="http://schemas.microsoft.com/office/drawing/2014/main" id="{EF7921CE-2B0F-48A5-99A4-4C0C1F60561A}"/>
+                <a16:creationId xmlns:a16="http://schemas.microsoft.com/office/drawing/2014/main" id="{88CE21F8-9390-3DE0-F176-6592E414D43F}"/>
               </a:ext>
             </a:extLst>
           </p:cNvPr>
@@ -38042,14 +36091,12 @@
         </p:nvSpPr>
         <p:spPr/>
         <p:txBody>
-          <a:bodyPr>
-            <a:normAutofit/>
-          </a:bodyPr>
+          <a:bodyPr/>
           <a:lstStyle/>
           <a:p>
             <a:r>
               <a:rPr lang="en-US" dirty="0"/>
-              <a:t>Prompt performance evaluation</a:t>
+              <a:t>Summary of Results</a:t>
             </a:r>
           </a:p>
         </p:txBody>
@@ -38059,7 +36106,7 @@
           <p:cNvPr id="3" name="Content Placeholder 2">
             <a:extLst>
               <a:ext uri="{FF2B5EF4-FFF2-40B4-BE49-F238E27FC236}">
-                <a16:creationId xmlns:a16="http://schemas.microsoft.com/office/drawing/2014/main" id="{6834FC33-2700-048C-29F8-44B7A7DE2E4A}"/>
+                <a16:creationId xmlns:a16="http://schemas.microsoft.com/office/drawing/2014/main" id="{D0C3BAF7-901E-3C31-935A-740B21F37CA4}"/>
               </a:ext>
             </a:extLst>
           </p:cNvPr>
@@ -38070,184 +36117,73 @@
             <p:ph idx="1"/>
           </p:nvPr>
         </p:nvSpPr>
-        <p:spPr>
-          <a:xfrm>
-            <a:off x="1981200" y="1166019"/>
-            <a:ext cx="8229600" cy="4525963"/>
-          </a:xfrm>
-        </p:spPr>
-        <p:txBody>
-          <a:bodyPr>
-            <a:normAutofit fontScale="40000" lnSpcReduction="20000"/>
-          </a:bodyPr>
+        <p:spPr/>
+        <p:txBody>
+          <a:bodyPr/>
           <a:lstStyle/>
           <a:p>
-            <a:endParaRPr lang="en-US" dirty="0"/>
-          </a:p>
-          <a:p>
-            <a:r>
-              <a:rPr lang="en-US" dirty="0"/>
-              <a:t>{</a:t>
-            </a:r>
-          </a:p>
-          <a:p>
-            <a:r>
-              <a:rPr lang="en-US" dirty="0"/>
-              <a:t>“prompt_v1": {</a:t>
-            </a:r>
-          </a:p>
-          <a:p>
-            <a:r>
-              <a:rPr lang="en-US" dirty="0"/>
-              <a:t>"id": "P1",</a:t>
-            </a:r>
-          </a:p>
-          <a:p>
-            <a:r>
-              <a:rPr lang="en-US" dirty="0"/>
-              <a:t>"date_frozen": "2026-02-28",</a:t>
-            </a:r>
-          </a:p>
-          <a:p>
-            <a:r>
-              <a:rPr lang="en-US" dirty="0"/>
-              <a:t>"approach": "structured extraction",</a:t>
-            </a:r>
-          </a:p>
-          <a:p>
-            <a:r>
-              <a:rPr lang="en-US" dirty="0"/>
-              <a:t>"model": "gpt-4.x",</a:t>
-            </a:r>
-          </a:p>
-          <a:p>
-            <a:r>
-              <a:rPr lang="en-US" dirty="0"/>
-              <a:t>"temperature": 0.0,</a:t>
-            </a:r>
-          </a:p>
-          <a:p>
-            <a:r>
-              <a:rPr lang="en-US" dirty="0"/>
-              <a:t>"status": "frozen"},</a:t>
-            </a:r>
-          </a:p>
-          <a:p>
-            <a:endParaRPr lang="en-US" dirty="0"/>
-          </a:p>
-          <a:p>
-            <a:r>
-              <a:rPr lang="en-US" dirty="0"/>
-              <a:t>"prompt_v2": {</a:t>
-            </a:r>
-          </a:p>
-          <a:p>
-            <a:r>
-              <a:rPr lang="en-US" dirty="0"/>
-              <a:t>"id": "P2",</a:t>
-            </a:r>
-          </a:p>
-          <a:p>
-            <a:r>
-              <a:rPr lang="en-US" dirty="0"/>
-              <a:t>"date_frozen": "2026-03-01",</a:t>
-            </a:r>
-          </a:p>
-          <a:p>
-            <a:r>
-              <a:rPr lang="en-US" dirty="0"/>
-              <a:t>"approach": "refined extraction",</a:t>
-            </a:r>
-          </a:p>
-          <a:p>
-            <a:r>
-              <a:rPr lang="en-US" dirty="0"/>
-              <a:t>“status": "frozen"}</a:t>
-            </a:r>
-          </a:p>
-          <a:p>
-            <a:r>
-              <a:rPr lang="en-US" dirty="0"/>
-              <a:t>}</a:t>
-            </a:r>
-          </a:p>
-          <a:p>
-            <a:endParaRPr lang="en-US" dirty="0"/>
-          </a:p>
-          <a:p>
-            <a:r>
-              <a:rPr lang="en-US" dirty="0"/>
-              <a:t>Classification performance run log:</a:t>
-            </a:r>
-          </a:p>
-          <a:p>
-            <a:r>
-              <a:rPr lang="en-US" dirty="0"/>
-              <a:t>{"</a:t>
-            </a:r>
-            <a:r>
-              <a:rPr lang="en-US" dirty="0" err="1"/>
-              <a:t>run_id</a:t>
-            </a:r>
-            <a:r>
-              <a:rPr lang="en-US" dirty="0"/>
-              <a:t>": "R23",</a:t>
-            </a:r>
-          </a:p>
-          <a:p>
-            <a:r>
-              <a:rPr lang="en-US" dirty="0"/>
-              <a:t>"model": "gpt-4.x",</a:t>
-            </a:r>
-          </a:p>
-          <a:p>
-            <a:r>
-              <a:rPr lang="en-US" dirty="0"/>
-              <a:t>"prompt_id": "P17",“</a:t>
-            </a:r>
-          </a:p>
-          <a:p>
-            <a:r>
-              <a:rPr lang="en-US" dirty="0"/>
-              <a:t>approach": "BFOP",</a:t>
-            </a:r>
-          </a:p>
-          <a:p>
-            <a:r>
-              <a:rPr lang="en-US" dirty="0"/>
-              <a:t>"timestamp": "2026-03-10",</a:t>
-            </a:r>
-          </a:p>
-          <a:p>
-            <a:r>
-              <a:rPr lang="en-US" dirty="0"/>
-              <a:t>"overall_accuracy": 0.82,</a:t>
-            </a:r>
-          </a:p>
-          <a:p>
-            <a:r>
-              <a:rPr lang="en-US" dirty="0"/>
-              <a:t>"fabrication_rate": 0.05,</a:t>
-            </a:r>
-          </a:p>
-          <a:p>
-            <a:r>
-              <a:rPr lang="en-US" dirty="0"/>
-              <a:t>"domain_breakdown": {</a:t>
-            </a:r>
-          </a:p>
-          <a:p>
-            <a:r>
-              <a:rPr lang="en-US" dirty="0"/>
-              <a:t>"radiology": 0.84,"pathology": 0.79}}</a:t>
-            </a:r>
+            <a:endParaRPr lang="en-US"/>
+          </a:p>
+        </p:txBody>
+      </p:sp>
+      <p:sp>
+        <p:nvSpPr>
+          <p:cNvPr id="4" name="Footer Placeholder 3">
+            <a:extLst>
+              <a:ext uri="{FF2B5EF4-FFF2-40B4-BE49-F238E27FC236}">
+                <a16:creationId xmlns:a16="http://schemas.microsoft.com/office/drawing/2014/main" id="{F2D51202-25A3-579F-4B23-8B1B84A1D7D9}"/>
+              </a:ext>
+            </a:extLst>
+          </p:cNvPr>
+          <p:cNvSpPr>
+            <a:spLocks noGrp="1"/>
+          </p:cNvSpPr>
+          <p:nvPr>
+            <p:ph type="ftr" sz="quarter" idx="11"/>
+          </p:nvPr>
+        </p:nvSpPr>
+        <p:spPr/>
+        <p:txBody>
+          <a:bodyPr/>
+          <a:lstStyle/>
+          <a:p>
+            <a:endParaRPr lang="en-US"/>
+          </a:p>
+        </p:txBody>
+      </p:sp>
+      <p:sp>
+        <p:nvSpPr>
+          <p:cNvPr id="5" name="Slide Number Placeholder 4">
+            <a:extLst>
+              <a:ext uri="{FF2B5EF4-FFF2-40B4-BE49-F238E27FC236}">
+                <a16:creationId xmlns:a16="http://schemas.microsoft.com/office/drawing/2014/main" id="{091671C5-480A-BC30-C4EB-1FAF62ED2E99}"/>
+              </a:ext>
+            </a:extLst>
+          </p:cNvPr>
+          <p:cNvSpPr>
+            <a:spLocks noGrp="1"/>
+          </p:cNvSpPr>
+          <p:nvPr>
+            <p:ph type="sldNum" sz="quarter" idx="12"/>
+          </p:nvPr>
+        </p:nvSpPr>
+        <p:spPr/>
+        <p:txBody>
+          <a:bodyPr/>
+          <a:lstStyle/>
+          <a:p>
+            <a:fld id="{C1FF6DA9-008F-8B48-92A6-B652298478BF}" type="slidenum">
+              <a:rPr lang="en-US" smtClean="0"/>
+              <a:t>18</a:t>
+            </a:fld>
+            <a:endParaRPr lang="en-US"/>
           </a:p>
         </p:txBody>
       </p:sp>
     </p:spTree>
     <p:extLst>
       <p:ext uri="{BB962C8B-B14F-4D97-AF65-F5344CB8AC3E}">
-        <p14:creationId xmlns:p14="http://schemas.microsoft.com/office/powerpoint/2010/main" val="570611450"/>
+        <p14:creationId xmlns:p14="http://schemas.microsoft.com/office/powerpoint/2010/main" val="3717739119"/>
       </p:ext>
     </p:extLst>
   </p:cSld>
@@ -38723,7 +36659,7 @@
           <a:p>
             <a:r>
               <a:rPr lang="en-US" dirty="0"/>
-              <a:t>Clinical Problem</a:t>
+              <a:t>What is the clinical problem?</a:t>
             </a:r>
           </a:p>
         </p:txBody>
@@ -38749,7 +36685,10 @@
           <a:bodyPr/>
           <a:lstStyle/>
           <a:p>
-            <a:endParaRPr lang="en-US" dirty="0"/>
+            <a:r>
+              <a:rPr lang="en-US" dirty="0"/>
+              <a:t>Introduction</a:t>
+            </a:r>
           </a:p>
         </p:txBody>
       </p:sp>
@@ -38776,7 +36715,7 @@
           <a:p>
             <a:r>
               <a:rPr lang="en-US" dirty="0"/>
-              <a:t>synthesis of oncologic data for breast cancer surgical consultations is time intensive, error prone, and variable across clinicians</a:t>
+              <a:t>Synthesis of oncologic data for breast cancer surgical consultations is time intensive, error prone, and variable across clinicians</a:t>
             </a:r>
           </a:p>
           <a:p>
@@ -39509,12 +37448,12 @@
       </p:grpSpPr>
       <p:sp>
         <p:nvSpPr>
-          <p:cNvPr id="2" name="Title 1"/>
-          <p:cNvSpPr>
-            <a:spLocks noGrp="1"/>
-          </p:cNvSpPr>
-          <p:nvPr>
-            <p:ph type="title"/>
+          <p:cNvPr id="3" name="Content Placeholder 2"/>
+          <p:cNvSpPr>
+            <a:spLocks noGrp="1"/>
+          </p:cNvSpPr>
+          <p:nvPr>
+            <p:ph idx="1"/>
           </p:nvPr>
         </p:nvSpPr>
         <p:spPr/>
@@ -39526,66 +37465,400 @@
           <a:p>
             <a:r>
               <a:rPr lang="en-US" dirty="0"/>
-              <a:t>Background – LLM Basics </a:t>
-            </a:r>
-            <a:br>
-              <a:rPr lang="en-US" dirty="0"/>
-            </a:br>
-            <a:endParaRPr dirty="0"/>
-          </a:p>
-        </p:txBody>
-      </p:sp>
-      <p:sp>
-        <p:nvSpPr>
-          <p:cNvPr id="3" name="Content Placeholder 2"/>
-          <p:cNvSpPr>
-            <a:spLocks noGrp="1"/>
-          </p:cNvSpPr>
-          <p:nvPr>
-            <p:ph idx="1"/>
-          </p:nvPr>
-        </p:nvSpPr>
-        <p:spPr/>
-        <p:txBody>
-          <a:bodyPr>
-            <a:normAutofit/>
+              <a:t>What is an LLM?</a:t>
+            </a:r>
+          </a:p>
+          <a:p>
+            <a:pPr marL="285750" indent="-285750">
+              <a:buFont typeface="Arial" panose="020B0604020202020204" pitchFamily="34" charset="0"/>
+              <a:buChar char="•"/>
+            </a:pPr>
+            <a:r>
+              <a:rPr lang="en-US" dirty="0"/>
+              <a:t>Neural networks trained on large text corpora</a:t>
+            </a:r>
+          </a:p>
+          <a:p>
+            <a:pPr marL="285750" indent="-285750">
+              <a:buFont typeface="Arial" panose="020B0604020202020204" pitchFamily="34" charset="0"/>
+              <a:buChar char="•"/>
+            </a:pPr>
+            <a:r>
+              <a:rPr lang="en-US" dirty="0"/>
+              <a:t>Based on transformer architecture</a:t>
+            </a:r>
+          </a:p>
+          <a:p>
+            <a:pPr marL="285750" indent="-285750">
+              <a:buFont typeface="Arial" panose="020B0604020202020204" pitchFamily="34" charset="0"/>
+              <a:buChar char="•"/>
+            </a:pPr>
+            <a:r>
+              <a:rPr lang="en-US" dirty="0"/>
+              <a:t>Learn probability distributions over language</a:t>
+            </a:r>
+          </a:p>
+          <a:p>
+            <a:pPr marL="285750" indent="-285750">
+              <a:buFont typeface="Arial" panose="020B0604020202020204" pitchFamily="34" charset="0"/>
+              <a:buChar char="•"/>
+            </a:pPr>
+            <a:r>
+              <a:rPr lang="en-US" dirty="0"/>
+              <a:t>Non-deterministic outputs (same input ≠ same output)"</a:t>
+            </a:r>
+          </a:p>
+          <a:p>
+            <a:endParaRPr lang="en-US" dirty="0"/>
+          </a:p>
+        </p:txBody>
+      </p:sp>
+      <p:sp>
+        <p:nvSpPr>
+          <p:cNvPr id="6" name="Title 4">
+            <a:extLst>
+              <a:ext uri="{FF2B5EF4-FFF2-40B4-BE49-F238E27FC236}">
+                <a16:creationId xmlns:a16="http://schemas.microsoft.com/office/drawing/2014/main" id="{DDB093FB-AA2A-182D-6672-E334FC58E494}"/>
+              </a:ext>
+            </a:extLst>
+          </p:cNvPr>
+          <p:cNvSpPr txBox="1">
+            <a:spLocks/>
+          </p:cNvSpPr>
+          <p:nvPr/>
+        </p:nvSpPr>
+        <p:spPr>
+          <a:xfrm>
+            <a:off x="581348" y="950391"/>
+            <a:ext cx="11184423" cy="555813"/>
+          </a:xfrm>
+          <a:prstGeom prst="rect">
+            <a:avLst/>
+          </a:prstGeom>
+        </p:spPr>
+        <p:txBody>
+          <a:bodyPr vert="horz" lIns="0" tIns="0" rIns="0" bIns="0" rtlCol="0" anchor="t">
+            <a:noAutofit/>
           </a:bodyPr>
-          <a:lstStyle/>
-          <a:p>
-            <a:r>
-              <a:rPr lang="en-US" dirty="0"/>
-              <a:t>What is an LLM?</a:t>
-            </a:r>
-          </a:p>
-          <a:p>
-            <a:r>
-              <a:rPr lang="en-US" dirty="0"/>
-              <a:t>Neural networks trained on large text corpora</a:t>
-            </a:r>
-          </a:p>
-          <a:p>
-            <a:r>
-              <a:rPr lang="en-US" dirty="0"/>
-              <a:t>Based on transformer architecture</a:t>
-            </a:r>
-          </a:p>
-          <a:p>
-            <a:r>
-              <a:rPr lang="en-US" dirty="0"/>
-              <a:t>Learn probability distributions over language</a:t>
-            </a:r>
-          </a:p>
-          <a:p>
-            <a:r>
-              <a:rPr lang="en-US" dirty="0"/>
-              <a:t>Non-deterministic outputs (same input ≠ same output)"</a:t>
-            </a:r>
-          </a:p>
-          <a:p>
+          <a:lstStyle>
+            <a:lvl1pPr algn="l" defTabSz="914400" rtl="0" eaLnBrk="1" latinLnBrk="0" hangingPunct="1">
+              <a:lnSpc>
+                <a:spcPct val="90000"/>
+              </a:lnSpc>
+              <a:spcBef>
+                <a:spcPct val="0"/>
+              </a:spcBef>
+              <a:buNone/>
+              <a:defRPr sz="3200" b="1" kern="1200" spc="-50" baseline="0">
+                <a:solidFill>
+                  <a:schemeClr val="tx1"/>
+                </a:solidFill>
+                <a:latin typeface="+mj-lt"/>
+                <a:ea typeface="+mj-ea"/>
+                <a:cs typeface="+mj-cs"/>
+              </a:defRPr>
+            </a:lvl1pPr>
+          </a:lstStyle>
+          <a:p>
+            <a:r>
+              <a:rPr lang="en-US" dirty="0"/>
+              <a:t>LLM Basic</a:t>
+            </a:r>
+          </a:p>
+        </p:txBody>
+      </p:sp>
+      <p:sp>
+        <p:nvSpPr>
+          <p:cNvPr id="7" name="Text Placeholder 5">
+            <a:extLst>
+              <a:ext uri="{FF2B5EF4-FFF2-40B4-BE49-F238E27FC236}">
+                <a16:creationId xmlns:a16="http://schemas.microsoft.com/office/drawing/2014/main" id="{87471FD3-21E3-B9DF-C87C-DE246FB698FC}"/>
+              </a:ext>
+            </a:extLst>
+          </p:cNvPr>
+          <p:cNvSpPr txBox="1">
+            <a:spLocks/>
+          </p:cNvSpPr>
+          <p:nvPr/>
+        </p:nvSpPr>
+        <p:spPr>
+          <a:xfrm>
+            <a:off x="512064" y="421340"/>
+            <a:ext cx="11184422" cy="295276"/>
+          </a:xfrm>
+          <a:prstGeom prst="rect">
+            <a:avLst/>
+          </a:prstGeom>
+        </p:spPr>
+        <p:txBody>
+          <a:bodyPr lIns="0" tIns="0" rIns="0" bIns="0" anchor="b"/>
+          <a:lstStyle>
+            <a:defPPr>
+              <a:defRPr lang="en-US"/>
+            </a:defPPr>
+            <a:lvl1pPr marL="0" algn="r" defTabSz="914400" rtl="0" eaLnBrk="1" latinLnBrk="0" hangingPunct="1">
+              <a:defRPr lang="en-US" sz="1000" kern="1200" smtClean="0">
+                <a:solidFill>
+                  <a:schemeClr val="bg1">
+                    <a:lumMod val="75000"/>
+                  </a:schemeClr>
+                </a:solidFill>
+                <a:latin typeface="+mn-lt"/>
+                <a:ea typeface="+mn-ea"/>
+                <a:cs typeface="Arial" panose="020B0604020202020204" pitchFamily="34" charset="0"/>
+              </a:defRPr>
+            </a:lvl1pPr>
+            <a:lvl2pPr marL="457200" algn="l" defTabSz="914400" rtl="0" eaLnBrk="1" latinLnBrk="0" hangingPunct="1">
+              <a:defRPr sz="1800" kern="1200">
+                <a:solidFill>
+                  <a:schemeClr val="tx1"/>
+                </a:solidFill>
+                <a:latin typeface="+mn-lt"/>
+                <a:ea typeface="+mn-ea"/>
+                <a:cs typeface="+mn-cs"/>
+              </a:defRPr>
+            </a:lvl2pPr>
+            <a:lvl3pPr marL="914400" algn="l" defTabSz="914400" rtl="0" eaLnBrk="1" latinLnBrk="0" hangingPunct="1">
+              <a:defRPr sz="1800" kern="1200">
+                <a:solidFill>
+                  <a:schemeClr val="tx1"/>
+                </a:solidFill>
+                <a:latin typeface="+mn-lt"/>
+                <a:ea typeface="+mn-ea"/>
+                <a:cs typeface="+mn-cs"/>
+              </a:defRPr>
+            </a:lvl3pPr>
+            <a:lvl4pPr marL="1371600" algn="l" defTabSz="914400" rtl="0" eaLnBrk="1" latinLnBrk="0" hangingPunct="1">
+              <a:defRPr sz="1800" kern="1200">
+                <a:solidFill>
+                  <a:schemeClr val="tx1"/>
+                </a:solidFill>
+                <a:latin typeface="+mn-lt"/>
+                <a:ea typeface="+mn-ea"/>
+                <a:cs typeface="+mn-cs"/>
+              </a:defRPr>
+            </a:lvl4pPr>
+            <a:lvl5pPr marL="1828800" algn="l" defTabSz="914400" rtl="0" eaLnBrk="1" latinLnBrk="0" hangingPunct="1">
+              <a:defRPr sz="1800" kern="1200">
+                <a:solidFill>
+                  <a:schemeClr val="tx1"/>
+                </a:solidFill>
+                <a:latin typeface="+mn-lt"/>
+                <a:ea typeface="+mn-ea"/>
+                <a:cs typeface="+mn-cs"/>
+              </a:defRPr>
+            </a:lvl5pPr>
+            <a:lvl6pPr marL="2286000" algn="l" defTabSz="914400" rtl="0" eaLnBrk="1" latinLnBrk="0" hangingPunct="1">
+              <a:defRPr sz="1800" kern="1200">
+                <a:solidFill>
+                  <a:schemeClr val="tx1"/>
+                </a:solidFill>
+                <a:latin typeface="+mn-lt"/>
+                <a:ea typeface="+mn-ea"/>
+                <a:cs typeface="+mn-cs"/>
+              </a:defRPr>
+            </a:lvl6pPr>
+            <a:lvl7pPr marL="2743200" algn="l" defTabSz="914400" rtl="0" eaLnBrk="1" latinLnBrk="0" hangingPunct="1">
+              <a:defRPr sz="1800" kern="1200">
+                <a:solidFill>
+                  <a:schemeClr val="tx1"/>
+                </a:solidFill>
+                <a:latin typeface="+mn-lt"/>
+                <a:ea typeface="+mn-ea"/>
+                <a:cs typeface="+mn-cs"/>
+              </a:defRPr>
+            </a:lvl7pPr>
+            <a:lvl8pPr marL="3200400" algn="l" defTabSz="914400" rtl="0" eaLnBrk="1" latinLnBrk="0" hangingPunct="1">
+              <a:defRPr sz="1800" kern="1200">
+                <a:solidFill>
+                  <a:schemeClr val="tx1"/>
+                </a:solidFill>
+                <a:latin typeface="+mn-lt"/>
+                <a:ea typeface="+mn-ea"/>
+                <a:cs typeface="+mn-cs"/>
+              </a:defRPr>
+            </a:lvl8pPr>
+            <a:lvl9pPr marL="3657600" algn="l" defTabSz="914400" rtl="0" eaLnBrk="1" latinLnBrk="0" hangingPunct="1">
+              <a:defRPr sz="1800" kern="1200">
+                <a:solidFill>
+                  <a:schemeClr val="tx1"/>
+                </a:solidFill>
+                <a:latin typeface="+mn-lt"/>
+                <a:ea typeface="+mn-ea"/>
+                <a:cs typeface="+mn-cs"/>
+              </a:defRPr>
+            </a:lvl9pPr>
+          </a:lstStyle>
+          <a:p>
+            <a:r>
+              <a:rPr lang="en-US"/>
+              <a:t>Introduction</a:t>
+            </a:r>
             <a:endParaRPr lang="en-US" dirty="0"/>
           </a:p>
         </p:txBody>
       </p:sp>
+      <p:sp>
+        <p:nvSpPr>
+          <p:cNvPr id="8" name="Text Placeholder 5">
+            <a:extLst>
+              <a:ext uri="{FF2B5EF4-FFF2-40B4-BE49-F238E27FC236}">
+                <a16:creationId xmlns:a16="http://schemas.microsoft.com/office/drawing/2014/main" id="{B445DEBB-54EF-198E-EA64-7EB0A4977B03}"/>
+              </a:ext>
+            </a:extLst>
+          </p:cNvPr>
+          <p:cNvSpPr txBox="1">
+            <a:spLocks/>
+          </p:cNvSpPr>
+          <p:nvPr/>
+        </p:nvSpPr>
+        <p:spPr>
+          <a:xfrm>
+            <a:off x="664464" y="573740"/>
+            <a:ext cx="11184422" cy="295276"/>
+          </a:xfrm>
+          <a:prstGeom prst="rect">
+            <a:avLst/>
+          </a:prstGeom>
+        </p:spPr>
+        <p:txBody>
+          <a:bodyPr lIns="0" tIns="0" rIns="0" bIns="0" anchor="b"/>
+          <a:lstStyle>
+            <a:defPPr>
+              <a:defRPr lang="en-US"/>
+            </a:defPPr>
+            <a:lvl1pPr marL="0" algn="r" defTabSz="914400" rtl="0" eaLnBrk="1" latinLnBrk="0" hangingPunct="1">
+              <a:defRPr lang="en-US" sz="1000" kern="1200" smtClean="0">
+                <a:solidFill>
+                  <a:schemeClr val="bg1">
+                    <a:lumMod val="75000"/>
+                  </a:schemeClr>
+                </a:solidFill>
+                <a:latin typeface="+mn-lt"/>
+                <a:ea typeface="+mn-ea"/>
+                <a:cs typeface="Arial" panose="020B0604020202020204" pitchFamily="34" charset="0"/>
+              </a:defRPr>
+            </a:lvl1pPr>
+            <a:lvl2pPr marL="457200" algn="l" defTabSz="914400" rtl="0" eaLnBrk="1" latinLnBrk="0" hangingPunct="1">
+              <a:defRPr sz="1800" kern="1200">
+                <a:solidFill>
+                  <a:schemeClr val="tx1"/>
+                </a:solidFill>
+                <a:latin typeface="+mn-lt"/>
+                <a:ea typeface="+mn-ea"/>
+                <a:cs typeface="+mn-cs"/>
+              </a:defRPr>
+            </a:lvl2pPr>
+            <a:lvl3pPr marL="914400" algn="l" defTabSz="914400" rtl="0" eaLnBrk="1" latinLnBrk="0" hangingPunct="1">
+              <a:defRPr sz="1800" kern="1200">
+                <a:solidFill>
+                  <a:schemeClr val="tx1"/>
+                </a:solidFill>
+                <a:latin typeface="+mn-lt"/>
+                <a:ea typeface="+mn-ea"/>
+                <a:cs typeface="+mn-cs"/>
+              </a:defRPr>
+            </a:lvl3pPr>
+            <a:lvl4pPr marL="1371600" algn="l" defTabSz="914400" rtl="0" eaLnBrk="1" latinLnBrk="0" hangingPunct="1">
+              <a:defRPr sz="1800" kern="1200">
+                <a:solidFill>
+                  <a:schemeClr val="tx1"/>
+                </a:solidFill>
+                <a:latin typeface="+mn-lt"/>
+                <a:ea typeface="+mn-ea"/>
+                <a:cs typeface="+mn-cs"/>
+              </a:defRPr>
+            </a:lvl4pPr>
+            <a:lvl5pPr marL="1828800" algn="l" defTabSz="914400" rtl="0" eaLnBrk="1" latinLnBrk="0" hangingPunct="1">
+              <a:defRPr sz="1800" kern="1200">
+                <a:solidFill>
+                  <a:schemeClr val="tx1"/>
+                </a:solidFill>
+                <a:latin typeface="+mn-lt"/>
+                <a:ea typeface="+mn-ea"/>
+                <a:cs typeface="+mn-cs"/>
+              </a:defRPr>
+            </a:lvl5pPr>
+            <a:lvl6pPr marL="2286000" algn="l" defTabSz="914400" rtl="0" eaLnBrk="1" latinLnBrk="0" hangingPunct="1">
+              <a:defRPr sz="1800" kern="1200">
+                <a:solidFill>
+                  <a:schemeClr val="tx1"/>
+                </a:solidFill>
+                <a:latin typeface="+mn-lt"/>
+                <a:ea typeface="+mn-ea"/>
+                <a:cs typeface="+mn-cs"/>
+              </a:defRPr>
+            </a:lvl6pPr>
+            <a:lvl7pPr marL="2743200" algn="l" defTabSz="914400" rtl="0" eaLnBrk="1" latinLnBrk="0" hangingPunct="1">
+              <a:defRPr sz="1800" kern="1200">
+                <a:solidFill>
+                  <a:schemeClr val="tx1"/>
+                </a:solidFill>
+                <a:latin typeface="+mn-lt"/>
+                <a:ea typeface="+mn-ea"/>
+                <a:cs typeface="+mn-cs"/>
+              </a:defRPr>
+            </a:lvl7pPr>
+            <a:lvl8pPr marL="3200400" algn="l" defTabSz="914400" rtl="0" eaLnBrk="1" latinLnBrk="0" hangingPunct="1">
+              <a:defRPr sz="1800" kern="1200">
+                <a:solidFill>
+                  <a:schemeClr val="tx1"/>
+                </a:solidFill>
+                <a:latin typeface="+mn-lt"/>
+                <a:ea typeface="+mn-ea"/>
+                <a:cs typeface="+mn-cs"/>
+              </a:defRPr>
+            </a:lvl8pPr>
+            <a:lvl9pPr marL="3657600" algn="l" defTabSz="914400" rtl="0" eaLnBrk="1" latinLnBrk="0" hangingPunct="1">
+              <a:defRPr sz="1800" kern="1200">
+                <a:solidFill>
+                  <a:schemeClr val="tx1"/>
+                </a:solidFill>
+                <a:latin typeface="+mn-lt"/>
+                <a:ea typeface="+mn-ea"/>
+                <a:cs typeface="+mn-cs"/>
+              </a:defRPr>
+            </a:lvl9pPr>
+          </a:lstStyle>
+          <a:p>
+            <a:r>
+              <a:rPr lang="en-US"/>
+              <a:t>Introduction</a:t>
+            </a:r>
+            <a:endParaRPr lang="en-US" dirty="0"/>
+          </a:p>
+        </p:txBody>
+      </p:sp>
+      <p:pic>
+        <p:nvPicPr>
+          <p:cNvPr id="9" name="Picture 8">
+            <a:extLst>
+              <a:ext uri="{FF2B5EF4-FFF2-40B4-BE49-F238E27FC236}">
+                <a16:creationId xmlns:a16="http://schemas.microsoft.com/office/drawing/2014/main" id="{2D3C6785-637D-33A4-D293-D3FAD5E9A342}"/>
+              </a:ext>
+            </a:extLst>
+          </p:cNvPr>
+          <p:cNvPicPr>
+            <a:picLocks noChangeAspect="1"/>
+          </p:cNvPicPr>
+          <p:nvPr/>
+        </p:nvPicPr>
+        <p:blipFill>
+          <a:blip r:embed="rId3"/>
+          <a:stretch>
+            <a:fillRect/>
+          </a:stretch>
+        </p:blipFill>
+        <p:spPr>
+          <a:xfrm>
+            <a:off x="426228" y="275920"/>
+            <a:ext cx="11339543" cy="536494"/>
+          </a:xfrm>
+          <a:prstGeom prst="rect">
+            <a:avLst/>
+          </a:prstGeom>
+        </p:spPr>
+      </p:pic>
     </p:spTree>
   </p:cSld>
   <p:clrMapOvr>
@@ -39689,7 +37962,7 @@
           <a:bodyPr/>
           <a:lstStyle/>
           <a:p>
-            <a:endParaRPr lang="en-US"/>
+            <a:endParaRPr lang="en-US" dirty="0"/>
           </a:p>
         </p:txBody>
       </p:sp>
@@ -39714,7 +37987,10 @@
           <a:bodyPr/>
           <a:lstStyle/>
           <a:p>
-            <a:endParaRPr lang="en-US"/>
+            <a:r>
+              <a:rPr lang="en-US" dirty="0"/>
+              <a:t>Prior Research</a:t>
+            </a:r>
           </a:p>
         </p:txBody>
       </p:sp>
@@ -39741,7 +38017,7 @@
           <a:p>
             <a:r>
               <a:rPr lang="en-US" dirty="0"/>
-              <a:t>Introduction – Prior Research</a:t>
+              <a:t>Introduction</a:t>
             </a:r>
           </a:p>
         </p:txBody>
@@ -39778,7 +38054,7 @@
             <a:r>
               <a:rPr lang="en-US" altLang="en-US" dirty="0">
                 <a:solidFill>
-                  <a:schemeClr val="tx1"/>
+                  <a:schemeClr val="tx2"/>
                 </a:solidFill>
                 <a:latin typeface="Arial" panose="020B0604020202020204" pitchFamily="34" charset="0"/>
               </a:rPr>
@@ -39799,7 +38075,7 @@
             <a:r>
               <a:rPr lang="en-US" altLang="en-US" dirty="0">
                 <a:solidFill>
-                  <a:schemeClr val="tx1"/>
+                  <a:schemeClr val="tx2"/>
                 </a:solidFill>
                 <a:latin typeface="Arial" panose="020B0604020202020204" pitchFamily="34" charset="0"/>
               </a:rPr>
@@ -39808,7 +38084,7 @@
             <a:br>
               <a:rPr lang="en-US" altLang="en-US" dirty="0">
                 <a:solidFill>
-                  <a:schemeClr val="tx1"/>
+                  <a:schemeClr val="tx2"/>
                 </a:solidFill>
                 <a:latin typeface="Arial" panose="020B0604020202020204" pitchFamily="34" charset="0"/>
               </a:rPr>
@@ -39816,7 +38092,7 @@
             <a:r>
               <a:rPr lang="en-US" altLang="en-US" i="1" dirty="0">
                 <a:solidFill>
-                  <a:schemeClr val="tx1"/>
+                  <a:schemeClr val="tx2"/>
                 </a:solidFill>
                 <a:latin typeface="Arial" panose="020B0604020202020204" pitchFamily="34" charset="0"/>
               </a:rPr>
@@ -39825,7 +38101,7 @@
             <a:r>
               <a:rPr lang="en-US" altLang="en-US" dirty="0">
                 <a:solidFill>
-                  <a:schemeClr val="tx1"/>
+                  <a:schemeClr val="tx2"/>
                 </a:solidFill>
                 <a:latin typeface="Arial" panose="020B0604020202020204" pitchFamily="34" charset="0"/>
               </a:rPr>
@@ -40023,14 +38299,19 @@
             <p:ph type="title"/>
           </p:nvPr>
         </p:nvSpPr>
-        <p:spPr/>
+        <p:spPr>
+          <a:xfrm>
+            <a:off x="495513" y="1243583"/>
+            <a:ext cx="11184423" cy="914400"/>
+          </a:xfrm>
+        </p:spPr>
         <p:txBody>
           <a:bodyPr/>
           <a:lstStyle/>
           <a:p>
             <a:r>
               <a:rPr lang="en-US" dirty="0"/>
-              <a:t>Introduction – Gap in Knowledge</a:t>
+              <a:t>Gap in Knowledge</a:t>
             </a:r>
           </a:p>
         </p:txBody>
@@ -40102,6 +38383,36 @@
           </a:p>
         </p:txBody>
       </p:sp>
+      <p:pic>
+        <p:nvPicPr>
+          <p:cNvPr id="10" name="Picture 9">
+            <a:extLst>
+              <a:ext uri="{FF2B5EF4-FFF2-40B4-BE49-F238E27FC236}">
+                <a16:creationId xmlns:a16="http://schemas.microsoft.com/office/drawing/2014/main" id="{3D4C2ADC-A864-6B12-952E-037CFD91F4AD}"/>
+              </a:ext>
+            </a:extLst>
+          </p:cNvPr>
+          <p:cNvPicPr>
+            <a:picLocks noChangeAspect="1"/>
+          </p:cNvPicPr>
+          <p:nvPr/>
+        </p:nvPicPr>
+        <p:blipFill>
+          <a:blip r:embed="rId2"/>
+          <a:stretch>
+            <a:fillRect/>
+          </a:stretch>
+        </p:blipFill>
+        <p:spPr>
+          <a:xfrm>
+            <a:off x="340393" y="478489"/>
+            <a:ext cx="11339543" cy="536494"/>
+          </a:xfrm>
+          <a:prstGeom prst="rect">
+            <a:avLst/>
+          </a:prstGeom>
+        </p:spPr>
+      </p:pic>
     </p:spTree>
     <p:extLst>
       <p:ext uri="{BB962C8B-B14F-4D97-AF65-F5344CB8AC3E}">

--- a/conferences/cornell_spring_wip/llm_summary_validation_presentation.pptx
+++ b/conferences/cornell_spring_wip/llm_summary_validation_presentation.pptx
@@ -24,11 +24,11 @@
     <p:sldId id="261" r:id="rId15"/>
     <p:sldId id="300" r:id="rId16"/>
     <p:sldId id="301" r:id="rId17"/>
-    <p:sldId id="305" r:id="rId18"/>
-    <p:sldId id="11092" r:id="rId19"/>
-    <p:sldId id="11071" r:id="rId20"/>
-    <p:sldId id="11072" r:id="rId21"/>
-    <p:sldId id="11073" r:id="rId22"/>
+    <p:sldId id="11092" r:id="rId18"/>
+    <p:sldId id="11071" r:id="rId19"/>
+    <p:sldId id="11072" r:id="rId20"/>
+    <p:sldId id="11073" r:id="rId21"/>
+    <p:sldId id="11093" r:id="rId22"/>
   </p:sldIdLst>
   <p:sldSz cx="12192000" cy="6858000"/>
   <p:notesSz cx="6858000" cy="9144000"/>
@@ -149,7 +149,7 @@
 <file path=ppt/revisionInfo.xml><?xml version="1.0" encoding="utf-8"?>
 <p1510:revInfo xmlns:a="http://schemas.openxmlformats.org/drawingml/2006/main" xmlns:r="http://schemas.openxmlformats.org/officeDocument/2006/relationships" xmlns:p1510="http://schemas.microsoft.com/office/powerpoint/2015/10/main">
   <p1510:revLst>
-    <p1510:client id="{DF25E5BF-D19E-463C-9870-DB282E9B171D}" v="13" dt="2026-05-03T17:56:31.459"/>
+    <p1510:client id="{DF25E5BF-D19E-463C-9870-DB282E9B171D}" v="6" dt="2026-05-09T22:50:13.288"/>
   </p1510:revLst>
 </p1510:revInfo>
 </file>
@@ -158,8 +158,8 @@
 <pc:chgInfo xmlns:a="http://schemas.openxmlformats.org/drawingml/2006/main" xmlns:r="http://schemas.openxmlformats.org/officeDocument/2006/relationships" xmlns:ac="http://schemas.microsoft.com/office/drawing/2013/main/command" xmlns:pc="http://schemas.microsoft.com/office/powerpoint/2013/main/command">
   <pc:docChgLst>
     <pc:chgData name="James, Robert" userId="2289ddc5-885d-4588-a312-b6745df56974" providerId="ADAL" clId="{DF25E5BF-D19E-463C-9870-DB282E9B171D}"/>
-    <pc:docChg chg="custSel addSld delSld modSld">
-      <pc:chgData name="James, Robert" userId="2289ddc5-885d-4588-a312-b6745df56974" providerId="ADAL" clId="{DF25E5BF-D19E-463C-9870-DB282E9B171D}" dt="2026-05-03T17:58:53.895" v="240" actId="20577"/>
+    <pc:docChg chg="undo custSel addSld delSld modSld">
+      <pc:chgData name="James, Robert" userId="2289ddc5-885d-4588-a312-b6745df56974" providerId="ADAL" clId="{DF25E5BF-D19E-463C-9870-DB282E9B171D}" dt="2026-05-09T22:54:59.504" v="5068" actId="20577"/>
       <pc:docMkLst>
         <pc:docMk/>
       </pc:docMkLst>
@@ -176,28 +176,12 @@
           <pc:docMk/>
           <pc:sldMk cId="0" sldId="278"/>
         </pc:sldMkLst>
-        <pc:spChg chg="del mod">
-          <ac:chgData name="James, Robert" userId="2289ddc5-885d-4588-a312-b6745df56974" providerId="ADAL" clId="{DF25E5BF-D19E-463C-9870-DB282E9B171D}" dt="2026-05-03T17:54:16.464" v="147" actId="478"/>
-          <ac:spMkLst>
-            <pc:docMk/>
-            <pc:sldMk cId="0" sldId="278"/>
-            <ac:spMk id="2" creationId="{00000000-0000-0000-0000-000000000000}"/>
-          </ac:spMkLst>
-        </pc:spChg>
         <pc:spChg chg="mod">
           <ac:chgData name="James, Robert" userId="2289ddc5-885d-4588-a312-b6745df56974" providerId="ADAL" clId="{DF25E5BF-D19E-463C-9870-DB282E9B171D}" dt="2026-05-03T17:52:49.787" v="111" actId="20577"/>
           <ac:spMkLst>
             <pc:docMk/>
             <pc:sldMk cId="0" sldId="278"/>
             <ac:spMk id="3" creationId="{00000000-0000-0000-0000-000000000000}"/>
-          </ac:spMkLst>
-        </pc:spChg>
-        <pc:spChg chg="add mod">
-          <ac:chgData name="James, Robert" userId="2289ddc5-885d-4588-a312-b6745df56974" providerId="ADAL" clId="{DF25E5BF-D19E-463C-9870-DB282E9B171D}" dt="2026-05-03T17:53:52.860" v="141"/>
-          <ac:spMkLst>
-            <pc:docMk/>
-            <pc:sldMk cId="0" sldId="278"/>
-            <ac:spMk id="4" creationId="{A04CCB85-EEAC-2BF1-A0B7-0883B9E3E166}"/>
           </ac:spMkLst>
         </pc:spChg>
         <pc:spChg chg="add mod">
@@ -224,22 +208,6 @@
             <ac:spMk id="8" creationId="{B445DEBB-54EF-198E-EA64-7EB0A4977B03}"/>
           </ac:spMkLst>
         </pc:spChg>
-        <pc:spChg chg="add del mod">
-          <ac:chgData name="James, Robert" userId="2289ddc5-885d-4588-a312-b6745df56974" providerId="ADAL" clId="{DF25E5BF-D19E-463C-9870-DB282E9B171D}" dt="2026-05-03T17:54:19.759" v="148" actId="478"/>
-          <ac:spMkLst>
-            <pc:docMk/>
-            <pc:sldMk cId="0" sldId="278"/>
-            <ac:spMk id="11" creationId="{8607BFA2-7645-41FB-7C13-3613781BA912}"/>
-          </ac:spMkLst>
-        </pc:spChg>
-        <pc:picChg chg="add">
-          <ac:chgData name="James, Robert" userId="2289ddc5-885d-4588-a312-b6745df56974" providerId="ADAL" clId="{DF25E5BF-D19E-463C-9870-DB282E9B171D}" dt="2026-05-03T17:53:56.245" v="142"/>
-          <ac:picMkLst>
-            <pc:docMk/>
-            <pc:sldMk cId="0" sldId="278"/>
-            <ac:picMk id="5" creationId="{388A2282-5CC5-7A2C-368A-77135DD5A128}"/>
-          </ac:picMkLst>
-        </pc:picChg>
         <pc:picChg chg="add mod">
           <ac:chgData name="James, Robert" userId="2289ddc5-885d-4588-a312-b6745df56974" providerId="ADAL" clId="{DF25E5BF-D19E-463C-9870-DB282E9B171D}" dt="2026-05-03T17:54:24.159" v="149" actId="1076"/>
           <ac:picMkLst>
@@ -248,6 +216,44 @@
             <ac:picMk id="9" creationId="{2D3C6785-637D-33A4-D293-D3FAD5E9A342}"/>
           </ac:picMkLst>
         </pc:picChg>
+      </pc:sldChg>
+      <pc:sldChg chg="modSp mod">
+        <pc:chgData name="James, Robert" userId="2289ddc5-885d-4588-a312-b6745df56974" providerId="ADAL" clId="{DF25E5BF-D19E-463C-9870-DB282E9B171D}" dt="2026-05-09T22:34:56.245" v="3744" actId="20577"/>
+        <pc:sldMkLst>
+          <pc:docMk/>
+          <pc:sldMk cId="2059648232" sldId="292"/>
+        </pc:sldMkLst>
+        <pc:spChg chg="mod">
+          <ac:chgData name="James, Robert" userId="2289ddc5-885d-4588-a312-b6745df56974" providerId="ADAL" clId="{DF25E5BF-D19E-463C-9870-DB282E9B171D}" dt="2026-05-09T22:31:20.236" v="3586" actId="20577"/>
+          <ac:spMkLst>
+            <pc:docMk/>
+            <pc:sldMk cId="2059648232" sldId="292"/>
+            <ac:spMk id="2" creationId="{76060148-321D-551C-D201-290537E99547}"/>
+          </ac:spMkLst>
+        </pc:spChg>
+        <pc:spChg chg="mod">
+          <ac:chgData name="James, Robert" userId="2289ddc5-885d-4588-a312-b6745df56974" providerId="ADAL" clId="{DF25E5BF-D19E-463C-9870-DB282E9B171D}" dt="2026-05-09T22:34:56.245" v="3744" actId="20577"/>
+          <ac:spMkLst>
+            <pc:docMk/>
+            <pc:sldMk cId="2059648232" sldId="292"/>
+            <ac:spMk id="3" creationId="{B9B05034-1DBD-5445-BC09-114907A20FD7}"/>
+          </ac:spMkLst>
+        </pc:spChg>
+      </pc:sldChg>
+      <pc:sldChg chg="modSp mod">
+        <pc:chgData name="James, Robert" userId="2289ddc5-885d-4588-a312-b6745df56974" providerId="ADAL" clId="{DF25E5BF-D19E-463C-9870-DB282E9B171D}" dt="2026-05-09T22:35:34.578" v="3745" actId="20577"/>
+        <pc:sldMkLst>
+          <pc:docMk/>
+          <pc:sldMk cId="3816739222" sldId="294"/>
+        </pc:sldMkLst>
+        <pc:spChg chg="mod">
+          <ac:chgData name="James, Robert" userId="2289ddc5-885d-4588-a312-b6745df56974" providerId="ADAL" clId="{DF25E5BF-D19E-463C-9870-DB282E9B171D}" dt="2026-05-09T22:35:34.578" v="3745" actId="20577"/>
+          <ac:spMkLst>
+            <pc:docMk/>
+            <pc:sldMk cId="3816739222" sldId="294"/>
+            <ac:spMk id="2" creationId="{49A173D7-BC2C-3D3A-B1F2-CC655233A570}"/>
+          </ac:spMkLst>
+        </pc:spChg>
       </pc:sldChg>
       <pc:sldChg chg="modSp mod">
         <pc:chgData name="James, Robert" userId="2289ddc5-885d-4588-a312-b6745df56974" providerId="ADAL" clId="{DF25E5BF-D19E-463C-9870-DB282E9B171D}" dt="2026-05-03T17:57:29.711" v="218" actId="20577"/>
@@ -265,13 +271,13 @@
         </pc:spChg>
       </pc:sldChg>
       <pc:sldChg chg="modSp mod">
-        <pc:chgData name="James, Robert" userId="2289ddc5-885d-4588-a312-b6745df56974" providerId="ADAL" clId="{DF25E5BF-D19E-463C-9870-DB282E9B171D}" dt="2026-05-03T17:57:56.464" v="219" actId="20577"/>
+        <pc:chgData name="James, Robert" userId="2289ddc5-885d-4588-a312-b6745df56974" providerId="ADAL" clId="{DF25E5BF-D19E-463C-9870-DB282E9B171D}" dt="2026-05-09T22:42:56.703" v="4217" actId="20577"/>
         <pc:sldMkLst>
           <pc:docMk/>
           <pc:sldMk cId="1052225801" sldId="301"/>
         </pc:sldMkLst>
         <pc:spChg chg="mod">
-          <ac:chgData name="James, Robert" userId="2289ddc5-885d-4588-a312-b6745df56974" providerId="ADAL" clId="{DF25E5BF-D19E-463C-9870-DB282E9B171D}" dt="2026-05-03T17:57:56.464" v="219" actId="20577"/>
+          <ac:chgData name="James, Robert" userId="2289ddc5-885d-4588-a312-b6745df56974" providerId="ADAL" clId="{DF25E5BF-D19E-463C-9870-DB282E9B171D}" dt="2026-05-09T22:42:56.703" v="4217" actId="20577"/>
           <ac:spMkLst>
             <pc:docMk/>
             <pc:sldMk cId="1052225801" sldId="301"/>
@@ -279,44 +285,95 @@
           </ac:spMkLst>
         </pc:spChg>
       </pc:sldChg>
+      <pc:sldChg chg="del">
+        <pc:chgData name="James, Robert" userId="2289ddc5-885d-4588-a312-b6745df56974" providerId="ADAL" clId="{DF25E5BF-D19E-463C-9870-DB282E9B171D}" dt="2026-05-09T22:43:08.440" v="4218" actId="47"/>
+        <pc:sldMkLst>
+          <pc:docMk/>
+          <pc:sldMk cId="570611450" sldId="305"/>
+        </pc:sldMkLst>
+      </pc:sldChg>
+      <pc:sldChg chg="modSp mod">
+        <pc:chgData name="James, Robert" userId="2289ddc5-885d-4588-a312-b6745df56974" providerId="ADAL" clId="{DF25E5BF-D19E-463C-9870-DB282E9B171D}" dt="2026-05-09T22:54:59.504" v="5068" actId="20577"/>
+        <pc:sldMkLst>
+          <pc:docMk/>
+          <pc:sldMk cId="2917804357" sldId="306"/>
+        </pc:sldMkLst>
+        <pc:spChg chg="mod">
+          <ac:chgData name="James, Robert" userId="2289ddc5-885d-4588-a312-b6745df56974" providerId="ADAL" clId="{DF25E5BF-D19E-463C-9870-DB282E9B171D}" dt="2026-05-09T22:54:59.504" v="5068" actId="20577"/>
+          <ac:spMkLst>
+            <pc:docMk/>
+            <pc:sldMk cId="2917804357" sldId="306"/>
+            <ac:spMk id="2" creationId="{5D97C472-F333-89E6-F0CF-9CF57DFFC430}"/>
+          </ac:spMkLst>
+        </pc:spChg>
+      </pc:sldChg>
+      <pc:sldChg chg="modSp mod">
+        <pc:chgData name="James, Robert" userId="2289ddc5-885d-4588-a312-b6745df56974" providerId="ADAL" clId="{DF25E5BF-D19E-463C-9870-DB282E9B171D}" dt="2026-05-09T22:46:02.286" v="4408" actId="20577"/>
+        <pc:sldMkLst>
+          <pc:docMk/>
+          <pc:sldMk cId="4038599619" sldId="11071"/>
+        </pc:sldMkLst>
+        <pc:spChg chg="mod">
+          <ac:chgData name="James, Robert" userId="2289ddc5-885d-4588-a312-b6745df56974" providerId="ADAL" clId="{DF25E5BF-D19E-463C-9870-DB282E9B171D}" dt="2026-05-09T22:46:02.286" v="4408" actId="20577"/>
+          <ac:spMkLst>
+            <pc:docMk/>
+            <pc:sldMk cId="4038599619" sldId="11071"/>
+            <ac:spMk id="4" creationId="{458CFF1A-308D-90CC-6B46-027BCEDC285D}"/>
+          </ac:spMkLst>
+        </pc:spChg>
+      </pc:sldChg>
+      <pc:sldChg chg="modSp mod">
+        <pc:chgData name="James, Robert" userId="2289ddc5-885d-4588-a312-b6745df56974" providerId="ADAL" clId="{DF25E5BF-D19E-463C-9870-DB282E9B171D}" dt="2026-05-09T22:46:41.431" v="4411" actId="20577"/>
+        <pc:sldMkLst>
+          <pc:docMk/>
+          <pc:sldMk cId="1872415169" sldId="11072"/>
+        </pc:sldMkLst>
+        <pc:spChg chg="mod">
+          <ac:chgData name="James, Robert" userId="2289ddc5-885d-4588-a312-b6745df56974" providerId="ADAL" clId="{DF25E5BF-D19E-463C-9870-DB282E9B171D}" dt="2026-05-09T22:46:41.431" v="4411" actId="20577"/>
+          <ac:spMkLst>
+            <pc:docMk/>
+            <pc:sldMk cId="1872415169" sldId="11072"/>
+            <ac:spMk id="4" creationId="{DFFA3AD3-E044-E044-F818-DC0FFA5F615A}"/>
+          </ac:spMkLst>
+        </pc:spChg>
+      </pc:sldChg>
+      <pc:sldChg chg="modSp mod">
+        <pc:chgData name="James, Robert" userId="2289ddc5-885d-4588-a312-b6745df56974" providerId="ADAL" clId="{DF25E5BF-D19E-463C-9870-DB282E9B171D}" dt="2026-05-09T22:50:19.535" v="4561" actId="20577"/>
+        <pc:sldMkLst>
+          <pc:docMk/>
+          <pc:sldMk cId="2824012289" sldId="11073"/>
+        </pc:sldMkLst>
+        <pc:spChg chg="mod">
+          <ac:chgData name="James, Robert" userId="2289ddc5-885d-4588-a312-b6745df56974" providerId="ADAL" clId="{DF25E5BF-D19E-463C-9870-DB282E9B171D}" dt="2026-05-09T22:50:19.535" v="4561" actId="20577"/>
+          <ac:spMkLst>
+            <pc:docMk/>
+            <pc:sldMk cId="2824012289" sldId="11073"/>
+            <ac:spMk id="4" creationId="{B5F6D740-20E5-AF39-702E-149F388840B2}"/>
+          </ac:spMkLst>
+        </pc:spChg>
+      </pc:sldChg>
       <pc:sldChg chg="addSp delSp modSp mod">
-        <pc:chgData name="James, Robert" userId="2289ddc5-885d-4588-a312-b6745df56974" providerId="ADAL" clId="{DF25E5BF-D19E-463C-9870-DB282E9B171D}" dt="2026-05-03T17:56:37.022" v="193" actId="1076"/>
+        <pc:chgData name="James, Robert" userId="2289ddc5-885d-4588-a312-b6745df56974" providerId="ADAL" clId="{DF25E5BF-D19E-463C-9870-DB282E9B171D}" dt="2026-05-09T22:29:09.730" v="3468" actId="20577"/>
         <pc:sldMkLst>
           <pc:docMk/>
           <pc:sldMk cId="247361968" sldId="11079"/>
         </pc:sldMkLst>
         <pc:spChg chg="mod">
-          <ac:chgData name="James, Robert" userId="2289ddc5-885d-4588-a312-b6745df56974" providerId="ADAL" clId="{DF25E5BF-D19E-463C-9870-DB282E9B171D}" dt="2026-05-03T17:55:38.470" v="184" actId="1076"/>
+          <ac:chgData name="James, Robert" userId="2289ddc5-885d-4588-a312-b6745df56974" providerId="ADAL" clId="{DF25E5BF-D19E-463C-9870-DB282E9B171D}" dt="2026-05-09T22:28:20.153" v="3444" actId="20577"/>
           <ac:spMkLst>
             <pc:docMk/>
             <pc:sldMk cId="247361968" sldId="11079"/>
             <ac:spMk id="5" creationId="{DFCF1373-476F-EF0A-9E2B-6A47BBE67C9A}"/>
           </ac:spMkLst>
         </pc:spChg>
-        <pc:spChg chg="add del mod">
-          <ac:chgData name="James, Robert" userId="2289ddc5-885d-4588-a312-b6745df56974" providerId="ADAL" clId="{DF25E5BF-D19E-463C-9870-DB282E9B171D}" dt="2026-05-03T17:55:46.788" v="189" actId="478"/>
+        <pc:spChg chg="mod">
+          <ac:chgData name="James, Robert" userId="2289ddc5-885d-4588-a312-b6745df56974" providerId="ADAL" clId="{DF25E5BF-D19E-463C-9870-DB282E9B171D}" dt="2026-05-09T22:29:09.730" v="3468" actId="20577"/>
           <ac:spMkLst>
             <pc:docMk/>
             <pc:sldMk cId="247361968" sldId="11079"/>
-            <ac:spMk id="7" creationId="{126CCF09-3FE8-F36C-F14C-603C7603DDB3}"/>
+            <ac:spMk id="6" creationId="{1A20FB51-9C40-6216-A920-6D8A2CA4867F}"/>
           </ac:spMkLst>
         </pc:spChg>
-        <pc:spChg chg="add mod">
-          <ac:chgData name="James, Robert" userId="2289ddc5-885d-4588-a312-b6745df56974" providerId="ADAL" clId="{DF25E5BF-D19E-463C-9870-DB282E9B171D}" dt="2026-05-03T17:55:42.682" v="186"/>
-          <ac:spMkLst>
-            <pc:docMk/>
-            <pc:sldMk cId="247361968" sldId="11079"/>
-            <ac:spMk id="8" creationId="{28ED1F18-2AFC-206B-7288-CDB1750837C8}"/>
-          </ac:spMkLst>
-        </pc:spChg>
-        <pc:picChg chg="add del mod">
-          <ac:chgData name="James, Robert" userId="2289ddc5-885d-4588-a312-b6745df56974" providerId="ADAL" clId="{DF25E5BF-D19E-463C-9870-DB282E9B171D}" dt="2026-05-03T17:56:33.294" v="192" actId="478"/>
-          <ac:picMkLst>
-            <pc:docMk/>
-            <pc:sldMk cId="247361968" sldId="11079"/>
-            <ac:picMk id="9" creationId="{E2071AEE-510C-A6D5-E7C2-8C1E52FD9472}"/>
-          </ac:picMkLst>
-        </pc:picChg>
         <pc:picChg chg="add mod">
           <ac:chgData name="James, Robert" userId="2289ddc5-885d-4588-a312-b6745df56974" providerId="ADAL" clId="{DF25E5BF-D19E-463C-9870-DB282E9B171D}" dt="2026-05-03T17:56:37.022" v="193" actId="1076"/>
           <ac:picMkLst>
@@ -327,7 +384,37 @@
         </pc:picChg>
       </pc:sldChg>
       <pc:sldChg chg="modSp mod">
-        <pc:chgData name="James, Robert" userId="2289ddc5-885d-4588-a312-b6745df56974" providerId="ADAL" clId="{DF25E5BF-D19E-463C-9870-DB282E9B171D}" dt="2026-05-03T17:55:03.797" v="181" actId="207"/>
+        <pc:chgData name="James, Robert" userId="2289ddc5-885d-4588-a312-b6745df56974" providerId="ADAL" clId="{DF25E5BF-D19E-463C-9870-DB282E9B171D}" dt="2026-05-09T22:22:52.112" v="3335" actId="20577"/>
+        <pc:sldMkLst>
+          <pc:docMk/>
+          <pc:sldMk cId="3351717916" sldId="11081"/>
+        </pc:sldMkLst>
+        <pc:spChg chg="mod">
+          <ac:chgData name="James, Robert" userId="2289ddc5-885d-4588-a312-b6745df56974" providerId="ADAL" clId="{DF25E5BF-D19E-463C-9870-DB282E9B171D}" dt="2026-05-09T22:22:52.112" v="3335" actId="20577"/>
+          <ac:spMkLst>
+            <pc:docMk/>
+            <pc:sldMk cId="3351717916" sldId="11081"/>
+            <ac:spMk id="9" creationId="{DE6EB34F-29C5-E6D9-D407-7CF93F51B476}"/>
+          </ac:spMkLst>
+        </pc:spChg>
+      </pc:sldChg>
+      <pc:sldChg chg="modSp mod">
+        <pc:chgData name="James, Robert" userId="2289ddc5-885d-4588-a312-b6745df56974" providerId="ADAL" clId="{DF25E5BF-D19E-463C-9870-DB282E9B171D}" dt="2026-05-09T22:29:30.490" v="3475" actId="20577"/>
+        <pc:sldMkLst>
+          <pc:docMk/>
+          <pc:sldMk cId="765880054" sldId="11085"/>
+        </pc:sldMkLst>
+        <pc:spChg chg="mod">
+          <ac:chgData name="James, Robert" userId="2289ddc5-885d-4588-a312-b6745df56974" providerId="ADAL" clId="{DF25E5BF-D19E-463C-9870-DB282E9B171D}" dt="2026-05-09T22:29:30.490" v="3475" actId="20577"/>
+          <ac:spMkLst>
+            <pc:docMk/>
+            <pc:sldMk cId="765880054" sldId="11085"/>
+            <ac:spMk id="6" creationId="{C9711CFE-C9EA-43FA-48DE-97C0F9516709}"/>
+          </ac:spMkLst>
+        </pc:spChg>
+      </pc:sldChg>
+      <pc:sldChg chg="modSp mod">
+        <pc:chgData name="James, Robert" userId="2289ddc5-885d-4588-a312-b6745df56974" providerId="ADAL" clId="{DF25E5BF-D19E-463C-9870-DB282E9B171D}" dt="2026-05-09T22:27:39.164" v="3414" actId="20577"/>
         <pc:sldMkLst>
           <pc:docMk/>
           <pc:sldMk cId="2017397866" sldId="11089"/>
@@ -349,7 +436,7 @@
           </ac:spMkLst>
         </pc:spChg>
         <pc:spChg chg="mod">
-          <ac:chgData name="James, Robert" userId="2289ddc5-885d-4588-a312-b6745df56974" providerId="ADAL" clId="{DF25E5BF-D19E-463C-9870-DB282E9B171D}" dt="2026-05-03T17:55:03.797" v="181" actId="207"/>
+          <ac:chgData name="James, Robert" userId="2289ddc5-885d-4588-a312-b6745df56974" providerId="ADAL" clId="{DF25E5BF-D19E-463C-9870-DB282E9B171D}" dt="2026-05-09T22:27:39.164" v="3414" actId="20577"/>
           <ac:spMkLst>
             <pc:docMk/>
             <pc:sldMk cId="2017397866" sldId="11089"/>
@@ -389,17 +476,226 @@
         </pc:spChg>
       </pc:sldChg>
       <pc:sldChg chg="modSp new mod">
-        <pc:chgData name="James, Robert" userId="2289ddc5-885d-4588-a312-b6745df56974" providerId="ADAL" clId="{DF25E5BF-D19E-463C-9870-DB282E9B171D}" dt="2026-05-03T17:58:53.895" v="240" actId="20577"/>
+        <pc:chgData name="James, Robert" userId="2289ddc5-885d-4588-a312-b6745df56974" providerId="ADAL" clId="{DF25E5BF-D19E-463C-9870-DB282E9B171D}" dt="2026-05-09T22:54:15.692" v="4976" actId="20577"/>
         <pc:sldMkLst>
           <pc:docMk/>
           <pc:sldMk cId="3717739119" sldId="11092"/>
         </pc:sldMkLst>
         <pc:spChg chg="mod">
-          <ac:chgData name="James, Robert" userId="2289ddc5-885d-4588-a312-b6745df56974" providerId="ADAL" clId="{DF25E5BF-D19E-463C-9870-DB282E9B171D}" dt="2026-05-03T17:58:53.895" v="240" actId="20577"/>
+          <ac:chgData name="James, Robert" userId="2289ddc5-885d-4588-a312-b6745df56974" providerId="ADAL" clId="{DF25E5BF-D19E-463C-9870-DB282E9B171D}" dt="2026-05-09T22:54:15.692" v="4976" actId="20577"/>
           <ac:spMkLst>
             <pc:docMk/>
             <pc:sldMk cId="3717739119" sldId="11092"/>
             <ac:spMk id="2" creationId="{88CE21F8-9390-3DE0-F176-6592E414D43F}"/>
+          </ac:spMkLst>
+        </pc:spChg>
+      </pc:sldChg>
+      <pc:sldChg chg="modSp new mod">
+        <pc:chgData name="James, Robert" userId="2289ddc5-885d-4588-a312-b6745df56974" providerId="ADAL" clId="{DF25E5BF-D19E-463C-9870-DB282E9B171D}" dt="2026-05-09T22:53:54.110" v="4975" actId="20577"/>
+        <pc:sldMkLst>
+          <pc:docMk/>
+          <pc:sldMk cId="1889611801" sldId="11093"/>
+        </pc:sldMkLst>
+        <pc:spChg chg="mod">
+          <ac:chgData name="James, Robert" userId="2289ddc5-885d-4588-a312-b6745df56974" providerId="ADAL" clId="{DF25E5BF-D19E-463C-9870-DB282E9B171D}" dt="2026-05-09T22:50:41.743" v="4577" actId="20577"/>
+          <ac:spMkLst>
+            <pc:docMk/>
+            <pc:sldMk cId="1889611801" sldId="11093"/>
+            <ac:spMk id="5" creationId="{F16ADB46-4744-3BD1-5FFB-00F2AED01542}"/>
+          </ac:spMkLst>
+        </pc:spChg>
+        <pc:spChg chg="mod">
+          <ac:chgData name="James, Robert" userId="2289ddc5-885d-4588-a312-b6745df56974" providerId="ADAL" clId="{DF25E5BF-D19E-463C-9870-DB282E9B171D}" dt="2026-05-09T22:53:54.110" v="4975" actId="20577"/>
+          <ac:spMkLst>
+            <pc:docMk/>
+            <pc:sldMk cId="1889611801" sldId="11093"/>
+            <ac:spMk id="7" creationId="{5EBE4A91-5418-CF1E-5F18-028DC01D5466}"/>
+          </ac:spMkLst>
+        </pc:spChg>
+      </pc:sldChg>
+    </pc:docChg>
+  </pc:docChgLst>
+  <pc:docChgLst>
+    <pc:chgData name="James, Robert" userId="2289ddc5-885d-4588-a312-b6745df56974" providerId="ADAL" clId="{295605D5-D7C6-4472-B58E-2CDD0F898BF4}"/>
+    <pc:docChg chg="undo custSel modSld">
+      <pc:chgData name="James, Robert" userId="2289ddc5-885d-4588-a312-b6745df56974" providerId="ADAL" clId="{295605D5-D7C6-4472-B58E-2CDD0F898BF4}" dt="2026-05-08T14:52:50.844" v="290" actId="1076"/>
+      <pc:docMkLst>
+        <pc:docMk/>
+      </pc:docMkLst>
+      <pc:sldChg chg="modSp mod">
+        <pc:chgData name="James, Robert" userId="2289ddc5-885d-4588-a312-b6745df56974" providerId="ADAL" clId="{295605D5-D7C6-4472-B58E-2CDD0F898BF4}" dt="2026-05-08T14:50:18.421" v="246" actId="20577"/>
+        <pc:sldMkLst>
+          <pc:docMk/>
+          <pc:sldMk cId="0" sldId="278"/>
+        </pc:sldMkLst>
+        <pc:spChg chg="mod">
+          <ac:chgData name="James, Robert" userId="2289ddc5-885d-4588-a312-b6745df56974" providerId="ADAL" clId="{295605D5-D7C6-4472-B58E-2CDD0F898BF4}" dt="2026-05-08T14:50:18.421" v="246" actId="20577"/>
+          <ac:spMkLst>
+            <pc:docMk/>
+            <pc:sldMk cId="0" sldId="278"/>
+            <ac:spMk id="3" creationId="{00000000-0000-0000-0000-000000000000}"/>
+          </ac:spMkLst>
+        </pc:spChg>
+        <pc:spChg chg="mod">
+          <ac:chgData name="James, Robert" userId="2289ddc5-885d-4588-a312-b6745df56974" providerId="ADAL" clId="{295605D5-D7C6-4472-B58E-2CDD0F898BF4}" dt="2026-05-08T14:50:02.707" v="244" actId="20577"/>
+          <ac:spMkLst>
+            <pc:docMk/>
+            <pc:sldMk cId="0" sldId="278"/>
+            <ac:spMk id="6" creationId="{DDB093FB-AA2A-182D-6672-E334FC58E494}"/>
+          </ac:spMkLst>
+        </pc:spChg>
+      </pc:sldChg>
+      <pc:sldChg chg="addSp delSp modSp mod modClrScheme chgLayout">
+        <pc:chgData name="James, Robert" userId="2289ddc5-885d-4588-a312-b6745df56974" providerId="ADAL" clId="{295605D5-D7C6-4472-B58E-2CDD0F898BF4}" dt="2026-05-08T14:48:16.921" v="130" actId="20577"/>
+        <pc:sldMkLst>
+          <pc:docMk/>
+          <pc:sldMk cId="3408005331" sldId="11047"/>
+        </pc:sldMkLst>
+        <pc:spChg chg="mod">
+          <ac:chgData name="James, Robert" userId="2289ddc5-885d-4588-a312-b6745df56974" providerId="ADAL" clId="{295605D5-D7C6-4472-B58E-2CDD0F898BF4}" dt="2026-05-08T14:42:19.395" v="27" actId="26606"/>
+          <ac:spMkLst>
+            <pc:docMk/>
+            <pc:sldMk cId="3408005331" sldId="11047"/>
+            <ac:spMk id="3" creationId="{6AF1DB00-25C4-6CF6-13A2-0F7F62266BC7}"/>
+          </ac:spMkLst>
+        </pc:spChg>
+        <pc:spChg chg="del mod">
+          <ac:chgData name="James, Robert" userId="2289ddc5-885d-4588-a312-b6745df56974" providerId="ADAL" clId="{295605D5-D7C6-4472-B58E-2CDD0F898BF4}" dt="2026-05-08T14:42:19.395" v="27" actId="26606"/>
+          <ac:spMkLst>
+            <pc:docMk/>
+            <pc:sldMk cId="3408005331" sldId="11047"/>
+            <ac:spMk id="4" creationId="{7C1B9BD7-563B-1177-4B1B-4715367F3ADA}"/>
+          </ac:spMkLst>
+        </pc:spChg>
+        <pc:spChg chg="mod">
+          <ac:chgData name="James, Robert" userId="2289ddc5-885d-4588-a312-b6745df56974" providerId="ADAL" clId="{295605D5-D7C6-4472-B58E-2CDD0F898BF4}" dt="2026-05-08T14:42:19.395" v="27" actId="26606"/>
+          <ac:spMkLst>
+            <pc:docMk/>
+            <pc:sldMk cId="3408005331" sldId="11047"/>
+            <ac:spMk id="5" creationId="{B295BDCC-43E6-A6DE-B14D-3C248ACC4481}"/>
+          </ac:spMkLst>
+        </pc:spChg>
+        <pc:spChg chg="mod">
+          <ac:chgData name="James, Robert" userId="2289ddc5-885d-4588-a312-b6745df56974" providerId="ADAL" clId="{295605D5-D7C6-4472-B58E-2CDD0F898BF4}" dt="2026-05-08T14:48:16.921" v="130" actId="20577"/>
+          <ac:spMkLst>
+            <pc:docMk/>
+            <pc:sldMk cId="3408005331" sldId="11047"/>
+            <ac:spMk id="6" creationId="{19FB656C-3A8F-3B84-3362-8412A6288298}"/>
+          </ac:spMkLst>
+        </pc:spChg>
+        <pc:spChg chg="mod">
+          <ac:chgData name="James, Robert" userId="2289ddc5-885d-4588-a312-b6745df56974" providerId="ADAL" clId="{295605D5-D7C6-4472-B58E-2CDD0F898BF4}" dt="2026-05-08T14:45:28.806" v="102" actId="1076"/>
+          <ac:spMkLst>
+            <pc:docMk/>
+            <pc:sldMk cId="3408005331" sldId="11047"/>
+            <ac:spMk id="7" creationId="{4730289A-E9FD-D95C-7012-930F68A3BDE3}"/>
+          </ac:spMkLst>
+        </pc:spChg>
+        <pc:spChg chg="add mod">
+          <ac:chgData name="James, Robert" userId="2289ddc5-885d-4588-a312-b6745df56974" providerId="ADAL" clId="{295605D5-D7C6-4472-B58E-2CDD0F898BF4}" dt="2026-05-08T14:45:23.171" v="101" actId="20577"/>
+          <ac:spMkLst>
+            <pc:docMk/>
+            <pc:sldMk cId="3408005331" sldId="11047"/>
+            <ac:spMk id="12" creationId="{8CC53829-BA9F-7919-E7DA-289D7FE9F4CF}"/>
+          </ac:spMkLst>
+        </pc:spChg>
+      </pc:sldChg>
+      <pc:sldChg chg="modSp mod">
+        <pc:chgData name="James, Robert" userId="2289ddc5-885d-4588-a312-b6745df56974" providerId="ADAL" clId="{295605D5-D7C6-4472-B58E-2CDD0F898BF4}" dt="2026-05-08T14:52:11.755" v="287" actId="1076"/>
+        <pc:sldMkLst>
+          <pc:docMk/>
+          <pc:sldMk cId="247361968" sldId="11079"/>
+        </pc:sldMkLst>
+        <pc:spChg chg="mod">
+          <ac:chgData name="James, Robert" userId="2289ddc5-885d-4588-a312-b6745df56974" providerId="ADAL" clId="{295605D5-D7C6-4472-B58E-2CDD0F898BF4}" dt="2026-05-08T14:52:11.755" v="287" actId="1076"/>
+          <ac:spMkLst>
+            <pc:docMk/>
+            <pc:sldMk cId="247361968" sldId="11079"/>
+            <ac:spMk id="5" creationId="{DFCF1373-476F-EF0A-9E2B-6A47BBE67C9A}"/>
+          </ac:spMkLst>
+        </pc:spChg>
+        <pc:spChg chg="mod">
+          <ac:chgData name="James, Robert" userId="2289ddc5-885d-4588-a312-b6745df56974" providerId="ADAL" clId="{295605D5-D7C6-4472-B58E-2CDD0F898BF4}" dt="2026-05-08T14:51:58.716" v="286" actId="20577"/>
+          <ac:spMkLst>
+            <pc:docMk/>
+            <pc:sldMk cId="247361968" sldId="11079"/>
+            <ac:spMk id="6" creationId="{1A20FB51-9C40-6216-A920-6D8A2CA4867F}"/>
+          </ac:spMkLst>
+        </pc:spChg>
+      </pc:sldChg>
+      <pc:sldChg chg="modSp mod">
+        <pc:chgData name="James, Robert" userId="2289ddc5-885d-4588-a312-b6745df56974" providerId="ADAL" clId="{295605D5-D7C6-4472-B58E-2CDD0F898BF4}" dt="2026-05-08T14:52:25.316" v="289" actId="1076"/>
+        <pc:sldMkLst>
+          <pc:docMk/>
+          <pc:sldMk cId="3351717916" sldId="11081"/>
+        </pc:sldMkLst>
+        <pc:spChg chg="mod">
+          <ac:chgData name="James, Robert" userId="2289ddc5-885d-4588-a312-b6745df56974" providerId="ADAL" clId="{295605D5-D7C6-4472-B58E-2CDD0F898BF4}" dt="2026-05-08T14:52:25.316" v="289" actId="1076"/>
+          <ac:spMkLst>
+            <pc:docMk/>
+            <pc:sldMk cId="3351717916" sldId="11081"/>
+            <ac:spMk id="5" creationId="{8774CE1A-1313-B9BA-6F15-A8CDA4E2E391}"/>
+          </ac:spMkLst>
+        </pc:spChg>
+        <pc:spChg chg="mod">
+          <ac:chgData name="James, Robert" userId="2289ddc5-885d-4588-a312-b6745df56974" providerId="ADAL" clId="{295605D5-D7C6-4472-B58E-2CDD0F898BF4}" dt="2026-05-08T14:52:21.700" v="288" actId="20577"/>
+          <ac:spMkLst>
+            <pc:docMk/>
+            <pc:sldMk cId="3351717916" sldId="11081"/>
+            <ac:spMk id="6" creationId="{E099692C-AAFC-BF6D-9F30-5F6199C50B23}"/>
+          </ac:spMkLst>
+        </pc:spChg>
+      </pc:sldChg>
+      <pc:sldChg chg="modSp mod">
+        <pc:chgData name="James, Robert" userId="2289ddc5-885d-4588-a312-b6745df56974" providerId="ADAL" clId="{295605D5-D7C6-4472-B58E-2CDD0F898BF4}" dt="2026-05-08T14:52:50.844" v="290" actId="1076"/>
+        <pc:sldMkLst>
+          <pc:docMk/>
+          <pc:sldMk cId="1281292534" sldId="11082"/>
+        </pc:sldMkLst>
+        <pc:spChg chg="mod">
+          <ac:chgData name="James, Robert" userId="2289ddc5-885d-4588-a312-b6745df56974" providerId="ADAL" clId="{295605D5-D7C6-4472-B58E-2CDD0F898BF4}" dt="2026-05-08T14:52:50.844" v="290" actId="1076"/>
+          <ac:spMkLst>
+            <pc:docMk/>
+            <pc:sldMk cId="1281292534" sldId="11082"/>
+            <ac:spMk id="5" creationId="{81B5C1EE-B6C1-6E6E-C8AB-754E1036F841}"/>
+          </ac:spMkLst>
+        </pc:spChg>
+        <pc:spChg chg="mod">
+          <ac:chgData name="James, Robert" userId="2289ddc5-885d-4588-a312-b6745df56974" providerId="ADAL" clId="{295605D5-D7C6-4472-B58E-2CDD0F898BF4}" dt="2026-05-08T14:39:47.733" v="5" actId="20577"/>
+          <ac:spMkLst>
+            <pc:docMk/>
+            <pc:sldMk cId="1281292534" sldId="11082"/>
+            <ac:spMk id="7" creationId="{E1FC1D69-CFDF-CF80-B26B-59D0F7616800}"/>
+          </ac:spMkLst>
+        </pc:spChg>
+      </pc:sldChg>
+      <pc:sldChg chg="modSp mod">
+        <pc:chgData name="James, Robert" userId="2289ddc5-885d-4588-a312-b6745df56974" providerId="ADAL" clId="{295605D5-D7C6-4472-B58E-2CDD0F898BF4}" dt="2026-05-08T14:50:31.059" v="247" actId="1076"/>
+        <pc:sldMkLst>
+          <pc:docMk/>
+          <pc:sldMk cId="2017397866" sldId="11089"/>
+        </pc:sldMkLst>
+        <pc:spChg chg="mod">
+          <ac:chgData name="James, Robert" userId="2289ddc5-885d-4588-a312-b6745df56974" providerId="ADAL" clId="{295605D5-D7C6-4472-B58E-2CDD0F898BF4}" dt="2026-05-08T14:50:31.059" v="247" actId="1076"/>
+          <ac:spMkLst>
+            <pc:docMk/>
+            <pc:sldMk cId="2017397866" sldId="11089"/>
+            <ac:spMk id="5" creationId="{A5EE09DA-EA0D-2E24-41FB-87D9DE0607DD}"/>
+          </ac:spMkLst>
+        </pc:spChg>
+      </pc:sldChg>
+      <pc:sldChg chg="modSp mod">
+        <pc:chgData name="James, Robert" userId="2289ddc5-885d-4588-a312-b6745df56974" providerId="ADAL" clId="{295605D5-D7C6-4472-B58E-2CDD0F898BF4}" dt="2026-05-08T14:48:58.539" v="132" actId="20577"/>
+        <pc:sldMkLst>
+          <pc:docMk/>
+          <pc:sldMk cId="3530447403" sldId="11091"/>
+        </pc:sldMkLst>
+        <pc:spChg chg="mod">
+          <ac:chgData name="James, Robert" userId="2289ddc5-885d-4588-a312-b6745df56974" providerId="ADAL" clId="{295605D5-D7C6-4472-B58E-2CDD0F898BF4}" dt="2026-05-08T14:48:58.539" v="132" actId="20577"/>
+          <ac:spMkLst>
+            <pc:docMk/>
+            <pc:sldMk cId="3530447403" sldId="11091"/>
+            <ac:spMk id="7" creationId="{1204EBE0-101C-4413-A0FB-D607F9FF6043}"/>
           </ac:spMkLst>
         </pc:spChg>
       </pc:sldChg>
@@ -490,7 +786,7 @@
           <a:p>
             <a:fld id="{DD2C371D-5DA9-6C42-8A12-4A27D2753739}" type="datetimeFigureOut">
               <a:rPr lang="en-US" smtClean="0"/>
-              <a:t>5/3/2026</a:t>
+              <a:t>5/9/2026</a:t>
             </a:fld>
             <a:endParaRPr lang="en-US"/>
           </a:p>
@@ -5642,7 +5938,7 @@
           <a:p>
             <a:fld id="{B2635306-B3B1-A944-A64E-0A77BF937900}" type="slidenum">
               <a:rPr lang="en-US" smtClean="0"/>
-              <a:t>20</a:t>
+              <a:t>19</a:t>
             </a:fld>
             <a:endParaRPr lang="en-US"/>
           </a:p>
@@ -5753,7 +6049,7 @@
           <a:p>
             <a:fld id="{B2635306-B3B1-A944-A64E-0A77BF937900}" type="slidenum">
               <a:rPr lang="en-US" smtClean="0"/>
-              <a:t>21</a:t>
+              <a:t>20</a:t>
             </a:fld>
             <a:endParaRPr lang="en-US"/>
           </a:p>
@@ -32887,7 +33183,7 @@
           <a:p>
             <a:fld id="{5BCAD085-E8A6-8845-BD4E-CB4CCA059FC4}" type="datetimeFigureOut">
               <a:rPr lang="en-US" smtClean="0"/>
-              <a:t>5/3/2026</a:t>
+              <a:t>5/9/2026</a:t>
             </a:fld>
             <a:endParaRPr lang="en-US"/>
           </a:p>
@@ -34375,10 +34671,10 @@
       </p:grpSpPr>
       <p:sp>
         <p:nvSpPr>
-          <p:cNvPr id="4" name="Picture Placeholder 3">
+          <p:cNvPr id="5" name="Footer Placeholder 4">
             <a:extLst>
               <a:ext uri="{FF2B5EF4-FFF2-40B4-BE49-F238E27FC236}">
-                <a16:creationId xmlns:a16="http://schemas.microsoft.com/office/drawing/2014/main" id="{7C1B9BD7-563B-1177-4B1B-4715367F3ADA}"/>
+                <a16:creationId xmlns:a16="http://schemas.microsoft.com/office/drawing/2014/main" id="{B295BDCC-43E6-A6DE-B14D-3C248ACC4481}"/>
               </a:ext>
             </a:extLst>
           </p:cNvPr>
@@ -34386,70 +34682,97 @@
             <a:spLocks noGrp="1"/>
           </p:cNvSpPr>
           <p:nvPr>
-            <p:ph type="pic" sz="quarter" idx="11"/>
-          </p:nvPr>
-        </p:nvSpPr>
-        <p:spPr/>
+            <p:ph type="ftr" sz="quarter" idx="10"/>
+          </p:nvPr>
+        </p:nvSpPr>
+        <p:spPr>
+          <a:xfrm>
+            <a:off x="8839199" y="6378130"/>
+            <a:ext cx="2241177" cy="245223"/>
+          </a:xfrm>
+        </p:spPr>
+        <p:txBody>
+          <a:bodyPr anchor="b">
+            <a:normAutofit/>
+          </a:bodyPr>
+          <a:lstStyle/>
+          <a:p>
+            <a:pPr>
+              <a:spcAft>
+                <a:spcPts val="600"/>
+              </a:spcAft>
+            </a:pPr>
+            <a:r>
+              <a:rPr lang="en-US"/>
+              <a:t>MSK Confidential — do not distribute</a:t>
+            </a:r>
+          </a:p>
+        </p:txBody>
+      </p:sp>
+      <p:sp>
+        <p:nvSpPr>
+          <p:cNvPr id="3" name="Title 2">
+            <a:extLst>
+              <a:ext uri="{FF2B5EF4-FFF2-40B4-BE49-F238E27FC236}">
+                <a16:creationId xmlns:a16="http://schemas.microsoft.com/office/drawing/2014/main" id="{6AF1DB00-25C4-6CF6-13A2-0F7F62266BC7}"/>
+              </a:ext>
+            </a:extLst>
+          </p:cNvPr>
+          <p:cNvSpPr>
+            <a:spLocks noGrp="1"/>
+          </p:cNvSpPr>
+          <p:nvPr>
+            <p:ph type="ctrTitle"/>
+          </p:nvPr>
+        </p:nvSpPr>
+        <p:spPr>
+          <a:xfrm>
+            <a:off x="504825" y="1920240"/>
+            <a:ext cx="7419975" cy="1508760"/>
+          </a:xfrm>
+        </p:spPr>
+        <p:txBody>
+          <a:bodyPr anchor="t">
+            <a:normAutofit/>
+          </a:bodyPr>
+          <a:lstStyle/>
+          <a:p>
+            <a:r>
+              <a:rPr lang="en-US" sz="3400"/>
+              <a:t>Accuracy and Safety of Large Language Models for Breast Cancer Surgical Consultation Summaries</a:t>
+            </a:r>
+          </a:p>
+        </p:txBody>
+      </p:sp>
+      <p:sp>
+        <p:nvSpPr>
+          <p:cNvPr id="12" name="Subtitle 3">
+            <a:extLst>
+              <a:ext uri="{FF2B5EF4-FFF2-40B4-BE49-F238E27FC236}">
+                <a16:creationId xmlns:a16="http://schemas.microsoft.com/office/drawing/2014/main" id="{8CC53829-BA9F-7919-E7DA-289D7FE9F4CF}"/>
+              </a:ext>
+            </a:extLst>
+          </p:cNvPr>
+          <p:cNvSpPr>
+            <a:spLocks noGrp="1"/>
+          </p:cNvSpPr>
+          <p:nvPr>
+            <p:ph type="subTitle" idx="1"/>
+          </p:nvPr>
+        </p:nvSpPr>
+        <p:spPr>
+          <a:xfrm>
+            <a:off x="504825" y="1371600"/>
+            <a:ext cx="7419975" cy="530693"/>
+          </a:xfrm>
+        </p:spPr>
         <p:txBody>
           <a:bodyPr/>
           <a:lstStyle/>
           <a:p>
-            <a:endParaRPr lang="en-US"/>
-          </a:p>
-        </p:txBody>
-      </p:sp>
-      <p:sp>
-        <p:nvSpPr>
-          <p:cNvPr id="5" name="Footer Placeholder 4">
-            <a:extLst>
-              <a:ext uri="{FF2B5EF4-FFF2-40B4-BE49-F238E27FC236}">
-                <a16:creationId xmlns:a16="http://schemas.microsoft.com/office/drawing/2014/main" id="{B295BDCC-43E6-A6DE-B14D-3C248ACC4481}"/>
-              </a:ext>
-            </a:extLst>
-          </p:cNvPr>
-          <p:cNvSpPr>
-            <a:spLocks noGrp="1"/>
-          </p:cNvSpPr>
-          <p:nvPr>
-            <p:ph type="ftr" sz="quarter" idx="10"/>
-          </p:nvPr>
-        </p:nvSpPr>
-        <p:spPr/>
-        <p:txBody>
-          <a:bodyPr/>
-          <a:lstStyle/>
-          <a:p>
-            <a:r>
-              <a:rPr lang="en-US"/>
-              <a:t>MSK Confidential — do not distribute</a:t>
-            </a:r>
-          </a:p>
-        </p:txBody>
-      </p:sp>
-      <p:sp>
-        <p:nvSpPr>
-          <p:cNvPr id="3" name="Title 2">
-            <a:extLst>
-              <a:ext uri="{FF2B5EF4-FFF2-40B4-BE49-F238E27FC236}">
-                <a16:creationId xmlns:a16="http://schemas.microsoft.com/office/drawing/2014/main" id="{6AF1DB00-25C4-6CF6-13A2-0F7F62266BC7}"/>
-              </a:ext>
-            </a:extLst>
-          </p:cNvPr>
-          <p:cNvSpPr>
-            <a:spLocks noGrp="1"/>
-          </p:cNvSpPr>
-          <p:nvPr>
-            <p:ph type="ctrTitle"/>
-          </p:nvPr>
-        </p:nvSpPr>
-        <p:spPr/>
-        <p:txBody>
-          <a:bodyPr/>
-          <a:lstStyle/>
-          <a:p>
-            <a:r>
-              <a:rPr lang="en-US" dirty="0"/>
-              <a:t>OPTICS Work in Progress</a:t>
+            <a:r>
+              <a:rPr lang="en-US" dirty="0"/>
+              <a:t> </a:t>
             </a:r>
           </a:p>
         </p:txBody>
@@ -34472,17 +34795,19 @@
         </p:nvSpPr>
         <p:spPr>
           <a:xfrm>
-            <a:off x="504825" y="4617720"/>
-            <a:ext cx="3505201" cy="457200"/>
+            <a:off x="504825" y="4389119"/>
+            <a:ext cx="3749934" cy="703747"/>
           </a:xfrm>
         </p:spPr>
         <p:txBody>
-          <a:bodyPr/>
+          <a:bodyPr>
+            <a:normAutofit/>
+          </a:bodyPr>
           <a:lstStyle/>
           <a:p>
             <a:r>
               <a:rPr lang="en-US" dirty="0"/>
-              <a:t>December 18, 2025</a:t>
+              <a:t>May 18, 2026</a:t>
             </a:r>
           </a:p>
         </p:txBody>
@@ -34503,9 +34828,16 @@
             <p:ph type="body" sz="quarter" idx="13"/>
           </p:nvPr>
         </p:nvSpPr>
-        <p:spPr/>
-        <p:txBody>
-          <a:bodyPr/>
+        <p:spPr>
+          <a:xfrm>
+            <a:off x="504823" y="3584716"/>
+            <a:ext cx="7419975" cy="549249"/>
+          </a:xfrm>
+        </p:spPr>
+        <p:txBody>
+          <a:bodyPr>
+            <a:normAutofit/>
+          </a:bodyPr>
           <a:lstStyle/>
           <a:p>
             <a:r>
@@ -35203,7 +35535,7 @@
           <a:p>
             <a:r>
               <a:rPr lang="en-US" dirty="0"/>
-              <a:t>Part 1 – validation and eval of classification performance</a:t>
+              <a:t>Model validation – performance and safety evaluation</a:t>
             </a:r>
             <a:br>
               <a:rPr lang="en-US" dirty="0"/>
@@ -35231,60 +35563,97 @@
         <p:spPr/>
         <p:txBody>
           <a:bodyPr>
-            <a:normAutofit/>
+            <a:normAutofit lnSpcReduction="10000"/>
           </a:bodyPr>
           <a:lstStyle/>
           <a:p>
             <a:r>
               <a:rPr lang="en-US" dirty="0"/>
-              <a:t> Annotations in summaries classified as:</a:t>
+              <a:t>Values in summary classified as:</a:t>
             </a:r>
           </a:p>
           <a:p>
             <a:pPr lvl="1"/>
             <a:r>
               <a:rPr lang="en-US" dirty="0"/>
+              <a:t>Present or absent in source document</a:t>
+            </a:r>
+          </a:p>
+          <a:p>
+            <a:pPr lvl="1"/>
+            <a:r>
+              <a:rPr lang="en-US" dirty="0"/>
+              <a:t>If present</a:t>
+            </a:r>
+          </a:p>
+          <a:p>
+            <a:pPr lvl="2"/>
+            <a:r>
+              <a:rPr lang="en-US" dirty="0"/>
               <a:t>TP: correct extraction </a:t>
             </a:r>
           </a:p>
           <a:p>
-            <a:pPr lvl="1"/>
+            <a:pPr lvl="2"/>
             <a:r>
               <a:rPr lang="en-US" dirty="0"/>
               <a:t>FN: omission</a:t>
             </a:r>
           </a:p>
           <a:p>
-            <a:pPr lvl="1"/>
-            <a:r>
-              <a:rPr lang="en-US" dirty="0"/>
-              <a:t>FP: fabrication</a:t>
-            </a:r>
-          </a:p>
-          <a:p>
-            <a:pPr lvl="1"/>
-            <a:r>
-              <a:rPr lang="en-US" dirty="0"/>
-              <a:t>N/A: not present in source</a:t>
-            </a:r>
-          </a:p>
-          <a:p>
-            <a:r>
-              <a:rPr lang="en-US" dirty="0"/>
-              <a:t>Primary outcome: fabrication rate = FP / (FP + FN + TP)</a:t>
-            </a:r>
-          </a:p>
-          <a:p>
-            <a:pPr lvl="1"/>
-            <a:r>
-              <a:rPr lang="en-US" dirty="0"/>
-              <a:t>TN excluded from calculation</a:t>
-            </a:r>
-          </a:p>
-          <a:p>
-            <a:r>
-              <a:rPr lang="en-US" dirty="0"/>
-              <a:t>Secondary outcomes: accuracy and omission rate</a:t>
+            <a:pPr lvl="2"/>
+            <a:r>
+              <a:rPr lang="en-US" dirty="0"/>
+              <a:t>FP: fabrication </a:t>
+            </a:r>
+          </a:p>
+          <a:p>
+            <a:pPr marL="0" lvl="1" indent="0">
+              <a:buNone/>
+            </a:pPr>
+            <a:endParaRPr lang="en-US" dirty="0"/>
+          </a:p>
+          <a:p>
+            <a:r>
+              <a:rPr lang="en-US" dirty="0"/>
+              <a:t>Primary outcome: </a:t>
+            </a:r>
+          </a:p>
+          <a:p>
+            <a:pPr marL="285750" indent="-285750">
+              <a:buFont typeface="Arial" panose="020B0604020202020204" pitchFamily="34" charset="0"/>
+              <a:buChar char="•"/>
+            </a:pPr>
+            <a:r>
+              <a:rPr lang="en-US" dirty="0"/>
+              <a:t>fabrication rate = FP / (FP + FN + TP)</a:t>
+            </a:r>
+          </a:p>
+          <a:p>
+            <a:pPr marL="514350" lvl="1" indent="-285750"/>
+            <a:r>
+              <a:rPr lang="en-US" dirty="0"/>
+              <a:t>TN excluded from calculation </a:t>
+            </a:r>
+          </a:p>
+          <a:p>
+            <a:pPr marL="514350" lvl="1" indent="-285750"/>
+            <a:endParaRPr lang="en-US" dirty="0"/>
+          </a:p>
+          <a:p>
+            <a:r>
+              <a:rPr lang="en-US" dirty="0"/>
+              <a:t>Secondary outcomes: </a:t>
+            </a:r>
+          </a:p>
+          <a:p>
+            <a:pPr marL="285750" indent="-285750">
+              <a:buFont typeface="Arial" panose="020B0604020202020204" pitchFamily="34" charset="0"/>
+              <a:buChar char="•"/>
+            </a:pPr>
+            <a:r>
+              <a:rPr lang="en-US" dirty="0"/>
+              <a:t>accuracy and omission rate</a:t>
             </a:r>
           </a:p>
           <a:p>
@@ -35352,7 +35721,7 @@
           <a:p>
             <a:r>
               <a:rPr lang="en-US" sz="4500" dirty="0"/>
-              <a:t>Initial results of model validation by human judges</a:t>
+              <a:t>Results – model validation by expert human judges</a:t>
             </a:r>
           </a:p>
         </p:txBody>
@@ -35440,10 +35809,7 @@
           </a:bodyPr>
           <a:lstStyle/>
           <a:p>
-            <a:r>
-              <a:rPr lang="en-US" dirty="0"/>
-              <a:t>Exploratory assessment of structured prompt with guardrails on performance and safety</a:t>
-            </a:r>
+            <a:endParaRPr lang="en-US" dirty="0"/>
           </a:p>
         </p:txBody>
       </p:sp>
@@ -35757,35 +36123,35 @@
           <a:p>
             <a:r>
               <a:rPr lang="en-US" dirty="0"/>
-              <a:t>Prompt V2: structured zero-shot with strict anti-fabrication guardrails </a:t>
+              <a:t>Prompt V2: structured extraction of set values per feature, strict guardrails, and context grounding </a:t>
             </a:r>
           </a:p>
           <a:p>
             <a:pPr lvl="2"/>
             <a:r>
               <a:rPr lang="en-US" dirty="0"/>
-              <a:t>Hard constraints: no inference allowed</a:t>
-            </a:r>
-          </a:p>
-          <a:p>
-            <a:pPr lvl="2"/>
-            <a:r>
-              <a:rPr lang="en-US" dirty="0"/>
-              <a:t>Return 'Not reported' if missing"</a:t>
-            </a:r>
-          </a:p>
-          <a:p>
-            <a:pPr lvl="2"/>
-            <a:r>
-              <a:rPr lang="en-US" dirty="0"/>
-              <a:t>Return 'Indeterminate' if conflicting"</a:t>
-            </a:r>
-          </a:p>
-          <a:p>
-            <a:pPr lvl="2"/>
-            <a:r>
-              <a:rPr lang="en-US" dirty="0"/>
-              <a:t>Evidence-based extraction required</a:t>
+              <a:t>Anti-fabrication methods employed: </a:t>
+            </a:r>
+          </a:p>
+          <a:p>
+            <a:pPr lvl="3"/>
+            <a:r>
+              <a:rPr lang="en-US" dirty="0"/>
+              <a:t>Guardrails and specified model behavior– e.g. no inference allowed and return 'Not reported' if missing</a:t>
+            </a:r>
+          </a:p>
+          <a:p>
+            <a:pPr lvl="3"/>
+            <a:r>
+              <a:rPr lang="en-US" dirty="0"/>
+              <a:t>Specified feature values and output format</a:t>
+            </a:r>
+          </a:p>
+          <a:p>
+            <a:pPr lvl="3"/>
+            <a:r>
+              <a:rPr lang="en-US" dirty="0"/>
+              <a:t>Context grounding to area of source documents relevant to extracted values</a:t>
             </a:r>
           </a:p>
           <a:p>
@@ -35828,256 +36194,6 @@
           <p:cNvPr id="2" name="Title 1">
             <a:extLst>
               <a:ext uri="{FF2B5EF4-FFF2-40B4-BE49-F238E27FC236}">
-                <a16:creationId xmlns:a16="http://schemas.microsoft.com/office/drawing/2014/main" id="{EF7921CE-2B0F-48A5-99A4-4C0C1F60561A}"/>
-              </a:ext>
-            </a:extLst>
-          </p:cNvPr>
-          <p:cNvSpPr>
-            <a:spLocks noGrp="1"/>
-          </p:cNvSpPr>
-          <p:nvPr>
-            <p:ph type="title"/>
-          </p:nvPr>
-        </p:nvSpPr>
-        <p:spPr/>
-        <p:txBody>
-          <a:bodyPr>
-            <a:normAutofit/>
-          </a:bodyPr>
-          <a:lstStyle/>
-          <a:p>
-            <a:r>
-              <a:rPr lang="en-US" dirty="0"/>
-              <a:t>Prompt performance evaluation</a:t>
-            </a:r>
-          </a:p>
-        </p:txBody>
-      </p:sp>
-      <p:sp>
-        <p:nvSpPr>
-          <p:cNvPr id="3" name="Content Placeholder 2">
-            <a:extLst>
-              <a:ext uri="{FF2B5EF4-FFF2-40B4-BE49-F238E27FC236}">
-                <a16:creationId xmlns:a16="http://schemas.microsoft.com/office/drawing/2014/main" id="{6834FC33-2700-048C-29F8-44B7A7DE2E4A}"/>
-              </a:ext>
-            </a:extLst>
-          </p:cNvPr>
-          <p:cNvSpPr>
-            <a:spLocks noGrp="1"/>
-          </p:cNvSpPr>
-          <p:nvPr>
-            <p:ph idx="1"/>
-          </p:nvPr>
-        </p:nvSpPr>
-        <p:spPr>
-          <a:xfrm>
-            <a:off x="1981200" y="1166019"/>
-            <a:ext cx="8229600" cy="4525963"/>
-          </a:xfrm>
-        </p:spPr>
-        <p:txBody>
-          <a:bodyPr>
-            <a:normAutofit fontScale="40000" lnSpcReduction="20000"/>
-          </a:bodyPr>
-          <a:lstStyle/>
-          <a:p>
-            <a:endParaRPr lang="en-US" dirty="0"/>
-          </a:p>
-          <a:p>
-            <a:r>
-              <a:rPr lang="en-US" dirty="0"/>
-              <a:t>{</a:t>
-            </a:r>
-          </a:p>
-          <a:p>
-            <a:r>
-              <a:rPr lang="en-US" dirty="0"/>
-              <a:t>“prompt_v1": {</a:t>
-            </a:r>
-          </a:p>
-          <a:p>
-            <a:r>
-              <a:rPr lang="en-US" dirty="0"/>
-              <a:t>"id": "P1",</a:t>
-            </a:r>
-          </a:p>
-          <a:p>
-            <a:r>
-              <a:rPr lang="en-US" dirty="0"/>
-              <a:t>"date_frozen": "2026-02-28",</a:t>
-            </a:r>
-          </a:p>
-          <a:p>
-            <a:r>
-              <a:rPr lang="en-US" dirty="0"/>
-              <a:t>"approach": "structured extraction",</a:t>
-            </a:r>
-          </a:p>
-          <a:p>
-            <a:r>
-              <a:rPr lang="en-US" dirty="0"/>
-              <a:t>"model": "gpt-4.x",</a:t>
-            </a:r>
-          </a:p>
-          <a:p>
-            <a:r>
-              <a:rPr lang="en-US" dirty="0"/>
-              <a:t>"temperature": 0.0,</a:t>
-            </a:r>
-          </a:p>
-          <a:p>
-            <a:r>
-              <a:rPr lang="en-US" dirty="0"/>
-              <a:t>"status": "frozen"},</a:t>
-            </a:r>
-          </a:p>
-          <a:p>
-            <a:endParaRPr lang="en-US" dirty="0"/>
-          </a:p>
-          <a:p>
-            <a:r>
-              <a:rPr lang="en-US" dirty="0"/>
-              <a:t>"prompt_v2": {</a:t>
-            </a:r>
-          </a:p>
-          <a:p>
-            <a:r>
-              <a:rPr lang="en-US" dirty="0"/>
-              <a:t>"id": "P2",</a:t>
-            </a:r>
-          </a:p>
-          <a:p>
-            <a:r>
-              <a:rPr lang="en-US" dirty="0"/>
-              <a:t>"date_frozen": "2026-03-01",</a:t>
-            </a:r>
-          </a:p>
-          <a:p>
-            <a:r>
-              <a:rPr lang="en-US" dirty="0"/>
-              <a:t>"approach": "refined extraction",</a:t>
-            </a:r>
-          </a:p>
-          <a:p>
-            <a:r>
-              <a:rPr lang="en-US" dirty="0"/>
-              <a:t>“status": "frozen"}</a:t>
-            </a:r>
-          </a:p>
-          <a:p>
-            <a:r>
-              <a:rPr lang="en-US" dirty="0"/>
-              <a:t>}</a:t>
-            </a:r>
-          </a:p>
-          <a:p>
-            <a:endParaRPr lang="en-US" dirty="0"/>
-          </a:p>
-          <a:p>
-            <a:r>
-              <a:rPr lang="en-US" dirty="0"/>
-              <a:t>Classification performance run log:</a:t>
-            </a:r>
-          </a:p>
-          <a:p>
-            <a:r>
-              <a:rPr lang="en-US" dirty="0"/>
-              <a:t>{"</a:t>
-            </a:r>
-            <a:r>
-              <a:rPr lang="en-US" dirty="0" err="1"/>
-              <a:t>run_id</a:t>
-            </a:r>
-            <a:r>
-              <a:rPr lang="en-US" dirty="0"/>
-              <a:t>": "R23",</a:t>
-            </a:r>
-          </a:p>
-          <a:p>
-            <a:r>
-              <a:rPr lang="en-US" dirty="0"/>
-              <a:t>"model": "gpt-4.x",</a:t>
-            </a:r>
-          </a:p>
-          <a:p>
-            <a:r>
-              <a:rPr lang="en-US" dirty="0"/>
-              <a:t>"prompt_id": "P17",“</a:t>
-            </a:r>
-          </a:p>
-          <a:p>
-            <a:r>
-              <a:rPr lang="en-US" dirty="0"/>
-              <a:t>approach": "BFOP",</a:t>
-            </a:r>
-          </a:p>
-          <a:p>
-            <a:r>
-              <a:rPr lang="en-US" dirty="0"/>
-              <a:t>"timestamp": "2026-03-10",</a:t>
-            </a:r>
-          </a:p>
-          <a:p>
-            <a:r>
-              <a:rPr lang="en-US" dirty="0"/>
-              <a:t>"overall_accuracy": 0.82,</a:t>
-            </a:r>
-          </a:p>
-          <a:p>
-            <a:r>
-              <a:rPr lang="en-US" dirty="0"/>
-              <a:t>"fabrication_rate": 0.05,</a:t>
-            </a:r>
-          </a:p>
-          <a:p>
-            <a:r>
-              <a:rPr lang="en-US" dirty="0"/>
-              <a:t>"domain_breakdown": {</a:t>
-            </a:r>
-          </a:p>
-          <a:p>
-            <a:r>
-              <a:rPr lang="en-US" dirty="0"/>
-              <a:t>"radiology": 0.84,"pathology": 0.79}}</a:t>
-            </a:r>
-          </a:p>
-        </p:txBody>
-      </p:sp>
-    </p:spTree>
-    <p:extLst>
-      <p:ext uri="{BB962C8B-B14F-4D97-AF65-F5344CB8AC3E}">
-        <p14:creationId xmlns:p14="http://schemas.microsoft.com/office/powerpoint/2010/main" val="570611450"/>
-      </p:ext>
-    </p:extLst>
-  </p:cSld>
-  <p:clrMapOvr>
-    <a:masterClrMapping/>
-  </p:clrMapOvr>
-</p:sld>
-</file>
-
-<file path=ppt/slides/slide18.xml><?xml version="1.0" encoding="utf-8"?>
-<p:sld xmlns:a="http://schemas.openxmlformats.org/drawingml/2006/main" xmlns:r="http://schemas.openxmlformats.org/officeDocument/2006/relationships" xmlns:p="http://schemas.openxmlformats.org/presentationml/2006/main">
-  <p:cSld>
-    <p:spTree>
-      <p:nvGrpSpPr>
-        <p:cNvPr id="1" name=""/>
-        <p:cNvGrpSpPr/>
-        <p:nvPr/>
-      </p:nvGrpSpPr>
-      <p:grpSpPr>
-        <a:xfrm>
-          <a:off x="0" y="0"/>
-          <a:ext cx="0" cy="0"/>
-          <a:chOff x="0" y="0"/>
-          <a:chExt cx="0" cy="0"/>
-        </a:xfrm>
-      </p:grpSpPr>
-      <p:sp>
-        <p:nvSpPr>
-          <p:cNvPr id="2" name="Title 1">
-            <a:extLst>
-              <a:ext uri="{FF2B5EF4-FFF2-40B4-BE49-F238E27FC236}">
                 <a16:creationId xmlns:a16="http://schemas.microsoft.com/office/drawing/2014/main" id="{88CE21F8-9390-3DE0-F176-6592E414D43F}"/>
               </a:ext>
             </a:extLst>
@@ -36096,7 +36212,7 @@
           <a:p>
             <a:r>
               <a:rPr lang="en-US" dirty="0"/>
-              <a:t>Summary of Results</a:t>
+              <a:t>Results</a:t>
             </a:r>
           </a:p>
         </p:txBody>
@@ -36174,7 +36290,7 @@
           <a:p>
             <a:fld id="{C1FF6DA9-008F-8B48-92A6-B652298478BF}" type="slidenum">
               <a:rPr lang="en-US" smtClean="0"/>
-              <a:t>18</a:t>
+              <a:t>17</a:t>
             </a:fld>
             <a:endParaRPr lang="en-US"/>
           </a:p>
@@ -36193,7 +36309,7 @@
 </p:sld>
 </file>
 
-<file path=ppt/slides/slide19.xml><?xml version="1.0" encoding="utf-8"?>
+<file path=ppt/slides/slide18.xml><?xml version="1.0" encoding="utf-8"?>
 <p:sld xmlns:a="http://schemas.openxmlformats.org/drawingml/2006/main" xmlns:r="http://schemas.openxmlformats.org/officeDocument/2006/relationships" xmlns:p="http://schemas.openxmlformats.org/presentationml/2006/main">
   <p:cSld>
     <p:spTree>
@@ -36240,7 +36356,7 @@
             <a:fld id="{523A240F-EAFE-E84F-B44C-6D7A08E0E409}" type="slidenum">
               <a:rPr lang="en-US" smtClean="0"/>
               <a:pPr/>
-              <a:t>19</a:t>
+              <a:t>18</a:t>
             </a:fld>
             <a:endParaRPr lang="en-US"/>
           </a:p>
@@ -36351,7 +36467,7 @@
         <p:spPr bwMode="auto">
           <a:xfrm>
             <a:off x="512063" y="1892585"/>
-            <a:ext cx="9373079" cy="1200329"/>
+            <a:ext cx="12220012" cy="1200329"/>
           </a:xfrm>
           <a:prstGeom prst="rect">
             <a:avLst/>
@@ -36426,7 +36542,7 @@
                 <a:effectLst/>
                 <a:latin typeface="Arial" panose="020B0604020202020204" pitchFamily="34" charset="0"/>
               </a:rPr>
-              <a:t>Reduces manual workload associated with summarizing imaging and pathology reports</a:t>
+              <a:t>Reduces manual workload associated with generating the preoperative workup from imaging and pathology reports</a:t>
             </a:r>
           </a:p>
           <a:p>
@@ -36457,7 +36573,7 @@
                 <a:effectLst/>
                 <a:latin typeface="Arial" panose="020B0604020202020204" pitchFamily="34" charset="0"/>
               </a:rPr>
-              <a:t>Standardizes oncologic history collection across staff and sites</a:t>
+              <a:t>Standardizes the quality of the summary across sites</a:t>
             </a:r>
           </a:p>
           <a:p>
@@ -36488,7 +36604,7 @@
                 <a:effectLst/>
                 <a:latin typeface="Arial" panose="020B0604020202020204" pitchFamily="34" charset="0"/>
               </a:rPr>
-              <a:t>Improves completeness of key breast cancer–specific clinical information</a:t>
+              <a:t>Improves completeness of clinical information</a:t>
             </a:r>
           </a:p>
           <a:p>
@@ -36509,6 +36625,258 @@
               <a:tabLst/>
             </a:pPr>
             <a:r>
+              <a:rPr lang="en-US" altLang="en-US" dirty="0">
+                <a:solidFill>
+                  <a:schemeClr val="tx2"/>
+                </a:solidFill>
+                <a:latin typeface="Arial" panose="020B0604020202020204" pitchFamily="34" charset="0"/>
+              </a:rPr>
+              <a:t>Mitigates primary safety risk (hallucination)</a:t>
+            </a:r>
+            <a:endParaRPr kumimoji="0" lang="en-US" altLang="en-US" sz="1800" b="0" i="0" u="none" strike="noStrike" cap="none" normalizeH="0" baseline="0" dirty="0">
+              <a:ln>
+                <a:noFill/>
+              </a:ln>
+              <a:solidFill>
+                <a:schemeClr val="tx2"/>
+              </a:solidFill>
+              <a:effectLst/>
+              <a:latin typeface="Arial" panose="020B0604020202020204" pitchFamily="34" charset="0"/>
+            </a:endParaRPr>
+          </a:p>
+        </p:txBody>
+      </p:sp>
+    </p:spTree>
+    <p:extLst>
+      <p:ext uri="{BB962C8B-B14F-4D97-AF65-F5344CB8AC3E}">
+        <p14:creationId xmlns:p14="http://schemas.microsoft.com/office/powerpoint/2010/main" val="4038599619"/>
+      </p:ext>
+    </p:extLst>
+  </p:cSld>
+  <p:clrMapOvr>
+    <a:masterClrMapping/>
+  </p:clrMapOvr>
+</p:sld>
+</file>
+
+<file path=ppt/slides/slide19.xml><?xml version="1.0" encoding="utf-8"?>
+<p:sld xmlns:a="http://schemas.openxmlformats.org/drawingml/2006/main" xmlns:r="http://schemas.openxmlformats.org/officeDocument/2006/relationships" xmlns:p="http://schemas.openxmlformats.org/presentationml/2006/main">
+  <p:cSld>
+    <p:spTree>
+      <p:nvGrpSpPr>
+        <p:cNvPr id="1" name="">
+          <a:extLst>
+            <a:ext uri="{FF2B5EF4-FFF2-40B4-BE49-F238E27FC236}">
+              <a16:creationId xmlns:a16="http://schemas.microsoft.com/office/drawing/2014/main" id="{F2D1B7EA-06B1-AEA2-12A9-957930393C6A}"/>
+            </a:ext>
+          </a:extLst>
+        </p:cNvPr>
+        <p:cNvGrpSpPr/>
+        <p:nvPr/>
+      </p:nvGrpSpPr>
+      <p:grpSpPr>
+        <a:xfrm>
+          <a:off x="0" y="0"/>
+          <a:ext cx="0" cy="0"/>
+          <a:chOff x="0" y="0"/>
+          <a:chExt cx="0" cy="0"/>
+        </a:xfrm>
+      </p:grpSpPr>
+      <p:sp>
+        <p:nvSpPr>
+          <p:cNvPr id="9" name="Slide Number Placeholder 8">
+            <a:extLst>
+              <a:ext uri="{FF2B5EF4-FFF2-40B4-BE49-F238E27FC236}">
+                <a16:creationId xmlns:a16="http://schemas.microsoft.com/office/drawing/2014/main" id="{38DA8091-C8D7-6E7B-EB1E-EDBFB262101B}"/>
+              </a:ext>
+            </a:extLst>
+          </p:cNvPr>
+          <p:cNvSpPr>
+            <a:spLocks noGrp="1"/>
+          </p:cNvSpPr>
+          <p:nvPr>
+            <p:ph type="sldNum" sz="quarter" idx="11"/>
+          </p:nvPr>
+        </p:nvSpPr>
+        <p:spPr/>
+        <p:txBody>
+          <a:bodyPr/>
+          <a:lstStyle/>
+          <a:p>
+            <a:fld id="{523A240F-EAFE-E84F-B44C-6D7A08E0E409}" type="slidenum">
+              <a:rPr lang="en-US" smtClean="0"/>
+              <a:pPr/>
+              <a:t>19</a:t>
+            </a:fld>
+            <a:endParaRPr lang="en-US"/>
+          </a:p>
+        </p:txBody>
+      </p:sp>
+      <p:sp>
+        <p:nvSpPr>
+          <p:cNvPr id="3" name="Footer Placeholder 2">
+            <a:extLst>
+              <a:ext uri="{FF2B5EF4-FFF2-40B4-BE49-F238E27FC236}">
+                <a16:creationId xmlns:a16="http://schemas.microsoft.com/office/drawing/2014/main" id="{D993A441-3F4E-2808-42F3-E014F5CB6790}"/>
+              </a:ext>
+            </a:extLst>
+          </p:cNvPr>
+          <p:cNvSpPr>
+            <a:spLocks noGrp="1"/>
+          </p:cNvSpPr>
+          <p:nvPr>
+            <p:ph type="ftr" sz="quarter" idx="10"/>
+          </p:nvPr>
+        </p:nvSpPr>
+        <p:spPr/>
+        <p:txBody>
+          <a:bodyPr/>
+          <a:lstStyle/>
+          <a:p>
+            <a:r>
+              <a:rPr lang="en-US"/>
+              <a:t>MSK Confidential — do not distribute</a:t>
+            </a:r>
+          </a:p>
+        </p:txBody>
+      </p:sp>
+      <p:sp>
+        <p:nvSpPr>
+          <p:cNvPr id="13" name="Text Placeholder 12">
+            <a:extLst>
+              <a:ext uri="{FF2B5EF4-FFF2-40B4-BE49-F238E27FC236}">
+                <a16:creationId xmlns:a16="http://schemas.microsoft.com/office/drawing/2014/main" id="{0A852323-F1D5-94B3-1EE9-38CDD12AC03A}"/>
+              </a:ext>
+            </a:extLst>
+          </p:cNvPr>
+          <p:cNvSpPr>
+            <a:spLocks noGrp="1"/>
+          </p:cNvSpPr>
+          <p:nvPr>
+            <p:ph type="body" sz="half" idx="2"/>
+          </p:nvPr>
+        </p:nvSpPr>
+        <p:spPr/>
+        <p:txBody>
+          <a:bodyPr/>
+          <a:lstStyle/>
+          <a:p>
+            <a:endParaRPr lang="en-US"/>
+          </a:p>
+        </p:txBody>
+      </p:sp>
+      <p:sp>
+        <p:nvSpPr>
+          <p:cNvPr id="11" name="Title 10">
+            <a:extLst>
+              <a:ext uri="{FF2B5EF4-FFF2-40B4-BE49-F238E27FC236}">
+                <a16:creationId xmlns:a16="http://schemas.microsoft.com/office/drawing/2014/main" id="{34693915-684E-CA6E-4764-8C4648A92DDC}"/>
+              </a:ext>
+            </a:extLst>
+          </p:cNvPr>
+          <p:cNvSpPr>
+            <a:spLocks noGrp="1"/>
+          </p:cNvSpPr>
+          <p:nvPr>
+            <p:ph type="title"/>
+          </p:nvPr>
+        </p:nvSpPr>
+        <p:spPr/>
+        <p:txBody>
+          <a:bodyPr/>
+          <a:lstStyle/>
+          <a:p>
+            <a:r>
+              <a:rPr lang="en-US" dirty="0"/>
+              <a:t>Potential study limitations</a:t>
+            </a:r>
+          </a:p>
+        </p:txBody>
+      </p:sp>
+      <p:sp>
+        <p:nvSpPr>
+          <p:cNvPr id="4" name="Rectangle 1">
+            <a:extLst>
+              <a:ext uri="{FF2B5EF4-FFF2-40B4-BE49-F238E27FC236}">
+                <a16:creationId xmlns:a16="http://schemas.microsoft.com/office/drawing/2014/main" id="{DFFA3AD3-E044-E044-F818-DC0FFA5F615A}"/>
+              </a:ext>
+            </a:extLst>
+          </p:cNvPr>
+          <p:cNvSpPr>
+            <a:spLocks noGrp="1" noChangeArrowheads="1"/>
+          </p:cNvSpPr>
+          <p:nvPr>
+            <p:ph idx="1"/>
+          </p:nvPr>
+        </p:nvSpPr>
+        <p:spPr bwMode="auto">
+          <a:xfrm>
+            <a:off x="512763" y="1902542"/>
+            <a:ext cx="10382545" cy="923330"/>
+          </a:xfrm>
+          <a:prstGeom prst="rect">
+            <a:avLst/>
+          </a:prstGeom>
+          <a:noFill/>
+          <a:ln>
+            <a:noFill/>
+          </a:ln>
+          <a:effectLst/>
+          <a:extLst>
+            <a:ext uri="{909E8E84-426E-40DD-AFC4-6F175D3DCCD1}">
+              <a14:hiddenFill xmlns:a14="http://schemas.microsoft.com/office/drawing/2010/main">
+                <a:solidFill>
+                  <a:schemeClr val="accent1"/>
+                </a:solidFill>
+              </a14:hiddenFill>
+            </a:ext>
+            <a:ext uri="{91240B29-F687-4F45-9708-019B960494DF}">
+              <a14:hiddenLine xmlns:a14="http://schemas.microsoft.com/office/drawing/2010/main" w="9525">
+                <a:solidFill>
+                  <a:schemeClr val="tx1"/>
+                </a:solidFill>
+                <a:miter lim="800000"/>
+                <a:headEnd/>
+                <a:tailEnd/>
+              </a14:hiddenLine>
+            </a:ext>
+            <a:ext uri="{AF507438-7753-43E0-B8FC-AC1667EBCBE1}">
+              <a14:hiddenEffects xmlns:a14="http://schemas.microsoft.com/office/drawing/2010/main">
+                <a:effectLst>
+                  <a:outerShdw dist="35921" dir="2700000" algn="ctr" rotWithShape="0">
+                    <a:schemeClr val="bg2"/>
+                  </a:outerShdw>
+                </a:effectLst>
+              </a14:hiddenEffects>
+            </a:ext>
+          </a:extLst>
+        </p:spPr>
+        <p:txBody>
+          <a:bodyPr vert="horz" wrap="square" lIns="91440" tIns="45720" rIns="91440" bIns="45720" numCol="1" anchor="ctr" anchorCtr="0" compatLnSpc="1">
+            <a:prstTxWarp prst="textNoShape">
+              <a:avLst/>
+            </a:prstTxWarp>
+            <a:spAutoFit/>
+          </a:bodyPr>
+          <a:lstStyle/>
+          <a:p>
+            <a:pPr marL="285750" marR="0" lvl="0" indent="-285750" algn="l" defTabSz="914400" rtl="0" eaLnBrk="0" fontAlgn="base" latinLnBrk="0" hangingPunct="0">
+              <a:lnSpc>
+                <a:spcPct val="100000"/>
+              </a:lnSpc>
+              <a:spcBef>
+                <a:spcPct val="0"/>
+              </a:spcBef>
+              <a:spcAft>
+                <a:spcPct val="0"/>
+              </a:spcAft>
+              <a:buClrTx/>
+              <a:buSzTx/>
+              <a:buFont typeface="Arial" panose="020B0604020202020204" pitchFamily="34" charset="0"/>
+              <a:buChar char="•"/>
+              <a:tabLst/>
+            </a:pPr>
+            <a:r>
               <a:rPr kumimoji="0" lang="en-US" altLang="en-US" sz="1800" b="0" i="0" u="none" strike="noStrike" cap="none" normalizeH="0" baseline="0" dirty="0">
                 <a:ln>
                   <a:noFill/>
@@ -36519,7 +36887,69 @@
                 <a:effectLst/>
                 <a:latin typeface="Arial" panose="020B0604020202020204" pitchFamily="34" charset="0"/>
               </a:rPr>
-              <a:t>Mitigates variability driven by differences in staff training and experience</a:t>
+              <a:t>No universally accepted gold standard exists for evaluating clinical summarization </a:t>
+            </a:r>
+          </a:p>
+          <a:p>
+            <a:pPr marL="285750" marR="0" lvl="0" indent="-285750" algn="l" defTabSz="914400" rtl="0" eaLnBrk="0" fontAlgn="base" latinLnBrk="0" hangingPunct="0">
+              <a:lnSpc>
+                <a:spcPct val="100000"/>
+              </a:lnSpc>
+              <a:spcBef>
+                <a:spcPct val="0"/>
+              </a:spcBef>
+              <a:spcAft>
+                <a:spcPct val="0"/>
+              </a:spcAft>
+              <a:buClrTx/>
+              <a:buSzTx/>
+              <a:buFont typeface="Arial" panose="020B0604020202020204" pitchFamily="34" charset="0"/>
+              <a:buChar char="•"/>
+              <a:tabLst/>
+            </a:pPr>
+            <a:r>
+              <a:rPr kumimoji="0" lang="en-US" altLang="en-US" sz="1800" b="0" i="0" u="none" strike="noStrike" cap="none" normalizeH="0" baseline="0" dirty="0">
+                <a:ln>
+                  <a:noFill/>
+                </a:ln>
+                <a:solidFill>
+                  <a:schemeClr val="tx2"/>
+                </a:solidFill>
+                <a:effectLst/>
+                <a:latin typeface="Arial" panose="020B0604020202020204" pitchFamily="34" charset="0"/>
+              </a:rPr>
+              <a:t>Automated metrics may not reflect clinical correctness or completeness</a:t>
+            </a:r>
+          </a:p>
+          <a:p>
+            <a:pPr marL="285750" marR="0" lvl="0" indent="-285750" algn="l" defTabSz="914400" rtl="0" eaLnBrk="0" fontAlgn="base" latinLnBrk="0" hangingPunct="0">
+              <a:lnSpc>
+                <a:spcPct val="100000"/>
+              </a:lnSpc>
+              <a:spcBef>
+                <a:spcPct val="0"/>
+              </a:spcBef>
+              <a:spcAft>
+                <a:spcPct val="0"/>
+              </a:spcAft>
+              <a:buClrTx/>
+              <a:buSzTx/>
+              <a:buFont typeface="Arial" panose="020B0604020202020204" pitchFamily="34" charset="0"/>
+              <a:buChar char="•"/>
+              <a:tabLst/>
+            </a:pPr>
+            <a:r>
+              <a:rPr kumimoji="0" lang="en-US" altLang="en-US" sz="1800" b="0" i="0" u="none" strike="noStrike" cap="none" normalizeH="0" baseline="0" dirty="0">
+                <a:ln>
+                  <a:noFill/>
+                </a:ln>
+                <a:solidFill>
+                  <a:schemeClr val="tx2"/>
+                </a:solidFill>
+                <a:effectLst/>
+                <a:latin typeface="Arial" panose="020B0604020202020204" pitchFamily="34" charset="0"/>
+              </a:rPr>
+              <a:t>Human evaluation introduces subjectivity and inter-reviewer variability</a:t>
             </a:r>
           </a:p>
         </p:txBody>
@@ -36527,7 +36957,7 @@
     </p:spTree>
     <p:extLst>
       <p:ext uri="{BB962C8B-B14F-4D97-AF65-F5344CB8AC3E}">
-        <p14:creationId xmlns:p14="http://schemas.microsoft.com/office/powerpoint/2010/main" val="4038599619"/>
+        <p14:creationId xmlns:p14="http://schemas.microsoft.com/office/powerpoint/2010/main" val="1872415169"/>
       </p:ext>
     </p:extLst>
   </p:cSld>
@@ -36715,7 +37145,7 @@
           <a:p>
             <a:r>
               <a:rPr lang="en-US" dirty="0"/>
-              <a:t>Synthesis of oncologic data for breast cancer surgical consultations is time intensive, error prone, and variable across clinicians</a:t>
+              <a:t>Synthesis of oncologic data for breast cancer surgical consultations is time intensive, error prone, and variable across clinicians.</a:t>
             </a:r>
           </a:p>
           <a:p>
@@ -36724,7 +37154,7 @@
           <a:p>
             <a:r>
               <a:rPr lang="en-US" dirty="0"/>
-              <a:t>Clinical information is fragmented across radiology and pathology reports, creating significant cognitive burden</a:t>
+              <a:t>Clinical information is fragmented across radiology and pathology reports, creating significant cognitive burden.</a:t>
             </a:r>
           </a:p>
           <a:p>
@@ -36752,345 +37182,6 @@
 </file>
 
 <file path=ppt/slides/slide20.xml><?xml version="1.0" encoding="utf-8"?>
-<p:sld xmlns:a="http://schemas.openxmlformats.org/drawingml/2006/main" xmlns:r="http://schemas.openxmlformats.org/officeDocument/2006/relationships" xmlns:p="http://schemas.openxmlformats.org/presentationml/2006/main">
-  <p:cSld>
-    <p:spTree>
-      <p:nvGrpSpPr>
-        <p:cNvPr id="1" name="">
-          <a:extLst>
-            <a:ext uri="{FF2B5EF4-FFF2-40B4-BE49-F238E27FC236}">
-              <a16:creationId xmlns:a16="http://schemas.microsoft.com/office/drawing/2014/main" id="{F2D1B7EA-06B1-AEA2-12A9-957930393C6A}"/>
-            </a:ext>
-          </a:extLst>
-        </p:cNvPr>
-        <p:cNvGrpSpPr/>
-        <p:nvPr/>
-      </p:nvGrpSpPr>
-      <p:grpSpPr>
-        <a:xfrm>
-          <a:off x="0" y="0"/>
-          <a:ext cx="0" cy="0"/>
-          <a:chOff x="0" y="0"/>
-          <a:chExt cx="0" cy="0"/>
-        </a:xfrm>
-      </p:grpSpPr>
-      <p:sp>
-        <p:nvSpPr>
-          <p:cNvPr id="9" name="Slide Number Placeholder 8">
-            <a:extLst>
-              <a:ext uri="{FF2B5EF4-FFF2-40B4-BE49-F238E27FC236}">
-                <a16:creationId xmlns:a16="http://schemas.microsoft.com/office/drawing/2014/main" id="{38DA8091-C8D7-6E7B-EB1E-EDBFB262101B}"/>
-              </a:ext>
-            </a:extLst>
-          </p:cNvPr>
-          <p:cNvSpPr>
-            <a:spLocks noGrp="1"/>
-          </p:cNvSpPr>
-          <p:nvPr>
-            <p:ph type="sldNum" sz="quarter" idx="11"/>
-          </p:nvPr>
-        </p:nvSpPr>
-        <p:spPr/>
-        <p:txBody>
-          <a:bodyPr/>
-          <a:lstStyle/>
-          <a:p>
-            <a:fld id="{523A240F-EAFE-E84F-B44C-6D7A08E0E409}" type="slidenum">
-              <a:rPr lang="en-US" smtClean="0"/>
-              <a:pPr/>
-              <a:t>20</a:t>
-            </a:fld>
-            <a:endParaRPr lang="en-US"/>
-          </a:p>
-        </p:txBody>
-      </p:sp>
-      <p:sp>
-        <p:nvSpPr>
-          <p:cNvPr id="3" name="Footer Placeholder 2">
-            <a:extLst>
-              <a:ext uri="{FF2B5EF4-FFF2-40B4-BE49-F238E27FC236}">
-                <a16:creationId xmlns:a16="http://schemas.microsoft.com/office/drawing/2014/main" id="{D993A441-3F4E-2808-42F3-E014F5CB6790}"/>
-              </a:ext>
-            </a:extLst>
-          </p:cNvPr>
-          <p:cNvSpPr>
-            <a:spLocks noGrp="1"/>
-          </p:cNvSpPr>
-          <p:nvPr>
-            <p:ph type="ftr" sz="quarter" idx="10"/>
-          </p:nvPr>
-        </p:nvSpPr>
-        <p:spPr/>
-        <p:txBody>
-          <a:bodyPr/>
-          <a:lstStyle/>
-          <a:p>
-            <a:r>
-              <a:rPr lang="en-US"/>
-              <a:t>MSK Confidential — do not distribute</a:t>
-            </a:r>
-          </a:p>
-        </p:txBody>
-      </p:sp>
-      <p:sp>
-        <p:nvSpPr>
-          <p:cNvPr id="13" name="Text Placeholder 12">
-            <a:extLst>
-              <a:ext uri="{FF2B5EF4-FFF2-40B4-BE49-F238E27FC236}">
-                <a16:creationId xmlns:a16="http://schemas.microsoft.com/office/drawing/2014/main" id="{0A852323-F1D5-94B3-1EE9-38CDD12AC03A}"/>
-              </a:ext>
-            </a:extLst>
-          </p:cNvPr>
-          <p:cNvSpPr>
-            <a:spLocks noGrp="1"/>
-          </p:cNvSpPr>
-          <p:nvPr>
-            <p:ph type="body" sz="half" idx="2"/>
-          </p:nvPr>
-        </p:nvSpPr>
-        <p:spPr/>
-        <p:txBody>
-          <a:bodyPr/>
-          <a:lstStyle/>
-          <a:p>
-            <a:endParaRPr lang="en-US"/>
-          </a:p>
-        </p:txBody>
-      </p:sp>
-      <p:sp>
-        <p:nvSpPr>
-          <p:cNvPr id="11" name="Title 10">
-            <a:extLst>
-              <a:ext uri="{FF2B5EF4-FFF2-40B4-BE49-F238E27FC236}">
-                <a16:creationId xmlns:a16="http://schemas.microsoft.com/office/drawing/2014/main" id="{34693915-684E-CA6E-4764-8C4648A92DDC}"/>
-              </a:ext>
-            </a:extLst>
-          </p:cNvPr>
-          <p:cNvSpPr>
-            <a:spLocks noGrp="1"/>
-          </p:cNvSpPr>
-          <p:nvPr>
-            <p:ph type="title"/>
-          </p:nvPr>
-        </p:nvSpPr>
-        <p:spPr/>
-        <p:txBody>
-          <a:bodyPr/>
-          <a:lstStyle/>
-          <a:p>
-            <a:r>
-              <a:rPr lang="en-US" dirty="0"/>
-              <a:t>Potential study limitations</a:t>
-            </a:r>
-          </a:p>
-        </p:txBody>
-      </p:sp>
-      <p:sp>
-        <p:nvSpPr>
-          <p:cNvPr id="4" name="Rectangle 1">
-            <a:extLst>
-              <a:ext uri="{FF2B5EF4-FFF2-40B4-BE49-F238E27FC236}">
-                <a16:creationId xmlns:a16="http://schemas.microsoft.com/office/drawing/2014/main" id="{DFFA3AD3-E044-E044-F818-DC0FFA5F615A}"/>
-              </a:ext>
-            </a:extLst>
-          </p:cNvPr>
-          <p:cNvSpPr>
-            <a:spLocks noGrp="1" noChangeArrowheads="1"/>
-          </p:cNvSpPr>
-          <p:nvPr>
-            <p:ph idx="1"/>
-          </p:nvPr>
-        </p:nvSpPr>
-        <p:spPr bwMode="auto">
-          <a:xfrm>
-            <a:off x="512763" y="1625544"/>
-            <a:ext cx="10382545" cy="1477328"/>
-          </a:xfrm>
-          <a:prstGeom prst="rect">
-            <a:avLst/>
-          </a:prstGeom>
-          <a:noFill/>
-          <a:ln>
-            <a:noFill/>
-          </a:ln>
-          <a:effectLst/>
-          <a:extLst>
-            <a:ext uri="{909E8E84-426E-40DD-AFC4-6F175D3DCCD1}">
-              <a14:hiddenFill xmlns:a14="http://schemas.microsoft.com/office/drawing/2010/main">
-                <a:solidFill>
-                  <a:schemeClr val="accent1"/>
-                </a:solidFill>
-              </a14:hiddenFill>
-            </a:ext>
-            <a:ext uri="{91240B29-F687-4F45-9708-019B960494DF}">
-              <a14:hiddenLine xmlns:a14="http://schemas.microsoft.com/office/drawing/2010/main" w="9525">
-                <a:solidFill>
-                  <a:schemeClr val="tx1"/>
-                </a:solidFill>
-                <a:miter lim="800000"/>
-                <a:headEnd/>
-                <a:tailEnd/>
-              </a14:hiddenLine>
-            </a:ext>
-            <a:ext uri="{AF507438-7753-43E0-B8FC-AC1667EBCBE1}">
-              <a14:hiddenEffects xmlns:a14="http://schemas.microsoft.com/office/drawing/2010/main">
-                <a:effectLst>
-                  <a:outerShdw dist="35921" dir="2700000" algn="ctr" rotWithShape="0">
-                    <a:schemeClr val="bg2"/>
-                  </a:outerShdw>
-                </a:effectLst>
-              </a14:hiddenEffects>
-            </a:ext>
-          </a:extLst>
-        </p:spPr>
-        <p:txBody>
-          <a:bodyPr vert="horz" wrap="square" lIns="91440" tIns="45720" rIns="91440" bIns="45720" numCol="1" anchor="ctr" anchorCtr="0" compatLnSpc="1">
-            <a:prstTxWarp prst="textNoShape">
-              <a:avLst/>
-            </a:prstTxWarp>
-            <a:spAutoFit/>
-          </a:bodyPr>
-          <a:lstStyle/>
-          <a:p>
-            <a:pPr marL="285750" marR="0" lvl="0" indent="-285750" algn="l" defTabSz="914400" rtl="0" eaLnBrk="0" fontAlgn="base" latinLnBrk="0" hangingPunct="0">
-              <a:lnSpc>
-                <a:spcPct val="100000"/>
-              </a:lnSpc>
-              <a:spcBef>
-                <a:spcPct val="0"/>
-              </a:spcBef>
-              <a:spcAft>
-                <a:spcPct val="0"/>
-              </a:spcAft>
-              <a:buClrTx/>
-              <a:buSzTx/>
-              <a:buFont typeface="Arial" panose="020B0604020202020204" pitchFamily="34" charset="0"/>
-              <a:buChar char="•"/>
-              <a:tabLst/>
-            </a:pPr>
-            <a:r>
-              <a:rPr kumimoji="0" lang="en-US" altLang="en-US" sz="1800" b="0" i="0" u="none" strike="noStrike" cap="none" normalizeH="0" baseline="0" dirty="0">
-                <a:ln>
-                  <a:noFill/>
-                </a:ln>
-                <a:solidFill>
-                  <a:schemeClr val="tx2"/>
-                </a:solidFill>
-                <a:effectLst/>
-                <a:latin typeface="Arial" panose="020B0604020202020204" pitchFamily="34" charset="0"/>
-              </a:rPr>
-              <a:t>No universally accepted gold standard exists for evaluating clinical summarization beyond lexical overlap metrics</a:t>
-            </a:r>
-          </a:p>
-          <a:p>
-            <a:pPr marL="285750" marR="0" lvl="0" indent="-285750" algn="l" defTabSz="914400" rtl="0" eaLnBrk="0" fontAlgn="base" latinLnBrk="0" hangingPunct="0">
-              <a:lnSpc>
-                <a:spcPct val="100000"/>
-              </a:lnSpc>
-              <a:spcBef>
-                <a:spcPct val="0"/>
-              </a:spcBef>
-              <a:spcAft>
-                <a:spcPct val="0"/>
-              </a:spcAft>
-              <a:buClrTx/>
-              <a:buSzTx/>
-              <a:buFont typeface="Arial" panose="020B0604020202020204" pitchFamily="34" charset="0"/>
-              <a:buChar char="•"/>
-              <a:tabLst/>
-            </a:pPr>
-            <a:r>
-              <a:rPr kumimoji="0" lang="en-US" altLang="en-US" sz="1800" b="0" i="0" u="none" strike="noStrike" cap="none" normalizeH="0" baseline="0" dirty="0">
-                <a:ln>
-                  <a:noFill/>
-                </a:ln>
-                <a:solidFill>
-                  <a:schemeClr val="tx2"/>
-                </a:solidFill>
-                <a:effectLst/>
-                <a:latin typeface="Arial" panose="020B0604020202020204" pitchFamily="34" charset="0"/>
-              </a:rPr>
-              <a:t>Automated metrics may not reflect clinical correctness or completeness</a:t>
-            </a:r>
-          </a:p>
-          <a:p>
-            <a:pPr marL="285750" marR="0" lvl="0" indent="-285750" algn="l" defTabSz="914400" rtl="0" eaLnBrk="0" fontAlgn="base" latinLnBrk="0" hangingPunct="0">
-              <a:lnSpc>
-                <a:spcPct val="100000"/>
-              </a:lnSpc>
-              <a:spcBef>
-                <a:spcPct val="0"/>
-              </a:spcBef>
-              <a:spcAft>
-                <a:spcPct val="0"/>
-              </a:spcAft>
-              <a:buClrTx/>
-              <a:buSzTx/>
-              <a:buFont typeface="Arial" panose="020B0604020202020204" pitchFamily="34" charset="0"/>
-              <a:buChar char="•"/>
-              <a:tabLst/>
-            </a:pPr>
-            <a:r>
-              <a:rPr kumimoji="0" lang="en-US" altLang="en-US" sz="1800" b="0" i="0" u="none" strike="noStrike" cap="none" normalizeH="0" baseline="0" dirty="0">
-                <a:ln>
-                  <a:noFill/>
-                </a:ln>
-                <a:solidFill>
-                  <a:schemeClr val="tx2"/>
-                </a:solidFill>
-                <a:effectLst/>
-                <a:latin typeface="Arial" panose="020B0604020202020204" pitchFamily="34" charset="0"/>
-              </a:rPr>
-              <a:t>Reference summaries may themselves be variable or incomplete</a:t>
-            </a:r>
-          </a:p>
-          <a:p>
-            <a:pPr marL="285750" marR="0" lvl="0" indent="-285750" algn="l" defTabSz="914400" rtl="0" eaLnBrk="0" fontAlgn="base" latinLnBrk="0" hangingPunct="0">
-              <a:lnSpc>
-                <a:spcPct val="100000"/>
-              </a:lnSpc>
-              <a:spcBef>
-                <a:spcPct val="0"/>
-              </a:spcBef>
-              <a:spcAft>
-                <a:spcPct val="0"/>
-              </a:spcAft>
-              <a:buClrTx/>
-              <a:buSzTx/>
-              <a:buFont typeface="Arial" panose="020B0604020202020204" pitchFamily="34" charset="0"/>
-              <a:buChar char="•"/>
-              <a:tabLst/>
-            </a:pPr>
-            <a:r>
-              <a:rPr kumimoji="0" lang="en-US" altLang="en-US" sz="1800" b="0" i="0" u="none" strike="noStrike" cap="none" normalizeH="0" baseline="0" dirty="0">
-                <a:ln>
-                  <a:noFill/>
-                </a:ln>
-                <a:solidFill>
-                  <a:schemeClr val="tx2"/>
-                </a:solidFill>
-                <a:effectLst/>
-                <a:latin typeface="Arial" panose="020B0604020202020204" pitchFamily="34" charset="0"/>
-              </a:rPr>
-              <a:t>Human evaluation introduces subjectivity and inter-reviewer variability</a:t>
-            </a:r>
-          </a:p>
-        </p:txBody>
-      </p:sp>
-    </p:spTree>
-    <p:extLst>
-      <p:ext uri="{BB962C8B-B14F-4D97-AF65-F5344CB8AC3E}">
-        <p14:creationId xmlns:p14="http://schemas.microsoft.com/office/powerpoint/2010/main" val="1872415169"/>
-      </p:ext>
-    </p:extLst>
-  </p:cSld>
-  <p:clrMapOvr>
-    <a:masterClrMapping/>
-  </p:clrMapOvr>
-</p:sld>
-</file>
-
-<file path=ppt/slides/slide21.xml><?xml version="1.0" encoding="utf-8"?>
 <p:sld xmlns:a="http://schemas.openxmlformats.org/drawingml/2006/main" xmlns:r="http://schemas.openxmlformats.org/officeDocument/2006/relationships" xmlns:p="http://schemas.openxmlformats.org/presentationml/2006/main">
   <p:cSld>
     <p:spTree>
@@ -37137,7 +37228,7 @@
             <a:fld id="{523A240F-EAFE-E84F-B44C-6D7A08E0E409}" type="slidenum">
               <a:rPr lang="en-US" smtClean="0"/>
               <a:pPr/>
-              <a:t>21</a:t>
+              <a:t>20</a:t>
             </a:fld>
             <a:endParaRPr lang="en-US"/>
           </a:p>
@@ -37192,7 +37283,7 @@
           <a:bodyPr/>
           <a:lstStyle/>
           <a:p>
-            <a:endParaRPr lang="en-US"/>
+            <a:endParaRPr lang="en-US" dirty="0"/>
           </a:p>
         </p:txBody>
       </p:sp>
@@ -37242,8 +37333,8 @@
         </p:nvSpPr>
         <p:spPr bwMode="auto">
           <a:xfrm>
-            <a:off x="512763" y="1782420"/>
-            <a:ext cx="10274057" cy="1477328"/>
+            <a:off x="512763" y="1643921"/>
+            <a:ext cx="10274057" cy="1754326"/>
           </a:xfrm>
           <a:prstGeom prst="rect">
             <a:avLst/>
@@ -37349,7 +37440,29 @@
                 <a:effectLst/>
                 <a:latin typeface="Arial" panose="020B0604020202020204" pitchFamily="34" charset="0"/>
               </a:rPr>
-              <a:t>The tool is designed to augment—not replace—clinical judgment</a:t>
+              <a:t>The tool is designed to augment</a:t>
+            </a:r>
+            <a:r>
+              <a:rPr lang="en-US" altLang="en-US" dirty="0">
+                <a:solidFill>
+                  <a:schemeClr val="tx2"/>
+                </a:solidFill>
+                <a:latin typeface="Arial" panose="020B0604020202020204" pitchFamily="34" charset="0"/>
+              </a:rPr>
+              <a:t> </a:t>
+            </a:r>
+            <a:r>
+              <a:rPr kumimoji="0" lang="en-US" altLang="en-US" sz="1800" b="0" i="0" u="none" strike="noStrike" cap="none" normalizeH="0" baseline="0" dirty="0">
+                <a:ln>
+                  <a:noFill/>
+                </a:ln>
+                <a:solidFill>
+                  <a:schemeClr val="tx2"/>
+                </a:solidFill>
+                <a:effectLst/>
+                <a:latin typeface="Arial" panose="020B0604020202020204" pitchFamily="34" charset="0"/>
+              </a:rPr>
+              <a:t>clinical judgment, not replace</a:t>
             </a:r>
           </a:p>
           <a:p>
@@ -37380,39 +37493,39 @@
                 <a:effectLst/>
                 <a:latin typeface="Arial" panose="020B0604020202020204" pitchFamily="34" charset="0"/>
               </a:rPr>
-              <a:t>Staff must retain competency in independently collecting oncologic histories</a:t>
-            </a:r>
-          </a:p>
-          <a:p>
-            <a:pPr marL="285750" marR="0" lvl="0" indent="-285750" algn="l" defTabSz="914400" rtl="0" eaLnBrk="0" fontAlgn="base" latinLnBrk="0" hangingPunct="0">
-              <a:lnSpc>
-                <a:spcPct val="100000"/>
-              </a:lnSpc>
+              <a:t>Clinical workflows should remain robust to system downtime or tool unavailability</a:t>
+            </a:r>
+          </a:p>
+          <a:p>
+            <a:pPr marL="285750" lvl="0" indent="-285750" eaLnBrk="0" fontAlgn="base" hangingPunct="0">
               <a:spcBef>
                 <a:spcPct val="0"/>
               </a:spcBef>
               <a:spcAft>
                 <a:spcPct val="0"/>
               </a:spcAft>
-              <a:buClrTx/>
-              <a:buSzTx/>
               <a:buFont typeface="Arial" panose="020B0604020202020204" pitchFamily="34" charset="0"/>
               <a:buChar char="•"/>
-              <a:tabLst/>
             </a:pPr>
             <a:r>
-              <a:rPr kumimoji="0" lang="en-US" altLang="en-US" sz="1800" b="0" i="0" u="none" strike="noStrike" cap="none" normalizeH="0" baseline="0" dirty="0">
-                <a:ln>
-                  <a:noFill/>
-                </a:ln>
+              <a:rPr lang="en-US" altLang="en-US" dirty="0">
                 <a:solidFill>
                   <a:schemeClr val="tx2"/>
                 </a:solidFill>
-                <a:effectLst/>
                 <a:latin typeface="Arial" panose="020B0604020202020204" pitchFamily="34" charset="0"/>
               </a:rPr>
-              <a:t>Clinical workflows should remain robust to system downtime or tool unavailability</a:t>
-            </a:r>
+              <a:t>Staff must retain competency in independently creating oncologic surgical consultation summaries</a:t>
+            </a:r>
+            <a:endParaRPr kumimoji="0" lang="en-US" altLang="en-US" sz="1800" b="0" i="0" u="none" strike="noStrike" cap="none" normalizeH="0" baseline="0" dirty="0">
+              <a:ln>
+                <a:noFill/>
+              </a:ln>
+              <a:solidFill>
+                <a:schemeClr val="tx2"/>
+              </a:solidFill>
+              <a:effectLst/>
+              <a:latin typeface="Arial" panose="020B0604020202020204" pitchFamily="34" charset="0"/>
+            </a:endParaRPr>
           </a:p>
         </p:txBody>
       </p:sp>
@@ -37420,6 +37533,211 @@
     <p:extLst>
       <p:ext uri="{BB962C8B-B14F-4D97-AF65-F5344CB8AC3E}">
         <p14:creationId xmlns:p14="http://schemas.microsoft.com/office/powerpoint/2010/main" val="2824012289"/>
+      </p:ext>
+    </p:extLst>
+  </p:cSld>
+  <p:clrMapOvr>
+    <a:masterClrMapping/>
+  </p:clrMapOvr>
+</p:sld>
+</file>
+
+<file path=ppt/slides/slide21.xml><?xml version="1.0" encoding="utf-8"?>
+<p:sld xmlns:a="http://schemas.openxmlformats.org/drawingml/2006/main" xmlns:r="http://schemas.openxmlformats.org/officeDocument/2006/relationships" xmlns:p="http://schemas.openxmlformats.org/presentationml/2006/main">
+  <p:cSld>
+    <p:spTree>
+      <p:nvGrpSpPr>
+        <p:cNvPr id="1" name=""/>
+        <p:cNvGrpSpPr/>
+        <p:nvPr/>
+      </p:nvGrpSpPr>
+      <p:grpSpPr>
+        <a:xfrm>
+          <a:off x="0" y="0"/>
+          <a:ext cx="0" cy="0"/>
+          <a:chOff x="0" y="0"/>
+          <a:chExt cx="0" cy="0"/>
+        </a:xfrm>
+      </p:grpSpPr>
+      <p:sp>
+        <p:nvSpPr>
+          <p:cNvPr id="2" name="Slide Number Placeholder 1">
+            <a:extLst>
+              <a:ext uri="{FF2B5EF4-FFF2-40B4-BE49-F238E27FC236}">
+                <a16:creationId xmlns:a16="http://schemas.microsoft.com/office/drawing/2014/main" id="{A991CD03-A31A-E1F7-8435-09524F4729EA}"/>
+              </a:ext>
+            </a:extLst>
+          </p:cNvPr>
+          <p:cNvSpPr>
+            <a:spLocks noGrp="1"/>
+          </p:cNvSpPr>
+          <p:nvPr>
+            <p:ph type="sldNum" sz="quarter" idx="11"/>
+          </p:nvPr>
+        </p:nvSpPr>
+        <p:spPr/>
+        <p:txBody>
+          <a:bodyPr/>
+          <a:lstStyle/>
+          <a:p>
+            <a:fld id="{523A240F-EAFE-E84F-B44C-6D7A08E0E409}" type="slidenum">
+              <a:rPr lang="en-US" smtClean="0"/>
+              <a:t>21</a:t>
+            </a:fld>
+            <a:endParaRPr lang="en-US"/>
+          </a:p>
+        </p:txBody>
+      </p:sp>
+      <p:sp>
+        <p:nvSpPr>
+          <p:cNvPr id="3" name="Footer Placeholder 2">
+            <a:extLst>
+              <a:ext uri="{FF2B5EF4-FFF2-40B4-BE49-F238E27FC236}">
+                <a16:creationId xmlns:a16="http://schemas.microsoft.com/office/drawing/2014/main" id="{D2008BE4-98AF-C8DE-853A-1D12C4991DAD}"/>
+              </a:ext>
+            </a:extLst>
+          </p:cNvPr>
+          <p:cNvSpPr>
+            <a:spLocks noGrp="1"/>
+          </p:cNvSpPr>
+          <p:nvPr>
+            <p:ph type="ftr" sz="quarter" idx="10"/>
+          </p:nvPr>
+        </p:nvSpPr>
+        <p:spPr/>
+        <p:txBody>
+          <a:bodyPr/>
+          <a:lstStyle/>
+          <a:p>
+            <a:r>
+              <a:rPr lang="en-US"/>
+              <a:t>MSK Confidential — do not distribute</a:t>
+            </a:r>
+          </a:p>
+        </p:txBody>
+      </p:sp>
+      <p:sp>
+        <p:nvSpPr>
+          <p:cNvPr id="4" name="Text Placeholder 3">
+            <a:extLst>
+              <a:ext uri="{FF2B5EF4-FFF2-40B4-BE49-F238E27FC236}">
+                <a16:creationId xmlns:a16="http://schemas.microsoft.com/office/drawing/2014/main" id="{812BDDF0-2064-6DF1-F234-67A120798E36}"/>
+              </a:ext>
+            </a:extLst>
+          </p:cNvPr>
+          <p:cNvSpPr>
+            <a:spLocks noGrp="1"/>
+          </p:cNvSpPr>
+          <p:nvPr>
+            <p:ph type="body" sz="half" idx="2"/>
+          </p:nvPr>
+        </p:nvSpPr>
+        <p:spPr/>
+        <p:txBody>
+          <a:bodyPr/>
+          <a:lstStyle/>
+          <a:p>
+            <a:endParaRPr lang="en-US"/>
+          </a:p>
+        </p:txBody>
+      </p:sp>
+      <p:sp>
+        <p:nvSpPr>
+          <p:cNvPr id="5" name="Title 4">
+            <a:extLst>
+              <a:ext uri="{FF2B5EF4-FFF2-40B4-BE49-F238E27FC236}">
+                <a16:creationId xmlns:a16="http://schemas.microsoft.com/office/drawing/2014/main" id="{F16ADB46-4744-3BD1-5FFB-00F2AED01542}"/>
+              </a:ext>
+            </a:extLst>
+          </p:cNvPr>
+          <p:cNvSpPr>
+            <a:spLocks noGrp="1"/>
+          </p:cNvSpPr>
+          <p:nvPr>
+            <p:ph type="title"/>
+          </p:nvPr>
+        </p:nvSpPr>
+        <p:spPr/>
+        <p:txBody>
+          <a:bodyPr/>
+          <a:lstStyle/>
+          <a:p>
+            <a:r>
+              <a:rPr lang="en-US" dirty="0"/>
+              <a:t>Future Research</a:t>
+            </a:r>
+          </a:p>
+        </p:txBody>
+      </p:sp>
+      <p:sp>
+        <p:nvSpPr>
+          <p:cNvPr id="6" name="Text Placeholder 5">
+            <a:extLst>
+              <a:ext uri="{FF2B5EF4-FFF2-40B4-BE49-F238E27FC236}">
+                <a16:creationId xmlns:a16="http://schemas.microsoft.com/office/drawing/2014/main" id="{B1F3F36A-6831-F269-B696-3AAA6EFD08C0}"/>
+              </a:ext>
+            </a:extLst>
+          </p:cNvPr>
+          <p:cNvSpPr>
+            <a:spLocks noGrp="1"/>
+          </p:cNvSpPr>
+          <p:nvPr>
+            <p:ph type="body" idx="12"/>
+          </p:nvPr>
+        </p:nvSpPr>
+        <p:spPr/>
+        <p:txBody>
+          <a:bodyPr/>
+          <a:lstStyle/>
+          <a:p>
+            <a:endParaRPr lang="en-US"/>
+          </a:p>
+        </p:txBody>
+      </p:sp>
+      <p:sp>
+        <p:nvSpPr>
+          <p:cNvPr id="7" name="Content Placeholder 6">
+            <a:extLst>
+              <a:ext uri="{FF2B5EF4-FFF2-40B4-BE49-F238E27FC236}">
+                <a16:creationId xmlns:a16="http://schemas.microsoft.com/office/drawing/2014/main" id="{5EBE4A91-5418-CF1E-5F18-028DC01D5466}"/>
+              </a:ext>
+            </a:extLst>
+          </p:cNvPr>
+          <p:cNvSpPr>
+            <a:spLocks noGrp="1"/>
+          </p:cNvSpPr>
+          <p:nvPr>
+            <p:ph idx="1"/>
+          </p:nvPr>
+        </p:nvSpPr>
+        <p:spPr/>
+        <p:txBody>
+          <a:bodyPr/>
+          <a:lstStyle/>
+          <a:p>
+            <a:r>
+              <a:rPr lang="en-US" dirty="0"/>
+              <a:t>Analyze and quantify features of source documents leading to reduced model performance</a:t>
+            </a:r>
+          </a:p>
+          <a:p>
+            <a:r>
+              <a:rPr lang="en-US" dirty="0"/>
+              <a:t>Quantify improvements in model performance following optimization strategies</a:t>
+            </a:r>
+          </a:p>
+          <a:p>
+            <a:r>
+              <a:rPr lang="en-US" dirty="0"/>
+              <a:t>Explore the efficacy of newer modalities in optimization, such as reinforcement learning</a:t>
+            </a:r>
+          </a:p>
+        </p:txBody>
+      </p:sp>
+    </p:spTree>
+    <p:extLst>
+      <p:ext uri="{BB962C8B-B14F-4D97-AF65-F5344CB8AC3E}">
+        <p14:creationId xmlns:p14="http://schemas.microsoft.com/office/powerpoint/2010/main" val="1889611801"/>
       </p:ext>
     </p:extLst>
   </p:cSld>
@@ -37463,12 +37781,6 @@
           </a:bodyPr>
           <a:lstStyle/>
           <a:p>
-            <a:r>
-              <a:rPr lang="en-US" dirty="0"/>
-              <a:t>What is an LLM?</a:t>
-            </a:r>
-          </a:p>
-          <a:p>
             <a:pPr marL="285750" indent="-285750">
               <a:buFont typeface="Arial" panose="020B0604020202020204" pitchFamily="34" charset="0"/>
               <a:buChar char="•"/>
@@ -37505,7 +37817,7 @@
             </a:pPr>
             <a:r>
               <a:rPr lang="en-US" dirty="0"/>
-              <a:t>Non-deterministic outputs (same input ≠ same output)"</a:t>
+              <a:t>Non-deterministic outputs (same input ≠ same output)</a:t>
             </a:r>
           </a:p>
           <a:p>
@@ -37562,7 +37874,7 @@
           <a:p>
             <a:r>
               <a:rPr lang="en-US" dirty="0"/>
-              <a:t>LLM Basic</a:t>
+              <a:t>What is a large language model (LLM)</a:t>
             </a:r>
           </a:p>
         </p:txBody>
@@ -37982,7 +38294,12 @@
             <p:ph type="title"/>
           </p:nvPr>
         </p:nvSpPr>
-        <p:spPr/>
+        <p:spPr>
+          <a:xfrm>
+            <a:off x="503788" y="930793"/>
+            <a:ext cx="11184423" cy="555813"/>
+          </a:xfrm>
+        </p:spPr>
         <p:txBody>
           <a:bodyPr/>
           <a:lstStyle/>
@@ -38038,7 +38355,12 @@
             <p:ph idx="1"/>
           </p:nvPr>
         </p:nvSpPr>
-        <p:spPr/>
+        <p:spPr>
+          <a:xfrm>
+            <a:off x="512064" y="1700783"/>
+            <a:ext cx="11184422" cy="5157217"/>
+          </a:xfrm>
+        </p:spPr>
         <p:txBody>
           <a:bodyPr/>
           <a:lstStyle/>
@@ -38058,19 +38380,17 @@
                 </a:solidFill>
                 <a:latin typeface="Arial" panose="020B0604020202020204" pitchFamily="34" charset="0"/>
               </a:rPr>
-              <a:t>Efficacy as compared to human generated summaries</a:t>
-            </a:r>
-          </a:p>
-          <a:p>
-            <a:pPr marL="285750" lvl="0" indent="-285750" eaLnBrk="0" fontAlgn="base" hangingPunct="0">
+              <a:t>LLMs have shown efficacy in clinical summarization tasks</a:t>
+            </a:r>
+          </a:p>
+          <a:p>
+            <a:pPr lvl="0" eaLnBrk="0" fontAlgn="base" hangingPunct="0">
               <a:spcBef>
                 <a:spcPct val="0"/>
               </a:spcBef>
               <a:spcAft>
                 <a:spcPct val="0"/>
               </a:spcAft>
-              <a:buFont typeface="Arial" panose="020B0604020202020204" pitchFamily="34" charset="0"/>
-              <a:buChar char="•"/>
             </a:pPr>
             <a:r>
               <a:rPr lang="en-US" altLang="en-US" dirty="0">
@@ -38079,7 +38399,7 @@
                 </a:solidFill>
                 <a:latin typeface="Arial" panose="020B0604020202020204" pitchFamily="34" charset="0"/>
               </a:rPr>
-              <a:t>Performance comparable to clinicians in clinical summarization tasks</a:t>
+              <a:t>- Performance comparable to clinicians</a:t>
             </a:r>
             <a:br>
               <a:rPr lang="en-US" altLang="en-US" dirty="0">
@@ -38109,43 +38429,6 @@
             </a:r>
           </a:p>
           <a:p>
-            <a:pPr marL="0" lvl="1" indent="0" eaLnBrk="0" fontAlgn="base" hangingPunct="0">
-              <a:spcBef>
-                <a:spcPct val="0"/>
-              </a:spcBef>
-              <a:spcAft>
-                <a:spcPct val="0"/>
-              </a:spcAft>
-              <a:buNone/>
-            </a:pPr>
-            <a:endParaRPr lang="en-US" altLang="en-US" i="1" dirty="0">
-              <a:solidFill>
-                <a:schemeClr val="tx1"/>
-              </a:solidFill>
-              <a:latin typeface="Arial" panose="020B0604020202020204" pitchFamily="34" charset="0"/>
-            </a:endParaRPr>
-          </a:p>
-          <a:p>
-            <a:r>
-              <a:rPr lang="en-US" dirty="0"/>
-              <a:t>However, LLM outputs may: </a:t>
-            </a:r>
-          </a:p>
-          <a:p>
-            <a:pPr lvl="1"/>
-            <a:r>
-              <a:rPr lang="en-US" dirty="0"/>
-              <a:t>Hallucinate unsupported clinical information </a:t>
-            </a:r>
-          </a:p>
-          <a:p>
-            <a:pPr lvl="1"/>
-            <a:r>
-              <a:rPr lang="en-US" dirty="0"/>
-              <a:t>Omit critical findings </a:t>
-            </a:r>
-          </a:p>
-          <a:p>
             <a:pPr marL="0" lvl="1" indent="0">
               <a:buNone/>
             </a:pPr>
@@ -38157,11 +38440,102 @@
             </a:pPr>
             <a:r>
               <a:rPr lang="en-US" dirty="0"/>
-              <a:t>Reliability is a primary barrier to clinical deployment, requires initial model eval and optimization</a:t>
-            </a:r>
-          </a:p>
-          <a:p>
+              <a:t>Prior to clinical deployment, safety and reliability of the model must be evaluated yet evidence supporting use in surgical oncology workflows is scarce</a:t>
+            </a:r>
+          </a:p>
+          <a:p>
+            <a:pPr lvl="1">
+              <a:buFontTx/>
+              <a:buChar char="-"/>
+            </a:pPr>
+            <a:r>
+              <a:rPr lang="en-US" dirty="0"/>
+              <a:t>Involves assessing model consistency and failure modes, particularly in edge cases</a:t>
+            </a:r>
+          </a:p>
+          <a:p>
+            <a:pPr lvl="1">
+              <a:buFontTx/>
+              <a:buChar char="-"/>
+            </a:pPr>
             <a:endParaRPr lang="en-US" dirty="0"/>
+          </a:p>
+          <a:p>
+            <a:pPr marL="0" lvl="1" indent="0">
+              <a:buNone/>
+            </a:pPr>
+            <a:r>
+              <a:rPr lang="en-US" dirty="0"/>
+              <a:t>Primary safety risk is that of hallucination or fabrication, which involves reporting data that is not supported by clinical documentation</a:t>
+            </a:r>
+          </a:p>
+          <a:p>
+            <a:pPr lvl="1">
+              <a:buFontTx/>
+              <a:buChar char="-"/>
+            </a:pPr>
+            <a:r>
+              <a:rPr lang="en-US" dirty="0"/>
+              <a:t>Approaches to mitigation may include (</a:t>
+            </a:r>
+            <a:r>
+              <a:rPr lang="en-US" dirty="0" err="1"/>
+              <a:t>Pulkundwar</a:t>
+            </a:r>
+            <a:r>
+              <a:rPr lang="en-US" dirty="0"/>
+              <a:t> et al., 2025, Zeba et al, 2025, Gerner et al, 2025):</a:t>
+            </a:r>
+          </a:p>
+          <a:p>
+            <a:pPr lvl="2">
+              <a:buFontTx/>
+              <a:buChar char="-"/>
+            </a:pPr>
+            <a:r>
+              <a:rPr lang="en-US" dirty="0"/>
+              <a:t>Fine tuning of feature weights and parameters</a:t>
+            </a:r>
+          </a:p>
+          <a:p>
+            <a:pPr lvl="2">
+              <a:buFontTx/>
+              <a:buChar char="-"/>
+            </a:pPr>
+            <a:r>
+              <a:rPr lang="en-US" dirty="0"/>
+              <a:t>Reinforcement learning with or without human feedback</a:t>
+            </a:r>
+          </a:p>
+          <a:p>
+            <a:pPr lvl="2">
+              <a:buFontTx/>
+              <a:buChar char="-"/>
+            </a:pPr>
+            <a:r>
+              <a:rPr lang="en-US" dirty="0"/>
+              <a:t>Prompt engineering including guardrails and specified structure of outputs</a:t>
+            </a:r>
+          </a:p>
+          <a:p>
+            <a:pPr lvl="2">
+              <a:buFontTx/>
+              <a:buChar char="-"/>
+            </a:pPr>
+            <a:r>
+              <a:rPr lang="en-US" dirty="0"/>
+              <a:t>RAG frameworks and context grounding with verification of values extracted </a:t>
+            </a:r>
+          </a:p>
+          <a:p>
+            <a:pPr lvl="2">
+              <a:buFontTx/>
+              <a:buChar char="-"/>
+            </a:pPr>
+            <a:r>
+              <a:rPr lang="en-US" dirty="0"/>
+              <a:t>Self-consistency checks</a:t>
+            </a:r>
           </a:p>
         </p:txBody>
       </p:sp>
@@ -38301,7 +38675,7 @@
         </p:nvSpPr>
         <p:spPr>
           <a:xfrm>
-            <a:off x="495513" y="1243583"/>
+            <a:off x="512064" y="1014983"/>
             <a:ext cx="11184423" cy="914400"/>
           </a:xfrm>
         </p:spPr>
@@ -38311,7 +38685,7 @@
           <a:p>
             <a:r>
               <a:rPr lang="en-US" dirty="0"/>
-              <a:t>Gap in Knowledge</a:t>
+              <a:t>Shortcomings in the literature</a:t>
             </a:r>
           </a:p>
         </p:txBody>
@@ -38337,49 +38711,18 @@
           <a:bodyPr/>
           <a:lstStyle/>
           <a:p>
-            <a:pPr marL="0" lvl="1" indent="0">
-              <a:buNone/>
-            </a:pPr>
-            <a:endParaRPr lang="en-US" dirty="0"/>
-          </a:p>
-          <a:p>
-            <a:pPr marL="0" lvl="1" indent="0">
-              <a:buNone/>
-            </a:pPr>
-            <a:r>
-              <a:rPr lang="en-US" b="1" dirty="0"/>
-              <a:t>Limitations in current evidence</a:t>
-            </a:r>
-          </a:p>
-          <a:p>
             <a:pPr lvl="1"/>
             <a:r>
               <a:rPr lang="en-US" dirty="0"/>
-              <a:t>Predominantly retrospective studies</a:t>
+              <a:t>Limited studies evaluating performance and safety as compared to humans of LLMs used in summarizing preoperative breast cancer workup </a:t>
             </a:r>
           </a:p>
           <a:p>
             <a:pPr lvl="1"/>
             <a:r>
               <a:rPr lang="en-US" dirty="0"/>
-              <a:t>Limited studies validating performance of LLMs in summarizing breast cancer workup for preoperative patients</a:t>
-            </a:r>
-          </a:p>
-          <a:p>
-            <a:pPr lvl="1"/>
-            <a:r>
-              <a:rPr lang="en-US" dirty="0"/>
-              <a:t>Limited studies assessing safety risks involved, such as fabrication, omission, and reliability</a:t>
-            </a:r>
-            <a:endParaRPr lang="en-US" altLang="en-US" i="1" dirty="0">
-              <a:solidFill>
-                <a:schemeClr val="tx1"/>
-              </a:solidFill>
-              <a:latin typeface="Arial" panose="020B0604020202020204" pitchFamily="34" charset="0"/>
-            </a:endParaRPr>
-          </a:p>
-          <a:p>
-            <a:endParaRPr lang="en-US" dirty="0"/>
+              <a:t>Limited studies assessing the modes of model failure specifically within breast surgical oncology and their mitigation</a:t>
+            </a:r>
           </a:p>
         </p:txBody>
       </p:sp>
@@ -38541,7 +38884,12 @@
             <p:ph type="title"/>
           </p:nvPr>
         </p:nvSpPr>
-        <p:spPr/>
+        <p:spPr>
+          <a:xfrm>
+            <a:off x="503788" y="1008667"/>
+            <a:ext cx="11184423" cy="555813"/>
+          </a:xfrm>
+        </p:spPr>
         <p:txBody>
           <a:bodyPr/>
           <a:lstStyle/>
@@ -38576,7 +38924,7 @@
           <a:p>
             <a:r>
               <a:rPr lang="en-US" dirty="0"/>
-              <a:t>Introduction – our study</a:t>
+              <a:t>Introduction</a:t>
             </a:r>
           </a:p>
         </p:txBody>
@@ -38613,7 +38961,7 @@
           <a:p>
             <a:r>
               <a:rPr lang="en-US" dirty="0"/>
-              <a:t>We then optimize accuracy and mitigate hallucination risk using prompt engineering and evidence-grounded outputs</a:t>
+              <a:t>We then assess and address the causes of model hallucination using prompt engineering and context</a:t>
             </a:r>
           </a:p>
         </p:txBody>
@@ -38746,7 +39094,12 @@
             <p:ph type="title"/>
           </p:nvPr>
         </p:nvSpPr>
-        <p:spPr/>
+        <p:spPr>
+          <a:xfrm>
+            <a:off x="512064" y="961775"/>
+            <a:ext cx="11184423" cy="555813"/>
+          </a:xfrm>
+        </p:spPr>
         <p:txBody>
           <a:bodyPr/>
           <a:lstStyle/>
@@ -38842,7 +39195,7 @@
           <a:p>
             <a:r>
               <a:rPr lang="en-US" dirty="0"/>
-              <a:t>Evaluate the effect of prompt design (zero-shot vs structured with guardrails) on accuracy and fabrication</a:t>
+              <a:t>Evaluate the effect of prompt design (zero-shot vs structured with guardrails) on fabrication rate</a:t>
             </a:r>
           </a:p>
           <a:p>
@@ -39014,7 +39367,10 @@
           <a:bodyPr/>
           <a:lstStyle/>
           <a:p>
-            <a:endParaRPr lang="en-US"/>
+            <a:r>
+              <a:rPr lang="en-US" dirty="0"/>
+              <a:t>Methods</a:t>
+            </a:r>
           </a:p>
         </p:txBody>
       </p:sp>
